--- a/studies/osu-test-buoy/Capytaine_analysis_OSU_buoy.pptx
+++ b/studies/osu-test-buoy/Capytaine_analysis_OSU_buoy.pptx
@@ -5,26 +5,26 @@
     <p:sldMasterId id="2147483648" r:id="rId1"/>
   </p:sldMasterIdLst>
   <p:sldIdLst>
-    <p:sldId id="256" r:id="rId2"/>
-    <p:sldId id="257" r:id="rId3"/>
-    <p:sldId id="258" r:id="rId4"/>
-    <p:sldId id="259" r:id="rId5"/>
-    <p:sldId id="260" r:id="rId6"/>
-    <p:sldId id="261" r:id="rId7"/>
-    <p:sldId id="262" r:id="rId8"/>
-    <p:sldId id="263" r:id="rId9"/>
-    <p:sldId id="264" r:id="rId10"/>
-    <p:sldId id="265" r:id="rId11"/>
-    <p:sldId id="266" r:id="rId12"/>
-    <p:sldId id="269" r:id="rId13"/>
-    <p:sldId id="270" r:id="rId14"/>
-    <p:sldId id="267" r:id="rId15"/>
-    <p:sldId id="268" r:id="rId16"/>
-    <p:sldId id="271" r:id="rId17"/>
-    <p:sldId id="272" r:id="rId18"/>
-    <p:sldId id="273" r:id="rId19"/>
+    <p:sldId id="256" r:id="rId7"/>
+    <p:sldId id="257" r:id="rId8"/>
+    <p:sldId id="258" r:id="rId9"/>
+    <p:sldId id="259" r:id="rId10"/>
+    <p:sldId id="260" r:id="rId11"/>
+    <p:sldId id="261" r:id="rId12"/>
+    <p:sldId id="262" r:id="rId13"/>
+    <p:sldId id="263" r:id="rId14"/>
+    <p:sldId id="264" r:id="rId15"/>
+    <p:sldId id="265" r:id="rId16"/>
+    <p:sldId id="266" r:id="rId17"/>
+    <p:sldId id="267" r:id="rId18"/>
+    <p:sldId id="268" r:id="rId19"/>
+    <p:sldId id="269" r:id="rId20"/>
+    <p:sldId id="270" r:id="rId21"/>
+    <p:sldId id="271" r:id="rId22"/>
+    <p:sldId id="272" r:id="rId23"/>
+    <p:sldId id="273" r:id="rId24"/>
   </p:sldIdLst>
-  <p:sldSz cx="12192000" cy="6858000"/>
+  <p:sldSz cx="12191695" cy="6858000" type="screen4x3"/>
   <p:notesSz cx="6858000" cy="9144000"/>
   <p:defaultTextStyle>
     <a:defPPr>
@@ -121,51 +121,7 @@
       </a:defRPr>
     </a:lvl9pPr>
   </p:defaultTextStyle>
-  <p:extLst>
-    <p:ext uri="{EFAFB233-063F-42B5-8137-9DF3F51BA10A}">
-      <p15:sldGuideLst xmlns:p15="http://schemas.microsoft.com/office/powerpoint/2012/main">
-        <p15:guide id="1" orient="horz" pos="2160">
-          <p15:clr>
-            <a:srgbClr val="A4A3A4"/>
-          </p15:clr>
-        </p15:guide>
-        <p15:guide id="2" pos="2880">
-          <p15:clr>
-            <a:srgbClr val="A4A3A4"/>
-          </p15:clr>
-        </p15:guide>
-      </p15:sldGuideLst>
-    </p:ext>
-  </p:extLst>
 </p:presentation>
-</file>
-
-<file path=ppt/changesInfos/changesInfo1.xml><?xml version="1.0" encoding="utf-8"?>
-<pc:chgInfo xmlns:a="http://schemas.openxmlformats.org/drawingml/2006/main" xmlns:r="http://schemas.openxmlformats.org/officeDocument/2006/relationships" xmlns:ac="http://schemas.microsoft.com/office/drawing/2013/main/command" xmlns:pc="http://schemas.microsoft.com/office/powerpoint/2013/main/command">
-  <pc:docChgLst>
-    <pc:chgData name="XABIER LOPEZ" userId="ea38421b3c6b4430" providerId="LiveId" clId="{8CA916A7-9F62-4E0A-9195-0AF40AA34857}"/>
-    <pc:docChg chg="modSld sldOrd">
-      <pc:chgData name="XABIER LOPEZ" userId="ea38421b3c6b4430" providerId="LiveId" clId="{8CA916A7-9F62-4E0A-9195-0AF40AA34857}" dt="2026-09-06T13:37:34.866" v="1"/>
-      <pc:docMkLst>
-        <pc:docMk/>
-      </pc:docMkLst>
-      <pc:sldChg chg="ord">
-        <pc:chgData name="XABIER LOPEZ" userId="ea38421b3c6b4430" providerId="LiveId" clId="{8CA916A7-9F62-4E0A-9195-0AF40AA34857}" dt="2026-09-06T13:37:34.866" v="1"/>
-        <pc:sldMkLst>
-          <pc:docMk/>
-          <pc:sldMk cId="0" sldId="267"/>
-        </pc:sldMkLst>
-      </pc:sldChg>
-      <pc:sldChg chg="ord">
-        <pc:chgData name="XABIER LOPEZ" userId="ea38421b3c6b4430" providerId="LiveId" clId="{8CA916A7-9F62-4E0A-9195-0AF40AA34857}" dt="2026-09-06T13:37:34.866" v="1"/>
-        <pc:sldMkLst>
-          <pc:docMk/>
-          <pc:sldMk cId="0" sldId="268"/>
-        </pc:sldMkLst>
-      </pc:sldChg>
-    </pc:docChg>
-  </pc:docChgLst>
-</pc:chgInfo>
 </file>
 
 <file path=ppt/slideLayouts/slideLayout1.xml><?xml version="1.0" encoding="utf-8"?>
@@ -206,9 +162,10 @@
           <a:lstStyle/>
           <a:p>
             <a:r>
-              <a:rPr lang="en-US"/>
+              <a:rPr lang="en-US" smtClean="0"/>
               <a:t>Click to edit Master title style</a:t>
             </a:r>
+            <a:endParaRPr lang="en-US"/>
           </a:p>
         </p:txBody>
       </p:sp>
@@ -324,9 +281,10 @@
           </a:lstStyle>
           <a:p>
             <a:r>
-              <a:rPr lang="en-US"/>
+              <a:rPr lang="en-US" smtClean="0"/>
               <a:t>Click to edit Master subtitle style</a:t>
             </a:r>
+            <a:endParaRPr lang="en-US"/>
           </a:p>
         </p:txBody>
       </p:sp>
@@ -347,7 +305,7 @@
           <a:p>
             <a:fld id="{5BCAD085-E8A6-8845-BD4E-CB4CCA059FC4}" type="datetimeFigureOut">
               <a:rPr lang="en-US" smtClean="0"/>
-              <a:t>9/6/2026</a:t>
+              <a:t>1/27/13</a:t>
             </a:fld>
             <a:endParaRPr lang="en-US"/>
           </a:p>
@@ -441,9 +399,10 @@
           <a:lstStyle/>
           <a:p>
             <a:r>
-              <a:rPr lang="en-US"/>
+              <a:rPr lang="en-US" smtClean="0"/>
               <a:t>Click to edit Master title style</a:t>
             </a:r>
+            <a:endParaRPr lang="en-US"/>
           </a:p>
         </p:txBody>
       </p:sp>
@@ -464,37 +423,38 @@
           <a:p>
             <a:pPr lvl="0"/>
             <a:r>
-              <a:rPr lang="en-US"/>
+              <a:rPr lang="en-US" smtClean="0"/>
               <a:t>Click to edit Master text styles</a:t>
             </a:r>
           </a:p>
           <a:p>
             <a:pPr lvl="1"/>
             <a:r>
-              <a:rPr lang="en-US"/>
+              <a:rPr lang="en-US" smtClean="0"/>
               <a:t>Second level</a:t>
             </a:r>
           </a:p>
           <a:p>
             <a:pPr lvl="2"/>
             <a:r>
-              <a:rPr lang="en-US"/>
+              <a:rPr lang="en-US" smtClean="0"/>
               <a:t>Third level</a:t>
             </a:r>
           </a:p>
           <a:p>
             <a:pPr lvl="3"/>
             <a:r>
-              <a:rPr lang="en-US"/>
+              <a:rPr lang="en-US" smtClean="0"/>
               <a:t>Fourth level</a:t>
             </a:r>
           </a:p>
           <a:p>
             <a:pPr lvl="4"/>
             <a:r>
-              <a:rPr lang="en-US"/>
+              <a:rPr lang="en-US" smtClean="0"/>
               <a:t>Fifth level</a:t>
             </a:r>
+            <a:endParaRPr lang="en-US"/>
           </a:p>
         </p:txBody>
       </p:sp>
@@ -515,7 +475,7 @@
           <a:p>
             <a:fld id="{5BCAD085-E8A6-8845-BD4E-CB4CCA059FC4}" type="datetimeFigureOut">
               <a:rPr lang="en-US" smtClean="0"/>
-              <a:t>9/6/2026</a:t>
+              <a:t>1/27/13</a:t>
             </a:fld>
             <a:endParaRPr lang="en-US"/>
           </a:p>
@@ -614,9 +574,10 @@
           <a:lstStyle/>
           <a:p>
             <a:r>
-              <a:rPr lang="en-US"/>
+              <a:rPr lang="en-US" smtClean="0"/>
               <a:t>Click to edit Master title style</a:t>
             </a:r>
+            <a:endParaRPr lang="en-US"/>
           </a:p>
         </p:txBody>
       </p:sp>
@@ -642,37 +603,38 @@
           <a:p>
             <a:pPr lvl="0"/>
             <a:r>
-              <a:rPr lang="en-US"/>
+              <a:rPr lang="en-US" smtClean="0"/>
               <a:t>Click to edit Master text styles</a:t>
             </a:r>
           </a:p>
           <a:p>
             <a:pPr lvl="1"/>
             <a:r>
-              <a:rPr lang="en-US"/>
+              <a:rPr lang="en-US" smtClean="0"/>
               <a:t>Second level</a:t>
             </a:r>
           </a:p>
           <a:p>
             <a:pPr lvl="2"/>
             <a:r>
-              <a:rPr lang="en-US"/>
+              <a:rPr lang="en-US" smtClean="0"/>
               <a:t>Third level</a:t>
             </a:r>
           </a:p>
           <a:p>
             <a:pPr lvl="3"/>
             <a:r>
-              <a:rPr lang="en-US"/>
+              <a:rPr lang="en-US" smtClean="0"/>
               <a:t>Fourth level</a:t>
             </a:r>
           </a:p>
           <a:p>
             <a:pPr lvl="4"/>
             <a:r>
-              <a:rPr lang="en-US"/>
+              <a:rPr lang="en-US" smtClean="0"/>
               <a:t>Fifth level</a:t>
             </a:r>
+            <a:endParaRPr lang="en-US"/>
           </a:p>
         </p:txBody>
       </p:sp>
@@ -693,7 +655,7 @@
           <a:p>
             <a:fld id="{5BCAD085-E8A6-8845-BD4E-CB4CCA059FC4}" type="datetimeFigureOut">
               <a:rPr lang="en-US" smtClean="0"/>
-              <a:t>9/6/2026</a:t>
+              <a:t>1/27/13</a:t>
             </a:fld>
             <a:endParaRPr lang="en-US"/>
           </a:p>
@@ -787,9 +749,10 @@
           <a:lstStyle/>
           <a:p>
             <a:r>
-              <a:rPr lang="en-US"/>
+              <a:rPr lang="en-US" smtClean="0"/>
               <a:t>Click to edit Master title style</a:t>
             </a:r>
+            <a:endParaRPr lang="en-US"/>
           </a:p>
         </p:txBody>
       </p:sp>
@@ -810,37 +773,38 @@
           <a:p>
             <a:pPr lvl="0"/>
             <a:r>
-              <a:rPr lang="en-US"/>
+              <a:rPr lang="en-US" smtClean="0"/>
               <a:t>Click to edit Master text styles</a:t>
             </a:r>
           </a:p>
           <a:p>
             <a:pPr lvl="1"/>
             <a:r>
-              <a:rPr lang="en-US"/>
+              <a:rPr lang="en-US" smtClean="0"/>
               <a:t>Second level</a:t>
             </a:r>
           </a:p>
           <a:p>
             <a:pPr lvl="2"/>
             <a:r>
-              <a:rPr lang="en-US"/>
+              <a:rPr lang="en-US" smtClean="0"/>
               <a:t>Third level</a:t>
             </a:r>
           </a:p>
           <a:p>
             <a:pPr lvl="3"/>
             <a:r>
-              <a:rPr lang="en-US"/>
+              <a:rPr lang="en-US" smtClean="0"/>
               <a:t>Fourth level</a:t>
             </a:r>
           </a:p>
           <a:p>
             <a:pPr lvl="4"/>
             <a:r>
-              <a:rPr lang="en-US"/>
+              <a:rPr lang="en-US" smtClean="0"/>
               <a:t>Fifth level</a:t>
             </a:r>
+            <a:endParaRPr lang="en-US"/>
           </a:p>
         </p:txBody>
       </p:sp>
@@ -861,7 +825,7 @@
           <a:p>
             <a:fld id="{5BCAD085-E8A6-8845-BD4E-CB4CCA059FC4}" type="datetimeFigureOut">
               <a:rPr lang="en-US" smtClean="0"/>
-              <a:t>9/6/2026</a:t>
+              <a:t>1/27/13</a:t>
             </a:fld>
             <a:endParaRPr lang="en-US"/>
           </a:p>
@@ -964,9 +928,10 @@
           </a:lstStyle>
           <a:p>
             <a:r>
-              <a:rPr lang="en-US"/>
+              <a:rPr lang="en-US" smtClean="0"/>
               <a:t>Click to edit Master title style</a:t>
             </a:r>
+            <a:endParaRPr lang="en-US"/>
           </a:p>
         </p:txBody>
       </p:sp>
@@ -1083,7 +1048,7 @@
           <a:p>
             <a:pPr lvl="0"/>
             <a:r>
-              <a:rPr lang="en-US"/>
+              <a:rPr lang="en-US" smtClean="0"/>
               <a:t>Click to edit Master text styles</a:t>
             </a:r>
           </a:p>
@@ -1106,7 +1071,7 @@
           <a:p>
             <a:fld id="{5BCAD085-E8A6-8845-BD4E-CB4CCA059FC4}" type="datetimeFigureOut">
               <a:rPr lang="en-US" smtClean="0"/>
-              <a:t>9/6/2026</a:t>
+              <a:t>1/27/13</a:t>
             </a:fld>
             <a:endParaRPr lang="en-US"/>
           </a:p>
@@ -1200,9 +1165,10 @@
           <a:lstStyle/>
           <a:p>
             <a:r>
-              <a:rPr lang="en-US"/>
+              <a:rPr lang="en-US" smtClean="0"/>
               <a:t>Click to edit Master title style</a:t>
             </a:r>
+            <a:endParaRPr lang="en-US"/>
           </a:p>
         </p:txBody>
       </p:sp>
@@ -1256,37 +1222,38 @@
           <a:p>
             <a:pPr lvl="0"/>
             <a:r>
-              <a:rPr lang="en-US"/>
+              <a:rPr lang="en-US" smtClean="0"/>
               <a:t>Click to edit Master text styles</a:t>
             </a:r>
           </a:p>
           <a:p>
             <a:pPr lvl="1"/>
             <a:r>
-              <a:rPr lang="en-US"/>
+              <a:rPr lang="en-US" smtClean="0"/>
               <a:t>Second level</a:t>
             </a:r>
           </a:p>
           <a:p>
             <a:pPr lvl="2"/>
             <a:r>
-              <a:rPr lang="en-US"/>
+              <a:rPr lang="en-US" smtClean="0"/>
               <a:t>Third level</a:t>
             </a:r>
           </a:p>
           <a:p>
             <a:pPr lvl="3"/>
             <a:r>
-              <a:rPr lang="en-US"/>
+              <a:rPr lang="en-US" smtClean="0"/>
               <a:t>Fourth level</a:t>
             </a:r>
           </a:p>
           <a:p>
             <a:pPr lvl="4"/>
             <a:r>
-              <a:rPr lang="en-US"/>
+              <a:rPr lang="en-US" smtClean="0"/>
               <a:t>Fifth level</a:t>
             </a:r>
+            <a:endParaRPr lang="en-US"/>
           </a:p>
         </p:txBody>
       </p:sp>
@@ -1340,37 +1307,38 @@
           <a:p>
             <a:pPr lvl="0"/>
             <a:r>
-              <a:rPr lang="en-US"/>
+              <a:rPr lang="en-US" smtClean="0"/>
               <a:t>Click to edit Master text styles</a:t>
             </a:r>
           </a:p>
           <a:p>
             <a:pPr lvl="1"/>
             <a:r>
-              <a:rPr lang="en-US"/>
+              <a:rPr lang="en-US" smtClean="0"/>
               <a:t>Second level</a:t>
             </a:r>
           </a:p>
           <a:p>
             <a:pPr lvl="2"/>
             <a:r>
-              <a:rPr lang="en-US"/>
+              <a:rPr lang="en-US" smtClean="0"/>
               <a:t>Third level</a:t>
             </a:r>
           </a:p>
           <a:p>
             <a:pPr lvl="3"/>
             <a:r>
-              <a:rPr lang="en-US"/>
+              <a:rPr lang="en-US" smtClean="0"/>
               <a:t>Fourth level</a:t>
             </a:r>
           </a:p>
           <a:p>
             <a:pPr lvl="4"/>
             <a:r>
-              <a:rPr lang="en-US"/>
+              <a:rPr lang="en-US" smtClean="0"/>
               <a:t>Fifth level</a:t>
             </a:r>
+            <a:endParaRPr lang="en-US"/>
           </a:p>
         </p:txBody>
       </p:sp>
@@ -1391,7 +1359,7 @@
           <a:p>
             <a:fld id="{5BCAD085-E8A6-8845-BD4E-CB4CCA059FC4}" type="datetimeFigureOut">
               <a:rPr lang="en-US" smtClean="0"/>
-              <a:t>9/6/2026</a:t>
+              <a:t>1/27/13</a:t>
             </a:fld>
             <a:endParaRPr lang="en-US"/>
           </a:p>
@@ -1489,9 +1457,10 @@
           </a:lstStyle>
           <a:p>
             <a:r>
-              <a:rPr lang="en-US"/>
+              <a:rPr lang="en-US" smtClean="0"/>
               <a:t>Click to edit Master title style</a:t>
             </a:r>
+            <a:endParaRPr lang="en-US"/>
           </a:p>
         </p:txBody>
       </p:sp>
@@ -1554,7 +1523,7 @@
           <a:p>
             <a:pPr lvl="0"/>
             <a:r>
-              <a:rPr lang="en-US"/>
+              <a:rPr lang="en-US" smtClean="0"/>
               <a:t>Click to edit Master text styles</a:t>
             </a:r>
           </a:p>
@@ -1610,37 +1579,38 @@
           <a:p>
             <a:pPr lvl="0"/>
             <a:r>
-              <a:rPr lang="en-US"/>
+              <a:rPr lang="en-US" smtClean="0"/>
               <a:t>Click to edit Master text styles</a:t>
             </a:r>
           </a:p>
           <a:p>
             <a:pPr lvl="1"/>
             <a:r>
-              <a:rPr lang="en-US"/>
+              <a:rPr lang="en-US" smtClean="0"/>
               <a:t>Second level</a:t>
             </a:r>
           </a:p>
           <a:p>
             <a:pPr lvl="2"/>
             <a:r>
-              <a:rPr lang="en-US"/>
+              <a:rPr lang="en-US" smtClean="0"/>
               <a:t>Third level</a:t>
             </a:r>
           </a:p>
           <a:p>
             <a:pPr lvl="3"/>
             <a:r>
-              <a:rPr lang="en-US"/>
+              <a:rPr lang="en-US" smtClean="0"/>
               <a:t>Fourth level</a:t>
             </a:r>
           </a:p>
           <a:p>
             <a:pPr lvl="4"/>
             <a:r>
-              <a:rPr lang="en-US"/>
+              <a:rPr lang="en-US" smtClean="0"/>
               <a:t>Fifth level</a:t>
             </a:r>
+            <a:endParaRPr lang="en-US"/>
           </a:p>
         </p:txBody>
       </p:sp>
@@ -1703,7 +1673,7 @@
           <a:p>
             <a:pPr lvl="0"/>
             <a:r>
-              <a:rPr lang="en-US"/>
+              <a:rPr lang="en-US" smtClean="0"/>
               <a:t>Click to edit Master text styles</a:t>
             </a:r>
           </a:p>
@@ -1759,37 +1729,38 @@
           <a:p>
             <a:pPr lvl="0"/>
             <a:r>
-              <a:rPr lang="en-US"/>
+              <a:rPr lang="en-US" smtClean="0"/>
               <a:t>Click to edit Master text styles</a:t>
             </a:r>
           </a:p>
           <a:p>
             <a:pPr lvl="1"/>
             <a:r>
-              <a:rPr lang="en-US"/>
+              <a:rPr lang="en-US" smtClean="0"/>
               <a:t>Second level</a:t>
             </a:r>
           </a:p>
           <a:p>
             <a:pPr lvl="2"/>
             <a:r>
-              <a:rPr lang="en-US"/>
+              <a:rPr lang="en-US" smtClean="0"/>
               <a:t>Third level</a:t>
             </a:r>
           </a:p>
           <a:p>
             <a:pPr lvl="3"/>
             <a:r>
-              <a:rPr lang="en-US"/>
+              <a:rPr lang="en-US" smtClean="0"/>
               <a:t>Fourth level</a:t>
             </a:r>
           </a:p>
           <a:p>
             <a:pPr lvl="4"/>
             <a:r>
-              <a:rPr lang="en-US"/>
+              <a:rPr lang="en-US" smtClean="0"/>
               <a:t>Fifth level</a:t>
             </a:r>
+            <a:endParaRPr lang="en-US"/>
           </a:p>
         </p:txBody>
       </p:sp>
@@ -1810,7 +1781,7 @@
           <a:p>
             <a:fld id="{5BCAD085-E8A6-8845-BD4E-CB4CCA059FC4}" type="datetimeFigureOut">
               <a:rPr lang="en-US" smtClean="0"/>
-              <a:t>9/6/2026</a:t>
+              <a:t>1/27/13</a:t>
             </a:fld>
             <a:endParaRPr lang="en-US"/>
           </a:p>
@@ -1904,9 +1875,10 @@
           <a:lstStyle/>
           <a:p>
             <a:r>
-              <a:rPr lang="en-US"/>
+              <a:rPr lang="en-US" smtClean="0"/>
               <a:t>Click to edit Master title style</a:t>
             </a:r>
+            <a:endParaRPr lang="en-US"/>
           </a:p>
         </p:txBody>
       </p:sp>
@@ -1927,7 +1899,7 @@
           <a:p>
             <a:fld id="{5BCAD085-E8A6-8845-BD4E-CB4CCA059FC4}" type="datetimeFigureOut">
               <a:rPr lang="en-US" smtClean="0"/>
-              <a:t>9/6/2026</a:t>
+              <a:t>1/27/13</a:t>
             </a:fld>
             <a:endParaRPr lang="en-US"/>
           </a:p>
@@ -2022,7 +1994,7 @@
           <a:p>
             <a:fld id="{5BCAD085-E8A6-8845-BD4E-CB4CCA059FC4}" type="datetimeFigureOut">
               <a:rPr lang="en-US" smtClean="0"/>
-              <a:t>9/6/2026</a:t>
+              <a:t>1/27/13</a:t>
             </a:fld>
             <a:endParaRPr lang="en-US"/>
           </a:p>
@@ -2125,9 +2097,10 @@
           </a:lstStyle>
           <a:p>
             <a:r>
-              <a:rPr lang="en-US"/>
+              <a:rPr lang="en-US" smtClean="0"/>
               <a:t>Click to edit Master title style</a:t>
             </a:r>
+            <a:endParaRPr lang="en-US"/>
           </a:p>
         </p:txBody>
       </p:sp>
@@ -2181,37 +2154,38 @@
           <a:p>
             <a:pPr lvl="0"/>
             <a:r>
-              <a:rPr lang="en-US"/>
+              <a:rPr lang="en-US" smtClean="0"/>
               <a:t>Click to edit Master text styles</a:t>
             </a:r>
           </a:p>
           <a:p>
             <a:pPr lvl="1"/>
             <a:r>
-              <a:rPr lang="en-US"/>
+              <a:rPr lang="en-US" smtClean="0"/>
               <a:t>Second level</a:t>
             </a:r>
           </a:p>
           <a:p>
             <a:pPr lvl="2"/>
             <a:r>
-              <a:rPr lang="en-US"/>
+              <a:rPr lang="en-US" smtClean="0"/>
               <a:t>Third level</a:t>
             </a:r>
           </a:p>
           <a:p>
             <a:pPr lvl="3"/>
             <a:r>
-              <a:rPr lang="en-US"/>
+              <a:rPr lang="en-US" smtClean="0"/>
               <a:t>Fourth level</a:t>
             </a:r>
           </a:p>
           <a:p>
             <a:pPr lvl="4"/>
             <a:r>
-              <a:rPr lang="en-US"/>
+              <a:rPr lang="en-US" smtClean="0"/>
               <a:t>Fifth level</a:t>
             </a:r>
+            <a:endParaRPr lang="en-US"/>
           </a:p>
         </p:txBody>
       </p:sp>
@@ -2274,7 +2248,7 @@
           <a:p>
             <a:pPr lvl="0"/>
             <a:r>
-              <a:rPr lang="en-US"/>
+              <a:rPr lang="en-US" smtClean="0"/>
               <a:t>Click to edit Master text styles</a:t>
             </a:r>
           </a:p>
@@ -2297,7 +2271,7 @@
           <a:p>
             <a:fld id="{5BCAD085-E8A6-8845-BD4E-CB4CCA059FC4}" type="datetimeFigureOut">
               <a:rPr lang="en-US" smtClean="0"/>
-              <a:t>9/6/2026</a:t>
+              <a:t>1/27/13</a:t>
             </a:fld>
             <a:endParaRPr lang="en-US"/>
           </a:p>
@@ -2400,9 +2374,10 @@
           </a:lstStyle>
           <a:p>
             <a:r>
-              <a:rPr lang="en-US"/>
+              <a:rPr lang="en-US" smtClean="0"/>
               <a:t>Click to edit Master title style</a:t>
             </a:r>
+            <a:endParaRPr lang="en-US"/>
           </a:p>
         </p:txBody>
       </p:sp>
@@ -2526,7 +2501,7 @@
           <a:p>
             <a:pPr lvl="0"/>
             <a:r>
-              <a:rPr lang="en-US"/>
+              <a:rPr lang="en-US" smtClean="0"/>
               <a:t>Click to edit Master text styles</a:t>
             </a:r>
           </a:p>
@@ -2549,7 +2524,7 @@
           <a:p>
             <a:fld id="{5BCAD085-E8A6-8845-BD4E-CB4CCA059FC4}" type="datetimeFigureOut">
               <a:rPr lang="en-US" smtClean="0"/>
-              <a:t>9/6/2026</a:t>
+              <a:t>1/27/13</a:t>
             </a:fld>
             <a:endParaRPr lang="en-US"/>
           </a:p>
@@ -2658,9 +2633,10 @@
           <a:lstStyle/>
           <a:p>
             <a:r>
-              <a:rPr lang="en-US"/>
+              <a:rPr lang="en-US" smtClean="0"/>
               <a:t>Click to edit Master title style</a:t>
             </a:r>
+            <a:endParaRPr lang="en-US"/>
           </a:p>
         </p:txBody>
       </p:sp>
@@ -2691,37 +2667,38 @@
           <a:p>
             <a:pPr lvl="0"/>
             <a:r>
-              <a:rPr lang="en-US"/>
+              <a:rPr lang="en-US" smtClean="0"/>
               <a:t>Click to edit Master text styles</a:t>
             </a:r>
           </a:p>
           <a:p>
             <a:pPr lvl="1"/>
             <a:r>
-              <a:rPr lang="en-US"/>
+              <a:rPr lang="en-US" smtClean="0"/>
               <a:t>Second level</a:t>
             </a:r>
           </a:p>
           <a:p>
             <a:pPr lvl="2"/>
             <a:r>
-              <a:rPr lang="en-US"/>
+              <a:rPr lang="en-US" smtClean="0"/>
               <a:t>Third level</a:t>
             </a:r>
           </a:p>
           <a:p>
             <a:pPr lvl="3"/>
             <a:r>
-              <a:rPr lang="en-US"/>
+              <a:rPr lang="en-US" smtClean="0"/>
               <a:t>Fourth level</a:t>
             </a:r>
           </a:p>
           <a:p>
             <a:pPr lvl="4"/>
             <a:r>
-              <a:rPr lang="en-US"/>
+              <a:rPr lang="en-US" smtClean="0"/>
               <a:t>Fifth level</a:t>
             </a:r>
+            <a:endParaRPr lang="en-US"/>
           </a:p>
         </p:txBody>
       </p:sp>
@@ -2760,7 +2737,7 @@
           <a:p>
             <a:fld id="{5BCAD085-E8A6-8845-BD4E-CB4CCA059FC4}" type="datetimeFigureOut">
               <a:rPr lang="en-US" smtClean="0"/>
-              <a:t>9/6/2026</a:t>
+              <a:t>1/27/13</a:t>
             </a:fld>
             <a:endParaRPr lang="en-US"/>
           </a:p>
@@ -3119,7 +3096,7 @@
 </file>
 
 <file path=ppt/slides/slide1.xml><?xml version="1.0" encoding="utf-8"?>
-<p:sld xmlns:a="http://schemas.openxmlformats.org/drawingml/2006/main" xmlns:r="http://schemas.openxmlformats.org/officeDocument/2006/relationships" xmlns:p="http://schemas.openxmlformats.org/presentationml/2006/main">
+<p:sld xmlns:a="http://schemas.openxmlformats.org/drawingml/2006/main" xmlns:p="http://schemas.openxmlformats.org/presentationml/2006/main" xmlns:r="http://schemas.openxmlformats.org/officeDocument/2006/relationships">
   <p:cSld>
     <p:bg>
       <p:bgPr>
@@ -3135,14 +3112,7 @@
         <p:cNvGrpSpPr/>
         <p:nvPr/>
       </p:nvGrpSpPr>
-      <p:grpSpPr>
-        <a:xfrm>
-          <a:off x="0" y="0"/>
-          <a:ext cx="0" cy="0"/>
-          <a:chOff x="0" y="0"/>
-          <a:chExt cx="0" cy="0"/>
-        </a:xfrm>
-      </p:grpSpPr>
+      <p:grpSpPr/>
       <p:sp>
         <p:nvSpPr>
           <p:cNvPr id="2" name="Rectangle 1"/>
@@ -3184,7 +3154,6 @@
           <a:lstStyle/>
           <a:p>
             <a:pPr algn="ctr"/>
-            <a:endParaRPr/>
           </a:p>
         </p:txBody>
       </p:sp>
@@ -3229,7 +3198,6 @@
           <a:lstStyle/>
           <a:p>
             <a:pPr algn="ctr"/>
-            <a:endParaRPr/>
           </a:p>
         </p:txBody>
       </p:sp>
@@ -3338,7 +3306,7 @@
 </file>
 
 <file path=ppt/slides/slide10.xml><?xml version="1.0" encoding="utf-8"?>
-<p:sld xmlns:a="http://schemas.openxmlformats.org/drawingml/2006/main" xmlns:r="http://schemas.openxmlformats.org/officeDocument/2006/relationships" xmlns:p="http://schemas.openxmlformats.org/presentationml/2006/main">
+<p:sld xmlns:a="http://schemas.openxmlformats.org/drawingml/2006/main" xmlns:p="http://schemas.openxmlformats.org/presentationml/2006/main" xmlns:r="http://schemas.openxmlformats.org/officeDocument/2006/relationships">
   <p:cSld>
     <p:bg>
       <p:bgPr>
@@ -3354,14 +3322,7 @@
         <p:cNvGrpSpPr/>
         <p:nvPr/>
       </p:nvGrpSpPr>
-      <p:grpSpPr>
-        <a:xfrm>
-          <a:off x="0" y="0"/>
-          <a:ext cx="0" cy="0"/>
-          <a:chOff x="0" y="0"/>
-          <a:chExt cx="0" cy="0"/>
-        </a:xfrm>
-      </p:grpSpPr>
+      <p:grpSpPr/>
       <p:sp>
         <p:nvSpPr>
           <p:cNvPr id="2" name="TextBox 1"/>
@@ -3471,7 +3432,6 @@
           <a:lstStyle/>
           <a:p>
             <a:pPr algn="ctr"/>
-            <a:endParaRPr/>
           </a:p>
         </p:txBody>
       </p:sp>
@@ -3494,32 +3454,14 @@
                 <a:tableStyleId>{5C22544A-7EE6-4342-B048-85BDC9FD1C3A}</a:tableStyleId>
               </a:tblPr>
               <a:tblGrid>
-                <a:gridCol w="2788920">
-                  <a:extLst>
-                    <a:ext uri="{9D8B030D-6E8A-4147-A177-3AD203B41FA5}">
-                      <a16:colId xmlns:a16="http://schemas.microsoft.com/office/drawing/2014/main" val="20000"/>
-                    </a:ext>
-                  </a:extLst>
-                </a:gridCol>
-                <a:gridCol w="2148840">
-                  <a:extLst>
-                    <a:ext uri="{9D8B030D-6E8A-4147-A177-3AD203B41FA5}">
-                      <a16:colId xmlns:a16="http://schemas.microsoft.com/office/drawing/2014/main" val="20001"/>
-                    </a:ext>
-                  </a:extLst>
-                </a:gridCol>
-                <a:gridCol w="6263640">
-                  <a:extLst>
-                    <a:ext uri="{9D8B030D-6E8A-4147-A177-3AD203B41FA5}">
-                      <a16:colId xmlns:a16="http://schemas.microsoft.com/office/drawing/2014/main" val="20002"/>
-                    </a:ext>
-                  </a:extLst>
-                </a:gridCol>
+                <a:gridCol w="2788920"/>
+                <a:gridCol w="2148840"/>
+                <a:gridCol w="6263640"/>
               </a:tblGrid>
               <a:tr h="384048">
                 <a:tc>
                   <a:txBody>
-                    <a:bodyPr/>
+                    <a:bodyPr wrap="square"/>
                     <a:lstStyle/>
                     <a:p>
                       <a:pPr algn="l"/>
@@ -3534,7 +3476,7 @@
                       </a:r>
                     </a:p>
                   </a:txBody>
-                  <a:tcPr marL="88900" marR="63500" marT="25400" marB="25400" anchor="ctr">
+                  <a:tcPr anchor="ctr" marL="88900" marR="63500" marT="25400" marB="25400">
                     <a:solidFill>
                       <a:srgbClr val="0C8B96"/>
                     </a:solidFill>
@@ -3542,7 +3484,7 @@
                 </a:tc>
                 <a:tc>
                   <a:txBody>
-                    <a:bodyPr/>
+                    <a:bodyPr wrap="square"/>
                     <a:lstStyle/>
                     <a:p>
                       <a:pPr algn="ctr"/>
@@ -3557,7 +3499,7 @@
                       </a:r>
                     </a:p>
                   </a:txBody>
-                  <a:tcPr marL="88900" marR="63500" marT="25400" marB="25400" anchor="ctr">
+                  <a:tcPr anchor="ctr" marL="88900" marR="63500" marT="25400" marB="25400">
                     <a:solidFill>
                       <a:srgbClr val="0C8B96"/>
                     </a:solidFill>
@@ -3565,7 +3507,7 @@
                 </a:tc>
                 <a:tc>
                   <a:txBody>
-                    <a:bodyPr/>
+                    <a:bodyPr wrap="square"/>
                     <a:lstStyle/>
                     <a:p>
                       <a:pPr algn="l"/>
@@ -3580,22 +3522,17 @@
                       </a:r>
                     </a:p>
                   </a:txBody>
-                  <a:tcPr marL="88900" marR="63500" marT="25400" marB="25400" anchor="ctr">
+                  <a:tcPr anchor="ctr" marL="88900" marR="63500" marT="25400" marB="25400">
                     <a:solidFill>
                       <a:srgbClr val="0C8B96"/>
                     </a:solidFill>
                   </a:tcPr>
                 </a:tc>
-                <a:extLst>
-                  <a:ext uri="{0D108BD9-81ED-4DB2-BD59-A6C34878D82A}">
-                    <a16:rowId xmlns:a16="http://schemas.microsoft.com/office/drawing/2014/main" val="10000"/>
-                  </a:ext>
-                </a:extLst>
               </a:tr>
               <a:tr h="585216">
                 <a:tc>
                   <a:txBody>
-                    <a:bodyPr/>
+                    <a:bodyPr wrap="square"/>
                     <a:lstStyle/>
                     <a:p>
                       <a:pPr algn="l"/>
@@ -3628,7 +3565,7 @@
                       </a:r>
                     </a:p>
                   </a:txBody>
-                  <a:tcPr marL="88900" marR="63500" marT="25400" marB="25400" anchor="ctr">
+                  <a:tcPr anchor="ctr" marL="88900" marR="63500" marT="25400" marB="25400">
                     <a:solidFill>
                       <a:srgbClr val="F3F8F9"/>
                     </a:solidFill>
@@ -3636,7 +3573,7 @@
                 </a:tc>
                 <a:tc>
                   <a:txBody>
-                    <a:bodyPr/>
+                    <a:bodyPr wrap="square"/>
                     <a:lstStyle/>
                     <a:p>
                       <a:pPr algn="ctr"/>
@@ -3651,7 +3588,7 @@
                       </a:r>
                     </a:p>
                   </a:txBody>
-                  <a:tcPr marL="88900" marR="63500" marT="25400" marB="25400" anchor="ctr">
+                  <a:tcPr anchor="ctr" marL="88900" marR="63500" marT="25400" marB="25400">
                     <a:solidFill>
                       <a:srgbClr val="F3F8F9"/>
                     </a:solidFill>
@@ -3659,7 +3596,7 @@
                 </a:tc>
                 <a:tc>
                   <a:txBody>
-                    <a:bodyPr/>
+                    <a:bodyPr wrap="square"/>
                     <a:lstStyle/>
                     <a:p>
                       <a:pPr algn="l"/>
@@ -3683,22 +3620,17 @@
                       </a:r>
                     </a:p>
                   </a:txBody>
-                  <a:tcPr marL="88900" marR="63500" marT="25400" marB="25400" anchor="ctr">
+                  <a:tcPr anchor="ctr" marL="88900" marR="63500" marT="25400" marB="25400">
                     <a:solidFill>
                       <a:srgbClr val="F3F8F9"/>
                     </a:solidFill>
                   </a:tcPr>
                 </a:tc>
-                <a:extLst>
-                  <a:ext uri="{0D108BD9-81ED-4DB2-BD59-A6C34878D82A}">
-                    <a16:rowId xmlns:a16="http://schemas.microsoft.com/office/drawing/2014/main" val="10001"/>
-                  </a:ext>
-                </a:extLst>
               </a:tr>
               <a:tr h="585216">
                 <a:tc>
                   <a:txBody>
-                    <a:bodyPr/>
+                    <a:bodyPr wrap="square"/>
                     <a:lstStyle/>
                     <a:p>
                       <a:pPr algn="l"/>
@@ -3722,7 +3654,7 @@
                       </a:r>
                     </a:p>
                   </a:txBody>
-                  <a:tcPr marL="88900" marR="63500" marT="25400" marB="25400" anchor="ctr">
+                  <a:tcPr anchor="ctr" marL="88900" marR="63500" marT="25400" marB="25400">
                     <a:solidFill>
                       <a:srgbClr val="FFFFFF"/>
                     </a:solidFill>
@@ -3730,7 +3662,7 @@
                 </a:tc>
                 <a:tc>
                   <a:txBody>
-                    <a:bodyPr/>
+                    <a:bodyPr wrap="square"/>
                     <a:lstStyle/>
                     <a:p>
                       <a:pPr algn="ctr"/>
@@ -3745,7 +3677,7 @@
                       </a:r>
                     </a:p>
                   </a:txBody>
-                  <a:tcPr marL="88900" marR="63500" marT="25400" marB="25400" anchor="ctr">
+                  <a:tcPr anchor="ctr" marL="88900" marR="63500" marT="25400" marB="25400">
                     <a:solidFill>
                       <a:srgbClr val="FFFFFF"/>
                     </a:solidFill>
@@ -3753,7 +3685,7 @@
                 </a:tc>
                 <a:tc>
                   <a:txBody>
-                    <a:bodyPr/>
+                    <a:bodyPr wrap="square"/>
                     <a:lstStyle/>
                     <a:p>
                       <a:pPr algn="l"/>
@@ -3777,22 +3709,17 @@
                       </a:r>
                     </a:p>
                   </a:txBody>
-                  <a:tcPr marL="88900" marR="63500" marT="25400" marB="25400" anchor="ctr">
+                  <a:tcPr anchor="ctr" marL="88900" marR="63500" marT="25400" marB="25400">
                     <a:solidFill>
                       <a:srgbClr val="FFFFFF"/>
                     </a:solidFill>
                   </a:tcPr>
                 </a:tc>
-                <a:extLst>
-                  <a:ext uri="{0D108BD9-81ED-4DB2-BD59-A6C34878D82A}">
-                    <a16:rowId xmlns:a16="http://schemas.microsoft.com/office/drawing/2014/main" val="10002"/>
-                  </a:ext>
-                </a:extLst>
               </a:tr>
               <a:tr h="585216">
                 <a:tc>
                   <a:txBody>
-                    <a:bodyPr/>
+                    <a:bodyPr wrap="square"/>
                     <a:lstStyle/>
                     <a:p>
                       <a:pPr algn="l"/>
@@ -3816,7 +3743,7 @@
                       </a:r>
                     </a:p>
                   </a:txBody>
-                  <a:tcPr marL="88900" marR="63500" marT="25400" marB="25400" anchor="ctr">
+                  <a:tcPr anchor="ctr" marL="88900" marR="63500" marT="25400" marB="25400">
                     <a:solidFill>
                       <a:srgbClr val="F3F8F9"/>
                     </a:solidFill>
@@ -3824,7 +3751,7 @@
                 </a:tc>
                 <a:tc>
                   <a:txBody>
-                    <a:bodyPr/>
+                    <a:bodyPr wrap="square"/>
                     <a:lstStyle/>
                     <a:p>
                       <a:pPr algn="ctr"/>
@@ -3839,7 +3766,7 @@
                       </a:r>
                     </a:p>
                   </a:txBody>
-                  <a:tcPr marL="88900" marR="63500" marT="25400" marB="25400" anchor="ctr">
+                  <a:tcPr anchor="ctr" marL="88900" marR="63500" marT="25400" marB="25400">
                     <a:solidFill>
                       <a:srgbClr val="F3F8F9"/>
                     </a:solidFill>
@@ -3847,7 +3774,7 @@
                 </a:tc>
                 <a:tc>
                   <a:txBody>
-                    <a:bodyPr/>
+                    <a:bodyPr wrap="square"/>
                     <a:lstStyle/>
                     <a:p>
                       <a:pPr algn="l"/>
@@ -3862,22 +3789,17 @@
                       </a:r>
                     </a:p>
                   </a:txBody>
-                  <a:tcPr marL="88900" marR="63500" marT="25400" marB="25400" anchor="ctr">
+                  <a:tcPr anchor="ctr" marL="88900" marR="63500" marT="25400" marB="25400">
                     <a:solidFill>
                       <a:srgbClr val="F3F8F9"/>
                     </a:solidFill>
                   </a:tcPr>
                 </a:tc>
-                <a:extLst>
-                  <a:ext uri="{0D108BD9-81ED-4DB2-BD59-A6C34878D82A}">
-                    <a16:rowId xmlns:a16="http://schemas.microsoft.com/office/drawing/2014/main" val="10003"/>
-                  </a:ext>
-                </a:extLst>
               </a:tr>
               <a:tr h="585216">
                 <a:tc>
                   <a:txBody>
-                    <a:bodyPr/>
+                    <a:bodyPr wrap="square"/>
                     <a:lstStyle/>
                     <a:p>
                       <a:pPr algn="l"/>
@@ -3892,7 +3814,7 @@
                       </a:r>
                     </a:p>
                   </a:txBody>
-                  <a:tcPr marL="88900" marR="63500" marT="25400" marB="25400" anchor="ctr">
+                  <a:tcPr anchor="ctr" marL="88900" marR="63500" marT="25400" marB="25400">
                     <a:solidFill>
                       <a:srgbClr val="FFFFFF"/>
                     </a:solidFill>
@@ -3900,7 +3822,7 @@
                 </a:tc>
                 <a:tc>
                   <a:txBody>
-                    <a:bodyPr/>
+                    <a:bodyPr wrap="square"/>
                     <a:lstStyle/>
                     <a:p>
                       <a:pPr algn="ctr"/>
@@ -3915,7 +3837,7 @@
                       </a:r>
                     </a:p>
                   </a:txBody>
-                  <a:tcPr marL="88900" marR="63500" marT="25400" marB="25400" anchor="ctr">
+                  <a:tcPr anchor="ctr" marL="88900" marR="63500" marT="25400" marB="25400">
                     <a:solidFill>
                       <a:srgbClr val="FFFFFF"/>
                     </a:solidFill>
@@ -3923,7 +3845,7 @@
                 </a:tc>
                 <a:tc>
                   <a:txBody>
-                    <a:bodyPr/>
+                    <a:bodyPr wrap="square"/>
                     <a:lstStyle/>
                     <a:p>
                       <a:pPr algn="l"/>
@@ -3947,22 +3869,17 @@
                       </a:r>
                     </a:p>
                   </a:txBody>
-                  <a:tcPr marL="88900" marR="63500" marT="25400" marB="25400" anchor="ctr">
+                  <a:tcPr anchor="ctr" marL="88900" marR="63500" marT="25400" marB="25400">
                     <a:solidFill>
                       <a:srgbClr val="FFFFFF"/>
                     </a:solidFill>
                   </a:tcPr>
                 </a:tc>
-                <a:extLst>
-                  <a:ext uri="{0D108BD9-81ED-4DB2-BD59-A6C34878D82A}">
-                    <a16:rowId xmlns:a16="http://schemas.microsoft.com/office/drawing/2014/main" val="10004"/>
-                  </a:ext>
-                </a:extLst>
               </a:tr>
               <a:tr h="585216">
                 <a:tc>
                   <a:txBody>
-                    <a:bodyPr/>
+                    <a:bodyPr wrap="square"/>
                     <a:lstStyle/>
                     <a:p>
                       <a:pPr algn="l"/>
@@ -3977,7 +3894,7 @@
                       </a:r>
                     </a:p>
                   </a:txBody>
-                  <a:tcPr marL="88900" marR="63500" marT="25400" marB="25400" anchor="ctr">
+                  <a:tcPr anchor="ctr" marL="88900" marR="63500" marT="25400" marB="25400">
                     <a:solidFill>
                       <a:srgbClr val="F3F8F9"/>
                     </a:solidFill>
@@ -3985,7 +3902,7 @@
                 </a:tc>
                 <a:tc>
                   <a:txBody>
-                    <a:bodyPr/>
+                    <a:bodyPr wrap="square"/>
                     <a:lstStyle/>
                     <a:p>
                       <a:pPr algn="ctr"/>
@@ -4000,7 +3917,7 @@
                       </a:r>
                     </a:p>
                   </a:txBody>
-                  <a:tcPr marL="88900" marR="63500" marT="25400" marB="25400" anchor="ctr">
+                  <a:tcPr anchor="ctr" marL="88900" marR="63500" marT="25400" marB="25400">
                     <a:solidFill>
                       <a:srgbClr val="F3F8F9"/>
                     </a:solidFill>
@@ -4008,7 +3925,7 @@
                 </a:tc>
                 <a:tc>
                   <a:txBody>
-                    <a:bodyPr/>
+                    <a:bodyPr wrap="square"/>
                     <a:lstStyle/>
                     <a:p>
                       <a:pPr algn="l"/>
@@ -4023,22 +3940,17 @@
                       </a:r>
                     </a:p>
                   </a:txBody>
-                  <a:tcPr marL="88900" marR="63500" marT="25400" marB="25400" anchor="ctr">
+                  <a:tcPr anchor="ctr" marL="88900" marR="63500" marT="25400" marB="25400">
                     <a:solidFill>
                       <a:srgbClr val="F3F8F9"/>
                     </a:solidFill>
                   </a:tcPr>
                 </a:tc>
-                <a:extLst>
-                  <a:ext uri="{0D108BD9-81ED-4DB2-BD59-A6C34878D82A}">
-                    <a16:rowId xmlns:a16="http://schemas.microsoft.com/office/drawing/2014/main" val="10005"/>
-                  </a:ext>
-                </a:extLst>
               </a:tr>
               <a:tr h="585216">
                 <a:tc>
                   <a:txBody>
-                    <a:bodyPr/>
+                    <a:bodyPr wrap="square"/>
                     <a:lstStyle/>
                     <a:p>
                       <a:pPr algn="l"/>
@@ -4053,7 +3965,7 @@
                       </a:r>
                     </a:p>
                   </a:txBody>
-                  <a:tcPr marL="88900" marR="63500" marT="25400" marB="25400" anchor="ctr">
+                  <a:tcPr anchor="ctr" marL="88900" marR="63500" marT="25400" marB="25400">
                     <a:solidFill>
                       <a:srgbClr val="FFFFFF"/>
                     </a:solidFill>
@@ -4061,7 +3973,7 @@
                 </a:tc>
                 <a:tc>
                   <a:txBody>
-                    <a:bodyPr/>
+                    <a:bodyPr wrap="square"/>
                     <a:lstStyle/>
                     <a:p>
                       <a:pPr algn="ctr"/>
@@ -4076,7 +3988,7 @@
                       </a:r>
                     </a:p>
                   </a:txBody>
-                  <a:tcPr marL="88900" marR="63500" marT="25400" marB="25400" anchor="ctr">
+                  <a:tcPr anchor="ctr" marL="88900" marR="63500" marT="25400" marB="25400">
                     <a:solidFill>
                       <a:srgbClr val="FFFFFF"/>
                     </a:solidFill>
@@ -4084,7 +3996,7 @@
                 </a:tc>
                 <a:tc>
                   <a:txBody>
-                    <a:bodyPr/>
+                    <a:bodyPr wrap="square"/>
                     <a:lstStyle/>
                     <a:p>
                       <a:pPr algn="l"/>
@@ -4099,22 +4011,17 @@
                       </a:r>
                     </a:p>
                   </a:txBody>
-                  <a:tcPr marL="88900" marR="63500" marT="25400" marB="25400" anchor="ctr">
+                  <a:tcPr anchor="ctr" marL="88900" marR="63500" marT="25400" marB="25400">
                     <a:solidFill>
                       <a:srgbClr val="FFFFFF"/>
                     </a:solidFill>
                   </a:tcPr>
                 </a:tc>
-                <a:extLst>
-                  <a:ext uri="{0D108BD9-81ED-4DB2-BD59-A6C34878D82A}">
-                    <a16:rowId xmlns:a16="http://schemas.microsoft.com/office/drawing/2014/main" val="10006"/>
-                  </a:ext>
-                </a:extLst>
               </a:tr>
               <a:tr h="585216">
                 <a:tc>
                   <a:txBody>
-                    <a:bodyPr/>
+                    <a:bodyPr wrap="square"/>
                     <a:lstStyle/>
                     <a:p>
                       <a:pPr algn="l"/>
@@ -4129,7 +4036,7 @@
                       </a:r>
                     </a:p>
                   </a:txBody>
-                  <a:tcPr marL="88900" marR="63500" marT="25400" marB="25400" anchor="ctr">
+                  <a:tcPr anchor="ctr" marL="88900" marR="63500" marT="25400" marB="25400">
                     <a:solidFill>
                       <a:srgbClr val="F3F8F9"/>
                     </a:solidFill>
@@ -4137,7 +4044,7 @@
                 </a:tc>
                 <a:tc>
                   <a:txBody>
-                    <a:bodyPr/>
+                    <a:bodyPr wrap="square"/>
                     <a:lstStyle/>
                     <a:p>
                       <a:pPr algn="ctr"/>
@@ -4152,7 +4059,7 @@
                       </a:r>
                     </a:p>
                   </a:txBody>
-                  <a:tcPr marL="88900" marR="63500" marT="25400" marB="25400" anchor="ctr">
+                  <a:tcPr anchor="ctr" marL="88900" marR="63500" marT="25400" marB="25400">
                     <a:solidFill>
                       <a:srgbClr val="F3F8F9"/>
                     </a:solidFill>
@@ -4160,7 +4067,7 @@
                 </a:tc>
                 <a:tc>
                   <a:txBody>
-                    <a:bodyPr/>
+                    <a:bodyPr wrap="square"/>
                     <a:lstStyle/>
                     <a:p>
                       <a:pPr algn="l"/>
@@ -4175,17 +4082,12 @@
                       </a:r>
                     </a:p>
                   </a:txBody>
-                  <a:tcPr marL="88900" marR="63500" marT="25400" marB="25400" anchor="ctr">
+                  <a:tcPr anchor="ctr" marL="88900" marR="63500" marT="25400" marB="25400">
                     <a:solidFill>
                       <a:srgbClr val="F3F8F9"/>
                     </a:solidFill>
                   </a:tcPr>
                 </a:tc>
-                <a:extLst>
-                  <a:ext uri="{0D108BD9-81ED-4DB2-BD59-A6C34878D82A}">
-                    <a16:rowId xmlns:a16="http://schemas.microsoft.com/office/drawing/2014/main" val="10007"/>
-                  </a:ext>
-                </a:extLst>
               </a:tr>
             </a:tbl>
           </a:graphicData>
@@ -4243,7 +4145,7 @@
 </file>
 
 <file path=ppt/slides/slide11.xml><?xml version="1.0" encoding="utf-8"?>
-<p:sld xmlns:a="http://schemas.openxmlformats.org/drawingml/2006/main" xmlns:r="http://schemas.openxmlformats.org/officeDocument/2006/relationships" xmlns:p="http://schemas.openxmlformats.org/presentationml/2006/main">
+<p:sld xmlns:a="http://schemas.openxmlformats.org/drawingml/2006/main" xmlns:p="http://schemas.openxmlformats.org/presentationml/2006/main" xmlns:r="http://schemas.openxmlformats.org/officeDocument/2006/relationships">
   <p:cSld>
     <p:bg>
       <p:bgPr>
@@ -4259,14 +4161,7 @@
         <p:cNvGrpSpPr/>
         <p:nvPr/>
       </p:nvGrpSpPr>
-      <p:grpSpPr>
-        <a:xfrm>
-          <a:off x="0" y="0"/>
-          <a:ext cx="0" cy="0"/>
-          <a:chOff x="0" y="0"/>
-          <a:chExt cx="0" cy="0"/>
-        </a:xfrm>
-      </p:grpSpPr>
+      <p:grpSpPr/>
       <p:sp>
         <p:nvSpPr>
           <p:cNvPr id="2" name="TextBox 1"/>
@@ -4376,7 +4271,6 @@
           <a:lstStyle/>
           <a:p>
             <a:pPr algn="ctr"/>
-            <a:endParaRPr/>
           </a:p>
         </p:txBody>
       </p:sp>
@@ -4397,7 +4291,7 @@
         <p:spPr>
           <a:xfrm>
             <a:off x="1051560" y="1691640"/>
-            <a:ext cx="10058400" cy="3923260"/>
+            <a:ext cx="10058400" cy="4014749"/>
           </a:xfrm>
           <a:prstGeom prst="rect">
             <a:avLst/>
@@ -4445,7 +4339,6 @@
           <a:lstStyle/>
           <a:p>
             <a:pPr algn="ctr"/>
-            <a:endParaRPr/>
           </a:p>
         </p:txBody>
       </p:sp>
@@ -4520,7 +4413,7 @@
 </file>
 
 <file path=ppt/slides/slide12.xml><?xml version="1.0" encoding="utf-8"?>
-<p:sld xmlns:a="http://schemas.openxmlformats.org/drawingml/2006/main" xmlns:r="http://schemas.openxmlformats.org/officeDocument/2006/relationships" xmlns:p="http://schemas.openxmlformats.org/presentationml/2006/main">
+<p:sld xmlns:a="http://schemas.openxmlformats.org/drawingml/2006/main" xmlns:p="http://schemas.openxmlformats.org/presentationml/2006/main" xmlns:r="http://schemas.openxmlformats.org/officeDocument/2006/relationships">
   <p:cSld>
     <p:bg>
       <p:bgPr>
@@ -4536,14 +4429,7 @@
         <p:cNvGrpSpPr/>
         <p:nvPr/>
       </p:nvGrpSpPr>
-      <p:grpSpPr>
-        <a:xfrm>
-          <a:off x="0" y="0"/>
-          <a:ext cx="0" cy="0"/>
-          <a:chOff x="0" y="0"/>
-          <a:chExt cx="0" cy="0"/>
-        </a:xfrm>
-      </p:grpSpPr>
+      <p:grpSpPr/>
       <p:sp>
         <p:nvSpPr>
           <p:cNvPr id="2" name="TextBox 1"/>
@@ -4573,7 +4459,7 @@
                 </a:solidFill>
                 <a:latin typeface="Segoe UI"/>
               </a:rPr>
-              <a:t>VALIDATION</a:t>
+              <a:t>THE PHYSICS ①</a:t>
             </a:r>
           </a:p>
         </p:txBody>
@@ -4607,7 +4493,7 @@
                 </a:solidFill>
                 <a:latin typeface="Segoe UI"/>
               </a:rPr>
-              <a:t>Field heave-decay test — a first real-world check</a:t>
+              <a:t>Where does T = 2.5 s come from? — first, without added mass</a:t>
             </a:r>
           </a:p>
         </p:txBody>
@@ -4653,34 +4539,179 @@
           <a:lstStyle/>
           <a:p>
             <a:pPr algn="ctr"/>
-            <a:endParaRPr/>
-          </a:p>
-        </p:txBody>
-      </p:sp>
-      <p:pic>
-        <p:nvPicPr>
-          <p:cNvPr id="5" name="Picture 4" descr="OSU_field_heave_decay.png"/>
-          <p:cNvPicPr>
-            <a:picLocks noChangeAspect="1"/>
-          </p:cNvPicPr>
+          </a:p>
+        </p:txBody>
+      </p:sp>
+      <p:sp>
+        <p:nvSpPr>
+          <p:cNvPr id="5" name="TextBox 4"/>
+          <p:cNvSpPr txBox="1"/>
           <p:nvPr/>
-        </p:nvPicPr>
-        <p:blipFill>
-          <a:blip r:embed="rId2"/>
-          <a:stretch>
-            <a:fillRect/>
-          </a:stretch>
-        </p:blipFill>
-        <p:spPr>
-          <a:xfrm>
-            <a:off x="1051560" y="1572768"/>
-            <a:ext cx="10058400" cy="4526280"/>
-          </a:xfrm>
-          <a:prstGeom prst="rect">
-            <a:avLst/>
-          </a:prstGeom>
-        </p:spPr>
-      </p:pic>
+        </p:nvSpPr>
+        <p:spPr>
+          <a:xfrm>
+            <a:off x="777240" y="1783080"/>
+            <a:ext cx="10698480" cy="4572000"/>
+          </a:xfrm>
+          <a:prstGeom prst="rect">
+            <a:avLst/>
+          </a:prstGeom>
+          <a:noFill/>
+        </p:spPr>
+        <p:txBody>
+          <a:bodyPr wrap="square">
+            <a:spAutoFit/>
+          </a:bodyPr>
+          <a:lstStyle/>
+          <a:p>
+            <a:pPr>
+              <a:spcBef>
+                <a:spcPts val="200"/>
+              </a:spcBef>
+              <a:spcAft>
+                <a:spcPts val="1300"/>
+              </a:spcAft>
+            </a:pPr>
+            <a:r>
+              <a:rPr sz="1800">
+                <a:solidFill>
+                  <a:srgbClr val="0C8B96"/>
+                </a:solidFill>
+                <a:latin typeface="Segoe UI"/>
+              </a:rPr>
+              <a:t>•  </a:t>
+            </a:r>
+            <a:r>
+              <a:rPr sz="1800" b="1" i="0">
+                <a:solidFill>
+                  <a:srgbClr val="25323A"/>
+                </a:solidFill>
+                <a:latin typeface="Segoe UI"/>
+              </a:rPr>
+              <a:t>Heave is a one-DOF oscillator</a:t>
+            </a:r>
+            <a:r>
+              <a:rPr sz="1800" b="0" i="0">
+                <a:solidFill>
+                  <a:srgbClr val="25323A"/>
+                </a:solidFill>
+                <a:latin typeface="Segoe UI"/>
+              </a:rPr>
+              <a:t> — the buoy bobs vertically on the </a:t>
+            </a:r>
+            <a:r>
+              <a:rPr sz="1800" b="1" i="0">
+                <a:solidFill>
+                  <a:srgbClr val="0A5560"/>
+                </a:solidFill>
+                <a:latin typeface="Segoe UI"/>
+              </a:rPr>
+              <a:t>waterplane buoyancy spring</a:t>
+            </a:r>
+            <a:r>
+              <a:rPr sz="1800" b="0" i="0">
+                <a:solidFill>
+                  <a:srgbClr val="25323A"/>
+                </a:solidFill>
+                <a:latin typeface="Segoe UI"/>
+              </a:rPr>
+              <a:t>.</a:t>
+            </a:r>
+          </a:p>
+          <a:p>
+            <a:pPr>
+              <a:spcBef>
+                <a:spcPts val="200"/>
+              </a:spcBef>
+              <a:spcAft>
+                <a:spcPts val="1300"/>
+              </a:spcAft>
+            </a:pPr>
+            <a:r>
+              <a:rPr sz="1800">
+                <a:solidFill>
+                  <a:srgbClr val="0C8B96"/>
+                </a:solidFill>
+                <a:latin typeface="Segoe UI"/>
+              </a:rPr>
+              <a:t>•  </a:t>
+            </a:r>
+            <a:r>
+              <a:rPr sz="1800" b="0" i="0">
+                <a:solidFill>
+                  <a:srgbClr val="25323A"/>
+                </a:solidFill>
+                <a:latin typeface="Segoe UI"/>
+              </a:rPr>
+              <a:t>Stiffness </a:t>
+            </a:r>
+            <a:r>
+              <a:rPr sz="1800" b="1" i="0">
+                <a:solidFill>
+                  <a:srgbClr val="0A5560"/>
+                </a:solidFill>
+                <a:latin typeface="Segoe UI"/>
+              </a:rPr>
+              <a:t>C₃₃ = ρ g A_wp</a:t>
+            </a:r>
+            <a:r>
+              <a:rPr sz="1800" b="0" i="0">
+                <a:solidFill>
+                  <a:srgbClr val="25323A"/>
+                </a:solidFill>
+                <a:latin typeface="Segoe UI"/>
+              </a:rPr>
+              <a:t>: the restoring buoyancy per metre of submergence (A_wp = 6″ spar waterplane area).</a:t>
+            </a:r>
+          </a:p>
+          <a:p>
+            <a:pPr>
+              <a:spcBef>
+                <a:spcPts val="200"/>
+              </a:spcBef>
+              <a:spcAft>
+                <a:spcPts val="1300"/>
+              </a:spcAft>
+            </a:pPr>
+            <a:r>
+              <a:rPr sz="1800">
+                <a:solidFill>
+                  <a:srgbClr val="0C8B96"/>
+                </a:solidFill>
+                <a:latin typeface="Segoe UI"/>
+              </a:rPr>
+              <a:t>•  </a:t>
+            </a:r>
+            <a:r>
+              <a:rPr sz="1800" b="0" i="0">
+                <a:solidFill>
+                  <a:srgbClr val="25323A"/>
+                </a:solidFill>
+                <a:latin typeface="Segoe UI"/>
+              </a:rPr>
+              <a:t>The naive “dry” period uses the </a:t>
+            </a:r>
+            <a:r>
+              <a:rPr sz="1800" b="1" i="0">
+                <a:solidFill>
+                  <a:srgbClr val="25323A"/>
+                </a:solidFill>
+                <a:latin typeface="Segoe UI"/>
+              </a:rPr>
+              <a:t>structural mass M alone</a:t>
+            </a:r>
+            <a:r>
+              <a:rPr sz="1800" b="0" i="0">
+                <a:solidFill>
+                  <a:srgbClr val="25323A"/>
+                </a:solidFill>
+                <a:latin typeface="Segoe UI"/>
+              </a:rPr>
+              <a:t> — no water entrained:</a:t>
+            </a:r>
+          </a:p>
+        </p:txBody>
+      </p:sp>
       <p:sp>
         <p:nvSpPr>
           <p:cNvPr id="6" name="Rectangle 5"/>
@@ -4689,8 +4720,8 @@
         </p:nvSpPr>
         <p:spPr>
           <a:xfrm>
-            <a:off x="777240" y="5943600"/>
-            <a:ext cx="10607040" cy="749808"/>
+            <a:off x="3429000" y="3246120"/>
+            <a:ext cx="5349240" cy="932688"/>
           </a:xfrm>
           <a:prstGeom prst="rect">
             <a:avLst/>
@@ -4722,7 +4753,6 @@
           <a:lstStyle/>
           <a:p>
             <a:pPr algn="ctr"/>
-            <a:endParaRPr/>
           </a:p>
         </p:txBody>
       </p:sp>
@@ -4734,8 +4764,8 @@
         </p:nvSpPr>
         <p:spPr>
           <a:xfrm>
-            <a:off x="960120" y="5980176"/>
-            <a:ext cx="10241280" cy="658368"/>
+            <a:off x="3429000" y="3346704"/>
+            <a:ext cx="5349240" cy="731520"/>
           </a:xfrm>
           <a:prstGeom prst="rect">
             <a:avLst/>
@@ -4750,31 +4780,190 @@
           <a:p>
             <a:pPr algn="ctr"/>
             <a:r>
-              <a:rPr sz="1250" b="1">
+              <a:rPr sz="2600" b="1">
+                <a:solidFill>
+                  <a:srgbClr val="25323A"/>
+                </a:solidFill>
+                <a:latin typeface="Cambria Math"/>
+              </a:rPr>
+              <a:t>T₀ = 2π √( M / C₃₃ )</a:t>
+            </a:r>
+          </a:p>
+        </p:txBody>
+      </p:sp>
+      <p:sp>
+        <p:nvSpPr>
+          <p:cNvPr id="8" name="TextBox 7"/>
+          <p:cNvSpPr txBox="1"/>
+          <p:nvPr/>
+        </p:nvSpPr>
+        <p:spPr>
+          <a:xfrm>
+            <a:off x="777240" y="4370832"/>
+            <a:ext cx="10607040" cy="502920"/>
+          </a:xfrm>
+          <a:prstGeom prst="rect">
+            <a:avLst/>
+          </a:prstGeom>
+          <a:noFill/>
+        </p:spPr>
+        <p:txBody>
+          <a:bodyPr wrap="square">
+            <a:spAutoFit/>
+          </a:bodyPr>
+          <a:lstStyle/>
+          <a:p>
+            <a:pPr algn="ctr"/>
+            <a:r>
+              <a:rPr sz="1700" b="1">
+                <a:solidFill>
+                  <a:srgbClr val="25323A"/>
+                </a:solidFill>
+                <a:latin typeface="Segoe UI"/>
+              </a:rPr>
+              <a:t>M = 21.52 kg</a:t>
+            </a:r>
+            <a:r>
+              <a:rPr sz="1700" b="1">
+                <a:solidFill>
+                  <a:srgbClr val="25323A"/>
+                </a:solidFill>
+                <a:latin typeface="Segoe UI"/>
+              </a:rPr>
+              <a:t>        C₃₃ = 194.5 N/m</a:t>
+            </a:r>
+            <a:r>
+              <a:rPr sz="1700" b="0">
+                <a:solidFill>
+                  <a:srgbClr val="25323A"/>
+                </a:solidFill>
+                <a:latin typeface="Segoe UI"/>
+              </a:rPr>
+              <a:t>        →        </a:t>
+            </a:r>
+            <a:r>
+              <a:rPr sz="2000" b="1">
                 <a:solidFill>
                   <a:srgbClr val="0A5560"/>
                 </a:solidFill>
                 <a:latin typeface="Segoe UI"/>
               </a:rPr>
-              <a:t>Non-official handheld video</a:t>
-            </a:r>
-            <a:r>
-              <a:rPr sz="1250" b="0">
-                <a:solidFill>
-                  <a:srgbClr val="25323A"/>
-                </a:solidFill>
-                <a:latin typeface="Segoe UI"/>
-              </a:rPr>
-              <a:t>, motion-tracked frame-by-frame; the camera pan (~95 px ≫ the heave) is removed by referencing the fixed horizon. Buoy released ≈9.3 s, then rings down — heavily damped, so ~1½ cycles resolve.  </a:t>
-            </a:r>
-            <a:r>
-              <a:rPr sz="1250" b="1">
-                <a:solidFill>
-                  <a:srgbClr val="0A5560"/>
-                </a:solidFill>
-                <a:latin typeface="Segoe UI"/>
-              </a:rPr>
-              <a:t>Period &amp; damping are scale-free.</a:t>
+              <a:t>T₀ = 2.09 s</a:t>
+            </a:r>
+          </a:p>
+        </p:txBody>
+      </p:sp>
+      <p:sp>
+        <p:nvSpPr>
+          <p:cNvPr id="9" name="Rectangle 8"/>
+          <p:cNvSpPr/>
+          <p:nvPr/>
+        </p:nvSpPr>
+        <p:spPr>
+          <a:xfrm>
+            <a:off x="777240" y="5138928"/>
+            <a:ext cx="10607040" cy="1024128"/>
+          </a:xfrm>
+          <a:prstGeom prst="rect">
+            <a:avLst/>
+          </a:prstGeom>
+          <a:solidFill>
+            <a:srgbClr val="EEF6F7"/>
+          </a:solidFill>
+          <a:ln>
+            <a:noFill/>
+          </a:ln>
+          <a:effectLst/>
+        </p:spPr>
+        <p:style>
+          <a:lnRef idx="1">
+            <a:schemeClr val="accent1"/>
+          </a:lnRef>
+          <a:fillRef idx="3">
+            <a:schemeClr val="accent1"/>
+          </a:fillRef>
+          <a:effectRef idx="2">
+            <a:schemeClr val="accent1"/>
+          </a:effectRef>
+          <a:fontRef idx="minor">
+            <a:schemeClr val="lt1"/>
+          </a:fontRef>
+        </p:style>
+        <p:txBody>
+          <a:bodyPr rtlCol="0" anchor="ctr"/>
+          <a:lstStyle/>
+          <a:p>
+            <a:pPr algn="ctr"/>
+          </a:p>
+        </p:txBody>
+      </p:sp>
+      <p:sp>
+        <p:nvSpPr>
+          <p:cNvPr id="10" name="TextBox 9"/>
+          <p:cNvSpPr txBox="1"/>
+          <p:nvPr/>
+        </p:nvSpPr>
+        <p:spPr>
+          <a:xfrm>
+            <a:off x="1005840" y="5230368"/>
+            <a:ext cx="10149840" cy="859536"/>
+          </a:xfrm>
+          <a:prstGeom prst="rect">
+            <a:avLst/>
+          </a:prstGeom>
+          <a:noFill/>
+        </p:spPr>
+        <p:txBody>
+          <a:bodyPr wrap="square" anchor="ctr">
+            <a:spAutoFit/>
+          </a:bodyPr>
+          <a:lstStyle/>
+          <a:p>
+            <a:pPr algn="ctr"/>
+            <a:r>
+              <a:rPr sz="1500" b="0">
+                <a:solidFill>
+                  <a:srgbClr val="25323A"/>
+                </a:solidFill>
+                <a:latin typeface="Segoe UI"/>
+              </a:rPr>
+              <a:t>But the field test measured 2.50 s. </a:t>
+            </a:r>
+            <a:r>
+              <a:rPr sz="1500" b="1">
+                <a:solidFill>
+                  <a:srgbClr val="D1543A"/>
+                </a:solidFill>
+                <a:latin typeface="Segoe UI"/>
+              </a:rPr>
+              <a:t>The buoy behaves ~45% heavier than its structure</a:t>
+            </a:r>
+            <a:r>
+              <a:rPr sz="1500" b="0">
+                <a:solidFill>
+                  <a:srgbClr val="25323A"/>
+                </a:solidFill>
+                <a:latin typeface="Segoe UI"/>
+              </a:rPr>
+              <a:t> — it drags a slug of water with it as it accelerates. That missing inertia is </a:t>
+            </a:r>
+            <a:r>
+              <a:rPr sz="1500" b="1">
+                <a:solidFill>
+                  <a:srgbClr val="D1543A"/>
+                </a:solidFill>
+                <a:latin typeface="Segoe UI"/>
+              </a:rPr>
+              <a:t>added mass</a:t>
+            </a:r>
+            <a:r>
+              <a:rPr sz="1500" b="0">
+                <a:solidFill>
+                  <a:srgbClr val="25323A"/>
+                </a:solidFill>
+                <a:latin typeface="Segoe UI"/>
+              </a:rPr>
+              <a:t>.</a:t>
             </a:r>
           </a:p>
         </p:txBody>
@@ -4788,7 +4977,7 @@
 </file>
 
 <file path=ppt/slides/slide13.xml><?xml version="1.0" encoding="utf-8"?>
-<p:sld xmlns:a="http://schemas.openxmlformats.org/drawingml/2006/main" xmlns:r="http://schemas.openxmlformats.org/officeDocument/2006/relationships" xmlns:p="http://schemas.openxmlformats.org/presentationml/2006/main">
+<p:sld xmlns:a="http://schemas.openxmlformats.org/drawingml/2006/main" xmlns:p="http://schemas.openxmlformats.org/presentationml/2006/main" xmlns:r="http://schemas.openxmlformats.org/officeDocument/2006/relationships">
   <p:cSld>
     <p:bg>
       <p:bgPr>
@@ -4804,14 +4993,7 @@
         <p:cNvGrpSpPr/>
         <p:nvPr/>
       </p:nvGrpSpPr>
-      <p:grpSpPr>
-        <a:xfrm>
-          <a:off x="0" y="0"/>
-          <a:ext cx="0" cy="0"/>
-          <a:chOff x="0" y="0"/>
-          <a:chExt cx="0" cy="0"/>
-        </a:xfrm>
-      </p:grpSpPr>
+      <p:grpSpPr/>
       <p:sp>
         <p:nvSpPr>
           <p:cNvPr id="2" name="TextBox 1"/>
@@ -4841,7 +5023,7 @@
                 </a:solidFill>
                 <a:latin typeface="Segoe UI"/>
               </a:rPr>
-              <a:t>VALIDATION</a:t>
+              <a:t>THE PHYSICS ②</a:t>
             </a:r>
           </a:p>
         </p:txBody>
@@ -4875,7 +5057,7 @@
                 </a:solidFill>
                 <a:latin typeface="Segoe UI"/>
               </a:rPr>
-              <a:t>Model vs field test — period &amp; damping match</a:t>
+              <a:t>Added mass — how Capytaine computes it, and how it sets T</a:t>
             </a:r>
           </a:p>
         </p:txBody>
@@ -4921,7 +5103,1437 @@
           <a:lstStyle/>
           <a:p>
             <a:pPr algn="ctr"/>
-            <a:endParaRPr/>
+          </a:p>
+        </p:txBody>
+      </p:sp>
+      <p:sp>
+        <p:nvSpPr>
+          <p:cNvPr id="5" name="Rectangle 4"/>
+          <p:cNvSpPr/>
+          <p:nvPr/>
+        </p:nvSpPr>
+        <p:spPr>
+          <a:xfrm>
+            <a:off x="502920" y="1737360"/>
+            <a:ext cx="5532120" cy="3913632"/>
+          </a:xfrm>
+          <a:prstGeom prst="rect">
+            <a:avLst/>
+          </a:prstGeom>
+          <a:solidFill>
+            <a:srgbClr val="F7FAFB"/>
+          </a:solidFill>
+          <a:ln w="15875">
+            <a:solidFill>
+              <a:srgbClr val="0C8B96"/>
+            </a:solidFill>
+          </a:ln>
+          <a:effectLst/>
+        </p:spPr>
+        <p:style>
+          <a:lnRef idx="1">
+            <a:schemeClr val="accent1"/>
+          </a:lnRef>
+          <a:fillRef idx="3">
+            <a:schemeClr val="accent1"/>
+          </a:fillRef>
+          <a:effectRef idx="2">
+            <a:schemeClr val="accent1"/>
+          </a:effectRef>
+          <a:fontRef idx="minor">
+            <a:schemeClr val="lt1"/>
+          </a:fontRef>
+        </p:style>
+        <p:txBody>
+          <a:bodyPr rtlCol="0" anchor="ctr"/>
+          <a:lstStyle/>
+          <a:p>
+            <a:pPr algn="ctr"/>
+          </a:p>
+        </p:txBody>
+      </p:sp>
+      <p:sp>
+        <p:nvSpPr>
+          <p:cNvPr id="6" name="Rectangle 5"/>
+          <p:cNvSpPr/>
+          <p:nvPr/>
+        </p:nvSpPr>
+        <p:spPr>
+          <a:xfrm>
+            <a:off x="502920" y="1737360"/>
+            <a:ext cx="5532120" cy="548640"/>
+          </a:xfrm>
+          <a:prstGeom prst="rect">
+            <a:avLst/>
+          </a:prstGeom>
+          <a:solidFill>
+            <a:srgbClr val="0C8B96"/>
+          </a:solidFill>
+          <a:ln>
+            <a:noFill/>
+          </a:ln>
+          <a:effectLst/>
+        </p:spPr>
+        <p:style>
+          <a:lnRef idx="1">
+            <a:schemeClr val="accent1"/>
+          </a:lnRef>
+          <a:fillRef idx="3">
+            <a:schemeClr val="accent1"/>
+          </a:fillRef>
+          <a:effectRef idx="2">
+            <a:schemeClr val="accent1"/>
+          </a:effectRef>
+          <a:fontRef idx="minor">
+            <a:schemeClr val="lt1"/>
+          </a:fontRef>
+        </p:style>
+        <p:txBody>
+          <a:bodyPr rtlCol="0" anchor="ctr"/>
+          <a:lstStyle/>
+          <a:p>
+            <a:pPr algn="ctr"/>
+            <a:r>
+              <a:rPr sz="1700" b="1">
+                <a:solidFill>
+                  <a:srgbClr val="FFFFFF"/>
+                </a:solidFill>
+                <a:latin typeface="Segoe UI"/>
+              </a:rPr>
+              <a:t>HOW CAPYTAINE COMPUTES A</a:t>
+            </a:r>
+          </a:p>
+        </p:txBody>
+      </p:sp>
+      <p:sp>
+        <p:nvSpPr>
+          <p:cNvPr id="7" name="TextBox 6"/>
+          <p:cNvSpPr txBox="1"/>
+          <p:nvPr/>
+        </p:nvSpPr>
+        <p:spPr>
+          <a:xfrm>
+            <a:off x="502920" y="2267712"/>
+            <a:ext cx="5532120" cy="310896"/>
+          </a:xfrm>
+          <a:prstGeom prst="rect">
+            <a:avLst/>
+          </a:prstGeom>
+          <a:noFill/>
+        </p:spPr>
+        <p:txBody>
+          <a:bodyPr wrap="none">
+            <a:spAutoFit/>
+          </a:bodyPr>
+          <a:lstStyle/>
+          <a:p>
+            <a:pPr algn="ctr"/>
+            <a:r>
+              <a:rPr sz="1050" i="1">
+                <a:solidFill>
+                  <a:srgbClr val="54636D"/>
+                </a:solidFill>
+                <a:latin typeface="Segoe UI"/>
+              </a:rPr>
+              <a:t>radiation problem · one run · per frequency ω</a:t>
+            </a:r>
+          </a:p>
+        </p:txBody>
+      </p:sp>
+      <p:sp>
+        <p:nvSpPr>
+          <p:cNvPr id="8" name="TextBox 7"/>
+          <p:cNvSpPr txBox="1"/>
+          <p:nvPr/>
+        </p:nvSpPr>
+        <p:spPr>
+          <a:xfrm>
+            <a:off x="758952" y="2670048"/>
+            <a:ext cx="5056631" cy="2862072"/>
+          </a:xfrm>
+          <a:prstGeom prst="rect">
+            <a:avLst/>
+          </a:prstGeom>
+          <a:noFill/>
+        </p:spPr>
+        <p:txBody>
+          <a:bodyPr wrap="square">
+            <a:spAutoFit/>
+          </a:bodyPr>
+          <a:lstStyle/>
+          <a:p>
+            <a:pPr>
+              <a:spcAft>
+                <a:spcPts val="600"/>
+              </a:spcAft>
+            </a:pPr>
+            <a:r>
+              <a:rPr sz="1300">
+                <a:solidFill>
+                  <a:srgbClr val="0C8B96"/>
+                </a:solidFill>
+                <a:latin typeface="Segoe UI"/>
+              </a:rPr>
+              <a:t>•  </a:t>
+            </a:r>
+            <a:r>
+              <a:rPr sz="1300" b="0" i="0">
+                <a:solidFill>
+                  <a:srgbClr val="25323A"/>
+                </a:solidFill>
+                <a:latin typeface="Segoe UI"/>
+              </a:rPr>
+              <a:t>Force the hull to oscillate in still water at ω (heave DOF, no incoming waves).</a:t>
+            </a:r>
+          </a:p>
+          <a:p>
+            <a:pPr>
+              <a:spcAft>
+                <a:spcPts val="600"/>
+              </a:spcAft>
+            </a:pPr>
+            <a:r>
+              <a:rPr sz="1300">
+                <a:solidFill>
+                  <a:srgbClr val="0C8B96"/>
+                </a:solidFill>
+                <a:latin typeface="Segoe UI"/>
+              </a:rPr>
+              <a:t>•  </a:t>
+            </a:r>
+            <a:r>
+              <a:rPr sz="1300" b="0" i="0">
+                <a:solidFill>
+                  <a:srgbClr val="25323A"/>
+                </a:solidFill>
+                <a:latin typeface="Segoe UI"/>
+              </a:rPr>
+              <a:t>Integrate the flow pressure over the hull → the hydrodynamic reaction force.</a:t>
+            </a:r>
+          </a:p>
+          <a:p>
+            <a:pPr>
+              <a:spcAft>
+                <a:spcPts val="600"/>
+              </a:spcAft>
+            </a:pPr>
+            <a:r>
+              <a:rPr sz="1300">
+                <a:solidFill>
+                  <a:srgbClr val="0C8B96"/>
+                </a:solidFill>
+                <a:latin typeface="Segoe UI"/>
+              </a:rPr>
+              <a:t>•  </a:t>
+            </a:r>
+            <a:r>
+              <a:rPr sz="1300" b="1" i="0">
+                <a:solidFill>
+                  <a:srgbClr val="25323A"/>
+                </a:solidFill>
+                <a:latin typeface="Segoe UI"/>
+              </a:rPr>
+              <a:t>Split that force by phase:</a:t>
+            </a:r>
+          </a:p>
+          <a:p>
+            <a:pPr>
+              <a:spcAft>
+                <a:spcPts val="600"/>
+              </a:spcAft>
+            </a:pPr>
+            <a:r>
+              <a:rPr sz="1300">
+                <a:solidFill>
+                  <a:srgbClr val="0C8B96"/>
+                </a:solidFill>
+                <a:latin typeface="Segoe UI"/>
+              </a:rPr>
+              <a:t>    – </a:t>
+            </a:r>
+            <a:r>
+              <a:rPr sz="1300" b="0" i="0">
+                <a:solidFill>
+                  <a:srgbClr val="0A5560"/>
+                </a:solidFill>
+                <a:latin typeface="Segoe UI"/>
+              </a:rPr>
+              <a:t>∝ acceleration  →  added mass A(ω)</a:t>
+            </a:r>
+          </a:p>
+          <a:p>
+            <a:pPr>
+              <a:spcAft>
+                <a:spcPts val="600"/>
+              </a:spcAft>
+            </a:pPr>
+            <a:r>
+              <a:rPr sz="1300">
+                <a:solidFill>
+                  <a:srgbClr val="0C8B96"/>
+                </a:solidFill>
+                <a:latin typeface="Segoe UI"/>
+              </a:rPr>
+              <a:t>    – </a:t>
+            </a:r>
+            <a:r>
+              <a:rPr sz="1300" b="0" i="0">
+                <a:solidFill>
+                  <a:srgbClr val="54636D"/>
+                </a:solidFill>
+                <a:latin typeface="Segoe UI"/>
+              </a:rPr>
+              <a:t>∝ velocity  →  radiation damping B(ω)</a:t>
+            </a:r>
+          </a:p>
+          <a:p>
+            <a:pPr>
+              <a:spcAft>
+                <a:spcPts val="600"/>
+              </a:spcAft>
+            </a:pPr>
+            <a:r>
+              <a:rPr sz="1300">
+                <a:solidFill>
+                  <a:srgbClr val="0C8B96"/>
+                </a:solidFill>
+                <a:latin typeface="Segoe UI"/>
+              </a:rPr>
+              <a:t>⇒  </a:t>
+            </a:r>
+            <a:r>
+              <a:rPr sz="1300" b="1" i="0">
+                <a:solidFill>
+                  <a:srgbClr val="25323A"/>
+                </a:solidFill>
+                <a:latin typeface="Segoe UI"/>
+              </a:rPr>
+              <a:t>F_rad = −A(ω)·ẍ − B(ω)·ẋ</a:t>
+            </a:r>
+          </a:p>
+          <a:p>
+            <a:pPr>
+              <a:spcAft>
+                <a:spcPts val="600"/>
+              </a:spcAft>
+            </a:pPr>
+            <a:r>
+              <a:rPr sz="1300">
+                <a:solidFill>
+                  <a:srgbClr val="0C8B96"/>
+                </a:solidFill>
+                <a:latin typeface="Segoe UI"/>
+              </a:rPr>
+              <a:t>⇒  </a:t>
+            </a:r>
+            <a:r>
+              <a:rPr sz="1300" b="1" i="0">
+                <a:solidFill>
+                  <a:srgbClr val="0A5560"/>
+                </a:solidFill>
+                <a:latin typeface="Segoe UI"/>
+              </a:rPr>
+              <a:t>A∞ (ω→∞ limit) = 9.7 kg ≈ 45% of M — mostly the broad plate.</a:t>
+            </a:r>
+          </a:p>
+        </p:txBody>
+      </p:sp>
+      <p:sp>
+        <p:nvSpPr>
+          <p:cNvPr id="9" name="Rectangle 8"/>
+          <p:cNvSpPr/>
+          <p:nvPr/>
+        </p:nvSpPr>
+        <p:spPr>
+          <a:xfrm>
+            <a:off x="6153912" y="1737360"/>
+            <a:ext cx="5532120" cy="3913632"/>
+          </a:xfrm>
+          <a:prstGeom prst="rect">
+            <a:avLst/>
+          </a:prstGeom>
+          <a:solidFill>
+            <a:srgbClr val="F7FAFB"/>
+          </a:solidFill>
+          <a:ln w="15875">
+            <a:solidFill>
+              <a:srgbClr val="0A5560"/>
+            </a:solidFill>
+          </a:ln>
+          <a:effectLst/>
+        </p:spPr>
+        <p:style>
+          <a:lnRef idx="1">
+            <a:schemeClr val="accent1"/>
+          </a:lnRef>
+          <a:fillRef idx="3">
+            <a:schemeClr val="accent1"/>
+          </a:fillRef>
+          <a:effectRef idx="2">
+            <a:schemeClr val="accent1"/>
+          </a:effectRef>
+          <a:fontRef idx="minor">
+            <a:schemeClr val="lt1"/>
+          </a:fontRef>
+        </p:style>
+        <p:txBody>
+          <a:bodyPr rtlCol="0" anchor="ctr"/>
+          <a:lstStyle/>
+          <a:p>
+            <a:pPr algn="ctr"/>
+          </a:p>
+        </p:txBody>
+      </p:sp>
+      <p:sp>
+        <p:nvSpPr>
+          <p:cNvPr id="10" name="Rectangle 9"/>
+          <p:cNvSpPr/>
+          <p:nvPr/>
+        </p:nvSpPr>
+        <p:spPr>
+          <a:xfrm>
+            <a:off x="6153912" y="1737360"/>
+            <a:ext cx="5532120" cy="548640"/>
+          </a:xfrm>
+          <a:prstGeom prst="rect">
+            <a:avLst/>
+          </a:prstGeom>
+          <a:solidFill>
+            <a:srgbClr val="0A5560"/>
+          </a:solidFill>
+          <a:ln>
+            <a:noFill/>
+          </a:ln>
+          <a:effectLst/>
+        </p:spPr>
+        <p:style>
+          <a:lnRef idx="1">
+            <a:schemeClr val="accent1"/>
+          </a:lnRef>
+          <a:fillRef idx="3">
+            <a:schemeClr val="accent1"/>
+          </a:fillRef>
+          <a:effectRef idx="2">
+            <a:schemeClr val="accent1"/>
+          </a:effectRef>
+          <a:fontRef idx="minor">
+            <a:schemeClr val="lt1"/>
+          </a:fontRef>
+        </p:style>
+        <p:txBody>
+          <a:bodyPr rtlCol="0" anchor="ctr"/>
+          <a:lstStyle/>
+          <a:p>
+            <a:pPr algn="ctr"/>
+            <a:r>
+              <a:rPr sz="1700" b="1">
+                <a:solidFill>
+                  <a:srgbClr val="FFFFFF"/>
+                </a:solidFill>
+                <a:latin typeface="Segoe UI"/>
+              </a:rPr>
+              <a:t>HOW A SETS THE PERIOD</a:t>
+            </a:r>
+          </a:p>
+        </p:txBody>
+      </p:sp>
+      <p:sp>
+        <p:nvSpPr>
+          <p:cNvPr id="11" name="TextBox 10"/>
+          <p:cNvSpPr txBox="1"/>
+          <p:nvPr/>
+        </p:nvSpPr>
+        <p:spPr>
+          <a:xfrm>
+            <a:off x="6153912" y="2267712"/>
+            <a:ext cx="5532120" cy="310896"/>
+          </a:xfrm>
+          <a:prstGeom prst="rect">
+            <a:avLst/>
+          </a:prstGeom>
+          <a:noFill/>
+        </p:spPr>
+        <p:txBody>
+          <a:bodyPr wrap="none">
+            <a:spAutoFit/>
+          </a:bodyPr>
+          <a:lstStyle/>
+          <a:p>
+            <a:pPr algn="ctr"/>
+            <a:r>
+              <a:rPr sz="1050" i="1">
+                <a:solidFill>
+                  <a:srgbClr val="54636D"/>
+                </a:solidFill>
+                <a:latin typeface="Segoe UI"/>
+              </a:rPr>
+              <a:t>extra inertia → longer period</a:t>
+            </a:r>
+          </a:p>
+        </p:txBody>
+      </p:sp>
+      <p:sp>
+        <p:nvSpPr>
+          <p:cNvPr id="12" name="TextBox 11"/>
+          <p:cNvSpPr txBox="1"/>
+          <p:nvPr/>
+        </p:nvSpPr>
+        <p:spPr>
+          <a:xfrm>
+            <a:off x="6409944" y="2670048"/>
+            <a:ext cx="5056631" cy="2862072"/>
+          </a:xfrm>
+          <a:prstGeom prst="rect">
+            <a:avLst/>
+          </a:prstGeom>
+          <a:noFill/>
+        </p:spPr>
+        <p:txBody>
+          <a:bodyPr wrap="square">
+            <a:spAutoFit/>
+          </a:bodyPr>
+          <a:lstStyle/>
+          <a:p>
+            <a:pPr>
+              <a:spcAft>
+                <a:spcPts val="600"/>
+              </a:spcAft>
+            </a:pPr>
+            <a:r>
+              <a:rPr sz="1300">
+                <a:solidFill>
+                  <a:srgbClr val="0A5560"/>
+                </a:solidFill>
+                <a:latin typeface="Segoe UI"/>
+              </a:rPr>
+              <a:t>•  </a:t>
+            </a:r>
+            <a:r>
+              <a:rPr sz="1300" b="0" i="0">
+                <a:solidFill>
+                  <a:srgbClr val="25323A"/>
+                </a:solidFill>
+                <a:latin typeface="Segoe UI"/>
+              </a:rPr>
+              <a:t>Add A to the mass in the same oscillator:</a:t>
+            </a:r>
+          </a:p>
+          <a:p>
+            <a:pPr>
+              <a:spcAft>
+                <a:spcPts val="600"/>
+              </a:spcAft>
+            </a:pPr>
+            <a:r>
+              <a:rPr sz="1300">
+                <a:solidFill>
+                  <a:srgbClr val="0A5560"/>
+                </a:solidFill>
+                <a:latin typeface="Segoe UI"/>
+              </a:rPr>
+              <a:t>•  </a:t>
+            </a:r>
+            <a:r>
+              <a:rPr sz="1300" b="1" i="0">
+                <a:solidFill>
+                  <a:srgbClr val="0A5560"/>
+                </a:solidFill>
+                <a:latin typeface="Segoe UI"/>
+              </a:rPr>
+              <a:t>T = 2π √( (M + A) / C₃₃ )</a:t>
+            </a:r>
+          </a:p>
+          <a:p>
+            <a:pPr>
+              <a:spcAft>
+                <a:spcPts val="600"/>
+              </a:spcAft>
+            </a:pPr>
+            <a:r>
+              <a:rPr sz="1300">
+                <a:solidFill>
+                  <a:srgbClr val="0A5560"/>
+                </a:solidFill>
+                <a:latin typeface="Segoe UI"/>
+              </a:rPr>
+              <a:t>•  </a:t>
+            </a:r>
+            <a:r>
+              <a:rPr sz="1300" b="0" i="0">
+                <a:solidFill>
+                  <a:srgbClr val="25323A"/>
+                </a:solidFill>
+                <a:latin typeface="Segoe UI"/>
+              </a:rPr>
+              <a:t>Period-stretch factor = √((M+A)/M)</a:t>
+            </a:r>
+          </a:p>
+          <a:p>
+            <a:pPr>
+              <a:spcAft>
+                <a:spcPts val="600"/>
+              </a:spcAft>
+            </a:pPr>
+            <a:r>
+              <a:rPr sz="1300">
+                <a:solidFill>
+                  <a:srgbClr val="0A5560"/>
+                </a:solidFill>
+                <a:latin typeface="Segoe UI"/>
+              </a:rPr>
+              <a:t>•  </a:t>
+            </a:r>
+            <a:r>
+              <a:rPr sz="1300" b="1" i="0">
+                <a:solidFill>
+                  <a:srgbClr val="25323A"/>
+                </a:solidFill>
+                <a:latin typeface="Segoe UI"/>
+              </a:rPr>
+              <a:t>= √(31.2 / 21.5) = 1.205</a:t>
+            </a:r>
+          </a:p>
+          <a:p>
+            <a:pPr>
+              <a:spcAft>
+                <a:spcPts val="600"/>
+              </a:spcAft>
+            </a:pPr>
+            <a:r>
+              <a:rPr sz="1300">
+                <a:solidFill>
+                  <a:srgbClr val="0A5560"/>
+                </a:solidFill>
+                <a:latin typeface="Segoe UI"/>
+              </a:rPr>
+              <a:t>⇒  </a:t>
+            </a:r>
+            <a:r>
+              <a:rPr sz="1300" b="1" i="0">
+                <a:solidFill>
+                  <a:srgbClr val="0A5560"/>
+                </a:solidFill>
+                <a:latin typeface="Segoe UI"/>
+              </a:rPr>
+              <a:t>2.09 s  ×  1.205  =  2.52 s</a:t>
+            </a:r>
+          </a:p>
+          <a:p>
+            <a:pPr>
+              <a:spcAft>
+                <a:spcPts val="600"/>
+              </a:spcAft>
+            </a:pPr>
+            <a:r>
+              <a:rPr sz="1300">
+                <a:solidFill>
+                  <a:srgbClr val="0A5560"/>
+                </a:solidFill>
+                <a:latin typeface="Segoe UI"/>
+              </a:rPr>
+              <a:t>•  </a:t>
+            </a:r>
+            <a:r>
+              <a:rPr sz="1300" b="0" i="1">
+                <a:solidFill>
+                  <a:srgbClr val="25323A"/>
+                </a:solidFill>
+                <a:latin typeface="Segoe UI"/>
+              </a:rPr>
+              <a:t>Heave inertia is ~45% water — A moves the period; C₃₃ is known, so the period is a clean prediction, the damping is the measurement.</a:t>
+            </a:r>
+          </a:p>
+        </p:txBody>
+      </p:sp>
+      <p:sp>
+        <p:nvSpPr>
+          <p:cNvPr id="13" name="Rectangle 12"/>
+          <p:cNvSpPr/>
+          <p:nvPr/>
+        </p:nvSpPr>
+        <p:spPr>
+          <a:xfrm>
+            <a:off x="777240" y="5852160"/>
+            <a:ext cx="10927080" cy="713232"/>
+          </a:xfrm>
+          <a:prstGeom prst="rect">
+            <a:avLst/>
+          </a:prstGeom>
+          <a:solidFill>
+            <a:srgbClr val="EEF6F7"/>
+          </a:solidFill>
+          <a:ln>
+            <a:noFill/>
+          </a:ln>
+          <a:effectLst/>
+        </p:spPr>
+        <p:style>
+          <a:lnRef idx="1">
+            <a:schemeClr val="accent1"/>
+          </a:lnRef>
+          <a:fillRef idx="3">
+            <a:schemeClr val="accent1"/>
+          </a:fillRef>
+          <a:effectRef idx="2">
+            <a:schemeClr val="accent1"/>
+          </a:effectRef>
+          <a:fontRef idx="minor">
+            <a:schemeClr val="lt1"/>
+          </a:fontRef>
+        </p:style>
+        <p:txBody>
+          <a:bodyPr rtlCol="0" anchor="ctr"/>
+          <a:lstStyle/>
+          <a:p>
+            <a:pPr algn="ctr"/>
+          </a:p>
+        </p:txBody>
+      </p:sp>
+      <p:sp>
+        <p:nvSpPr>
+          <p:cNvPr id="14" name="TextBox 13"/>
+          <p:cNvSpPr txBox="1"/>
+          <p:nvPr/>
+        </p:nvSpPr>
+        <p:spPr>
+          <a:xfrm>
+            <a:off x="1005840" y="5888736"/>
+            <a:ext cx="10515600" cy="640080"/>
+          </a:xfrm>
+          <a:prstGeom prst="rect">
+            <a:avLst/>
+          </a:prstGeom>
+          <a:noFill/>
+        </p:spPr>
+        <p:txBody>
+          <a:bodyPr wrap="square" anchor="ctr">
+            <a:spAutoFit/>
+          </a:bodyPr>
+          <a:lstStyle/>
+          <a:p>
+            <a:pPr algn="ctr"/>
+            <a:r>
+              <a:rPr sz="1300" b="1">
+                <a:solidFill>
+                  <a:srgbClr val="0A5560"/>
+                </a:solidFill>
+                <a:latin typeface="Segoe UI"/>
+              </a:rPr>
+              <a:t>The field test (2.50 s) lands on the WET period 2.52 s</a:t>
+            </a:r>
+            <a:r>
+              <a:rPr sz="1300" b="0">
+                <a:solidFill>
+                  <a:srgbClr val="25323A"/>
+                </a:solidFill>
+                <a:latin typeface="Segoe UI"/>
+              </a:rPr>
+              <a:t> — not the dry 2.09 s. Direct evidence the entrained-water added mass (~9.7 kg) is real and correctly sized.</a:t>
+            </a:r>
+          </a:p>
+        </p:txBody>
+      </p:sp>
+    </p:spTree>
+  </p:cSld>
+  <p:clrMapOvr>
+    <a:masterClrMapping/>
+  </p:clrMapOvr>
+</p:sld>
+</file>
+
+<file path=ppt/slides/slide14.xml><?xml version="1.0" encoding="utf-8"?>
+<p:sld xmlns:a="http://schemas.openxmlformats.org/drawingml/2006/main" xmlns:p="http://schemas.openxmlformats.org/presentationml/2006/main" xmlns:r="http://schemas.openxmlformats.org/officeDocument/2006/relationships">
+  <p:cSld>
+    <p:bg>
+      <p:bgPr>
+        <a:solidFill>
+          <a:srgbClr val="FFFFFF"/>
+        </a:solidFill>
+        <a:effectLst/>
+      </p:bgPr>
+    </p:bg>
+    <p:spTree>
+      <p:nvGrpSpPr>
+        <p:cNvPr id="1" name=""/>
+        <p:cNvGrpSpPr/>
+        <p:nvPr/>
+      </p:nvGrpSpPr>
+      <p:grpSpPr/>
+      <p:sp>
+        <p:nvSpPr>
+          <p:cNvPr id="2" name="TextBox 1"/>
+          <p:cNvSpPr txBox="1"/>
+          <p:nvPr/>
+        </p:nvSpPr>
+        <p:spPr>
+          <a:xfrm>
+            <a:off x="640080" y="384048"/>
+            <a:ext cx="10972800" cy="365760"/>
+          </a:xfrm>
+          <a:prstGeom prst="rect">
+            <a:avLst/>
+          </a:prstGeom>
+          <a:noFill/>
+        </p:spPr>
+        <p:txBody>
+          <a:bodyPr wrap="none">
+            <a:spAutoFit/>
+          </a:bodyPr>
+          <a:lstStyle/>
+          <a:p>
+            <a:r>
+              <a:rPr sz="1300" b="1">
+                <a:solidFill>
+                  <a:srgbClr val="0C8B96"/>
+                </a:solidFill>
+                <a:latin typeface="Segoe UI"/>
+              </a:rPr>
+              <a:t>VALIDATION</a:t>
+            </a:r>
+          </a:p>
+        </p:txBody>
+      </p:sp>
+      <p:sp>
+        <p:nvSpPr>
+          <p:cNvPr id="3" name="TextBox 2"/>
+          <p:cNvSpPr txBox="1"/>
+          <p:nvPr/>
+        </p:nvSpPr>
+        <p:spPr>
+          <a:xfrm>
+            <a:off x="640080" y="658368"/>
+            <a:ext cx="10972800" cy="822960"/>
+          </a:xfrm>
+          <a:prstGeom prst="rect">
+            <a:avLst/>
+          </a:prstGeom>
+          <a:noFill/>
+        </p:spPr>
+        <p:txBody>
+          <a:bodyPr wrap="none">
+            <a:spAutoFit/>
+          </a:bodyPr>
+          <a:lstStyle/>
+          <a:p>
+            <a:r>
+              <a:rPr sz="3000" b="1">
+                <a:solidFill>
+                  <a:srgbClr val="25323A"/>
+                </a:solidFill>
+                <a:latin typeface="Segoe UI"/>
+              </a:rPr>
+              <a:t>Field heave-decay test — a first real-world check</a:t>
+            </a:r>
+          </a:p>
+        </p:txBody>
+      </p:sp>
+      <p:sp>
+        <p:nvSpPr>
+          <p:cNvPr id="4" name="Rectangle 3"/>
+          <p:cNvSpPr/>
+          <p:nvPr/>
+        </p:nvSpPr>
+        <p:spPr>
+          <a:xfrm>
+            <a:off x="658368" y="1444752"/>
+            <a:ext cx="2011680" cy="54864"/>
+          </a:xfrm>
+          <a:prstGeom prst="rect">
+            <a:avLst/>
+          </a:prstGeom>
+          <a:solidFill>
+            <a:srgbClr val="0C8B96"/>
+          </a:solidFill>
+          <a:ln>
+            <a:noFill/>
+          </a:ln>
+          <a:effectLst/>
+        </p:spPr>
+        <p:style>
+          <a:lnRef idx="1">
+            <a:schemeClr val="accent1"/>
+          </a:lnRef>
+          <a:fillRef idx="3">
+            <a:schemeClr val="accent1"/>
+          </a:fillRef>
+          <a:effectRef idx="2">
+            <a:schemeClr val="accent1"/>
+          </a:effectRef>
+          <a:fontRef idx="minor">
+            <a:schemeClr val="lt1"/>
+          </a:fontRef>
+        </p:style>
+        <p:txBody>
+          <a:bodyPr rtlCol="0" anchor="ctr"/>
+          <a:lstStyle/>
+          <a:p>
+            <a:pPr algn="ctr"/>
+          </a:p>
+        </p:txBody>
+      </p:sp>
+      <p:pic>
+        <p:nvPicPr>
+          <p:cNvPr id="5" name="Picture 4" descr="OSU_field_heave_decay.png"/>
+          <p:cNvPicPr>
+            <a:picLocks noChangeAspect="1"/>
+          </p:cNvPicPr>
+          <p:nvPr/>
+        </p:nvPicPr>
+        <p:blipFill>
+          <a:blip r:embed="rId2"/>
+          <a:stretch>
+            <a:fillRect/>
+          </a:stretch>
+        </p:blipFill>
+        <p:spPr>
+          <a:xfrm>
+            <a:off x="320040" y="1828800"/>
+            <a:ext cx="7589520" cy="3415284"/>
+          </a:xfrm>
+          <a:prstGeom prst="rect">
+            <a:avLst/>
+          </a:prstGeom>
+        </p:spPr>
+      </p:pic>
+      <p:sp>
+        <p:nvSpPr>
+          <p:cNvPr id="6" name="Rectangle 5"/>
+          <p:cNvSpPr/>
+          <p:nvPr/>
+        </p:nvSpPr>
+        <p:spPr>
+          <a:xfrm>
+            <a:off x="8001000" y="1828800"/>
+            <a:ext cx="3794760" cy="3419856"/>
+          </a:xfrm>
+          <a:prstGeom prst="rect">
+            <a:avLst/>
+          </a:prstGeom>
+          <a:solidFill>
+            <a:srgbClr val="F7FAFB"/>
+          </a:solidFill>
+          <a:ln w="15875">
+            <a:solidFill>
+              <a:srgbClr val="0A5560"/>
+            </a:solidFill>
+          </a:ln>
+          <a:effectLst/>
+        </p:spPr>
+        <p:style>
+          <a:lnRef idx="1">
+            <a:schemeClr val="accent1"/>
+          </a:lnRef>
+          <a:fillRef idx="3">
+            <a:schemeClr val="accent1"/>
+          </a:fillRef>
+          <a:effectRef idx="2">
+            <a:schemeClr val="accent1"/>
+          </a:effectRef>
+          <a:fontRef idx="minor">
+            <a:schemeClr val="lt1"/>
+          </a:fontRef>
+        </p:style>
+        <p:txBody>
+          <a:bodyPr rtlCol="0" anchor="ctr"/>
+          <a:lstStyle/>
+          <a:p>
+            <a:pPr algn="ctr"/>
+          </a:p>
+        </p:txBody>
+      </p:sp>
+      <p:sp>
+        <p:nvSpPr>
+          <p:cNvPr id="7" name="Rectangle 6"/>
+          <p:cNvSpPr/>
+          <p:nvPr/>
+        </p:nvSpPr>
+        <p:spPr>
+          <a:xfrm>
+            <a:off x="8001000" y="1828800"/>
+            <a:ext cx="3794760" cy="548640"/>
+          </a:xfrm>
+          <a:prstGeom prst="rect">
+            <a:avLst/>
+          </a:prstGeom>
+          <a:solidFill>
+            <a:srgbClr val="0A5560"/>
+          </a:solidFill>
+          <a:ln>
+            <a:noFill/>
+          </a:ln>
+          <a:effectLst/>
+        </p:spPr>
+        <p:style>
+          <a:lnRef idx="1">
+            <a:schemeClr val="accent1"/>
+          </a:lnRef>
+          <a:fillRef idx="3">
+            <a:schemeClr val="accent1"/>
+          </a:fillRef>
+          <a:effectRef idx="2">
+            <a:schemeClr val="accent1"/>
+          </a:effectRef>
+          <a:fontRef idx="minor">
+            <a:schemeClr val="lt1"/>
+          </a:fontRef>
+        </p:style>
+        <p:txBody>
+          <a:bodyPr rtlCol="0" anchor="ctr"/>
+          <a:lstStyle/>
+          <a:p>
+            <a:pPr algn="ctr"/>
+            <a:r>
+              <a:rPr sz="1700" b="1">
+                <a:solidFill>
+                  <a:srgbClr val="FFFFFF"/>
+                </a:solidFill>
+                <a:latin typeface="Segoe UI"/>
+              </a:rPr>
+              <a:t>DAMPING → DECAY</a:t>
+            </a:r>
+          </a:p>
+        </p:txBody>
+      </p:sp>
+      <p:sp>
+        <p:nvSpPr>
+          <p:cNvPr id="8" name="TextBox 7"/>
+          <p:cNvSpPr txBox="1"/>
+          <p:nvPr/>
+        </p:nvSpPr>
+        <p:spPr>
+          <a:xfrm>
+            <a:off x="8001000" y="2359152"/>
+            <a:ext cx="3794760" cy="310896"/>
+          </a:xfrm>
+          <a:prstGeom prst="rect">
+            <a:avLst/>
+          </a:prstGeom>
+          <a:noFill/>
+        </p:spPr>
+        <p:txBody>
+          <a:bodyPr wrap="none">
+            <a:spAutoFit/>
+          </a:bodyPr>
+          <a:lstStyle/>
+          <a:p>
+            <a:pPr algn="ctr"/>
+            <a:r>
+              <a:rPr sz="1050" i="1">
+                <a:solidFill>
+                  <a:srgbClr val="54636D"/>
+                </a:solidFill>
+                <a:latin typeface="Segoe UI"/>
+              </a:rPr>
+              <a:t>how ζ shrinks each swing</a:t>
+            </a:r>
+          </a:p>
+        </p:txBody>
+      </p:sp>
+      <p:sp>
+        <p:nvSpPr>
+          <p:cNvPr id="9" name="TextBox 8"/>
+          <p:cNvSpPr txBox="1"/>
+          <p:nvPr/>
+        </p:nvSpPr>
+        <p:spPr>
+          <a:xfrm>
+            <a:off x="8257031" y="2761488"/>
+            <a:ext cx="3319272" cy="2368296"/>
+          </a:xfrm>
+          <a:prstGeom prst="rect">
+            <a:avLst/>
+          </a:prstGeom>
+          <a:noFill/>
+        </p:spPr>
+        <p:txBody>
+          <a:bodyPr wrap="square">
+            <a:spAutoFit/>
+          </a:bodyPr>
+          <a:lstStyle/>
+          <a:p>
+            <a:pPr>
+              <a:spcAft>
+                <a:spcPts val="600"/>
+              </a:spcAft>
+            </a:pPr>
+            <a:r>
+              <a:rPr sz="1300">
+                <a:solidFill>
+                  <a:srgbClr val="0A5560"/>
+                </a:solidFill>
+                <a:latin typeface="Segoe UI"/>
+              </a:rPr>
+              <a:t>•  </a:t>
+            </a:r>
+            <a:r>
+              <a:rPr sz="1300" b="0" i="0">
+                <a:solidFill>
+                  <a:srgbClr val="25323A"/>
+                </a:solidFill>
+                <a:latin typeface="Segoe UI"/>
+              </a:rPr>
+              <a:t>Envelope e^(−ζωₙt) — each swing shrinks by a fixed ratio.</a:t>
+            </a:r>
+          </a:p>
+          <a:p>
+            <a:pPr>
+              <a:spcAft>
+                <a:spcPts val="600"/>
+              </a:spcAft>
+            </a:pPr>
+            <a:r>
+              <a:rPr sz="1300">
+                <a:solidFill>
+                  <a:srgbClr val="0A5560"/>
+                </a:solidFill>
+                <a:latin typeface="Segoe UI"/>
+              </a:rPr>
+              <a:t>•  </a:t>
+            </a:r>
+            <a:r>
+              <a:rPr sz="1300" b="1" i="0">
+                <a:solidFill>
+                  <a:srgbClr val="25323A"/>
+                </a:solidFill>
+                <a:latin typeface="Segoe UI"/>
+              </a:rPr>
+              <a:t>That ratio is the log-decrement δ:</a:t>
+            </a:r>
+          </a:p>
+          <a:p>
+            <a:pPr>
+              <a:spcAft>
+                <a:spcPts val="600"/>
+              </a:spcAft>
+            </a:pPr>
+            <a:r>
+              <a:rPr sz="1300">
+                <a:solidFill>
+                  <a:srgbClr val="0A5560"/>
+                </a:solidFill>
+                <a:latin typeface="Segoe UI"/>
+              </a:rPr>
+              <a:t>⇒  </a:t>
+            </a:r>
+            <a:r>
+              <a:rPr sz="1300" b="1" i="0">
+                <a:solidFill>
+                  <a:srgbClr val="0A5560"/>
+                </a:solidFill>
+                <a:latin typeface="Segoe UI"/>
+              </a:rPr>
+              <a:t>δ = 2πζ / √(1−ζ²) ≈ 2πζ</a:t>
+            </a:r>
+          </a:p>
+          <a:p>
+            <a:pPr>
+              <a:spcAft>
+                <a:spcPts val="600"/>
+              </a:spcAft>
+            </a:pPr>
+            <a:r>
+              <a:rPr sz="1300">
+                <a:solidFill>
+                  <a:srgbClr val="0A5560"/>
+                </a:solidFill>
+                <a:latin typeface="Segoe UI"/>
+              </a:rPr>
+              <a:t>⇒  </a:t>
+            </a:r>
+            <a:r>
+              <a:rPr sz="1300" b="1" i="0">
+                <a:solidFill>
+                  <a:srgbClr val="25323A"/>
+                </a:solidFill>
+                <a:latin typeface="Segoe UI"/>
+              </a:rPr>
+              <a:t>Aₙ₊₁ / Aₙ = e^(−δ)</a:t>
+            </a:r>
+          </a:p>
+          <a:p>
+            <a:pPr>
+              <a:spcAft>
+                <a:spcPts val="600"/>
+              </a:spcAft>
+            </a:pPr>
+            <a:r>
+              <a:rPr sz="1300">
+                <a:solidFill>
+                  <a:srgbClr val="0A5560"/>
+                </a:solidFill>
+                <a:latin typeface="Segoe UI"/>
+              </a:rPr>
+              <a:t>⇒  </a:t>
+            </a:r>
+            <a:r>
+              <a:rPr sz="1300" b="1" i="0">
+                <a:solidFill>
+                  <a:srgbClr val="0A5560"/>
+                </a:solidFill>
+                <a:latin typeface="Segoe UI"/>
+              </a:rPr>
+              <a:t>ζ = 13% → e^(−0.82) = 0.44  (~55% off/cycle)</a:t>
+            </a:r>
+          </a:p>
+          <a:p>
+            <a:pPr>
+              <a:spcAft>
+                <a:spcPts val="600"/>
+              </a:spcAft>
+            </a:pPr>
+            <a:r>
+              <a:rPr sz="1300">
+                <a:solidFill>
+                  <a:srgbClr val="0A5560"/>
+                </a:solidFill>
+                <a:latin typeface="Segoe UI"/>
+              </a:rPr>
+              <a:t>•  </a:t>
+            </a:r>
+            <a:r>
+              <a:rPr sz="1300" b="0" i="1">
+                <a:solidFill>
+                  <a:srgbClr val="54636D"/>
+                </a:solidFill>
+                <a:latin typeface="Segoe UI"/>
+              </a:rPr>
+              <a:t>The 2π turns a “small” 13% into a near-halving each bob.</a:t>
+            </a:r>
+          </a:p>
+        </p:txBody>
+      </p:sp>
+      <p:sp>
+        <p:nvSpPr>
+          <p:cNvPr id="10" name="Rectangle 9"/>
+          <p:cNvSpPr/>
+          <p:nvPr/>
+        </p:nvSpPr>
+        <p:spPr>
+          <a:xfrm>
+            <a:off x="777240" y="5468112"/>
+            <a:ext cx="10927080" cy="896112"/>
+          </a:xfrm>
+          <a:prstGeom prst="rect">
+            <a:avLst/>
+          </a:prstGeom>
+          <a:solidFill>
+            <a:srgbClr val="EEF6F7"/>
+          </a:solidFill>
+          <a:ln>
+            <a:noFill/>
+          </a:ln>
+          <a:effectLst/>
+        </p:spPr>
+        <p:style>
+          <a:lnRef idx="1">
+            <a:schemeClr val="accent1"/>
+          </a:lnRef>
+          <a:fillRef idx="3">
+            <a:schemeClr val="accent1"/>
+          </a:fillRef>
+          <a:effectRef idx="2">
+            <a:schemeClr val="accent1"/>
+          </a:effectRef>
+          <a:fontRef idx="minor">
+            <a:schemeClr val="lt1"/>
+          </a:fontRef>
+        </p:style>
+        <p:txBody>
+          <a:bodyPr rtlCol="0" anchor="ctr"/>
+          <a:lstStyle/>
+          <a:p>
+            <a:pPr algn="ctr"/>
+          </a:p>
+        </p:txBody>
+      </p:sp>
+      <p:sp>
+        <p:nvSpPr>
+          <p:cNvPr id="11" name="TextBox 10"/>
+          <p:cNvSpPr txBox="1"/>
+          <p:nvPr/>
+        </p:nvSpPr>
+        <p:spPr>
+          <a:xfrm>
+            <a:off x="960120" y="5522976"/>
+            <a:ext cx="10561320" cy="804672"/>
+          </a:xfrm>
+          <a:prstGeom prst="rect">
+            <a:avLst/>
+          </a:prstGeom>
+          <a:noFill/>
+        </p:spPr>
+        <p:txBody>
+          <a:bodyPr wrap="square" anchor="ctr">
+            <a:spAutoFit/>
+          </a:bodyPr>
+          <a:lstStyle/>
+          <a:p>
+            <a:pPr algn="ctr"/>
+            <a:r>
+              <a:rPr sz="1250" b="1">
+                <a:solidFill>
+                  <a:srgbClr val="0A5560"/>
+                </a:solidFill>
+                <a:latin typeface="Segoe UI"/>
+              </a:rPr>
+              <a:t>Non-official handheld video</a:t>
+            </a:r>
+            <a:r>
+              <a:rPr sz="1250" b="0">
+                <a:solidFill>
+                  <a:srgbClr val="25323A"/>
+                </a:solidFill>
+                <a:latin typeface="Segoe UI"/>
+              </a:rPr>
+              <a:t>, motion-tracked frame-by-frame; the camera pan (~95 px ≫ the heave) is removed by referencing the fixed horizon. Buoy released ≈9.3 s, then rings down — heavily damped, so ~1½ cycles resolve.  </a:t>
+            </a:r>
+            <a:r>
+              <a:rPr sz="1250" b="1">
+                <a:solidFill>
+                  <a:srgbClr val="0A5560"/>
+                </a:solidFill>
+                <a:latin typeface="Segoe UI"/>
+              </a:rPr>
+              <a:t>Period &amp; damping are scale-free.</a:t>
+            </a:r>
+          </a:p>
+        </p:txBody>
+      </p:sp>
+    </p:spTree>
+  </p:cSld>
+  <p:clrMapOvr>
+    <a:masterClrMapping/>
+  </p:clrMapOvr>
+</p:sld>
+</file>
+
+<file path=ppt/slides/slide15.xml><?xml version="1.0" encoding="utf-8"?>
+<p:sld xmlns:a="http://schemas.openxmlformats.org/drawingml/2006/main" xmlns:p="http://schemas.openxmlformats.org/presentationml/2006/main" xmlns:r="http://schemas.openxmlformats.org/officeDocument/2006/relationships">
+  <p:cSld>
+    <p:bg>
+      <p:bgPr>
+        <a:solidFill>
+          <a:srgbClr val="FFFFFF"/>
+        </a:solidFill>
+        <a:effectLst/>
+      </p:bgPr>
+    </p:bg>
+    <p:spTree>
+      <p:nvGrpSpPr>
+        <p:cNvPr id="1" name=""/>
+        <p:cNvGrpSpPr/>
+        <p:nvPr/>
+      </p:nvGrpSpPr>
+      <p:grpSpPr/>
+      <p:sp>
+        <p:nvSpPr>
+          <p:cNvPr id="2" name="TextBox 1"/>
+          <p:cNvSpPr txBox="1"/>
+          <p:nvPr/>
+        </p:nvSpPr>
+        <p:spPr>
+          <a:xfrm>
+            <a:off x="640080" y="384048"/>
+            <a:ext cx="10972800" cy="365760"/>
+          </a:xfrm>
+          <a:prstGeom prst="rect">
+            <a:avLst/>
+          </a:prstGeom>
+          <a:noFill/>
+        </p:spPr>
+        <p:txBody>
+          <a:bodyPr wrap="none">
+            <a:spAutoFit/>
+          </a:bodyPr>
+          <a:lstStyle/>
+          <a:p>
+            <a:r>
+              <a:rPr sz="1300" b="1">
+                <a:solidFill>
+                  <a:srgbClr val="0C8B96"/>
+                </a:solidFill>
+                <a:latin typeface="Segoe UI"/>
+              </a:rPr>
+              <a:t>VALIDATION</a:t>
+            </a:r>
+          </a:p>
+        </p:txBody>
+      </p:sp>
+      <p:sp>
+        <p:nvSpPr>
+          <p:cNvPr id="3" name="TextBox 2"/>
+          <p:cNvSpPr txBox="1"/>
+          <p:nvPr/>
+        </p:nvSpPr>
+        <p:spPr>
+          <a:xfrm>
+            <a:off x="640080" y="658368"/>
+            <a:ext cx="10972800" cy="822960"/>
+          </a:xfrm>
+          <a:prstGeom prst="rect">
+            <a:avLst/>
+          </a:prstGeom>
+          <a:noFill/>
+        </p:spPr>
+        <p:txBody>
+          <a:bodyPr wrap="none">
+            <a:spAutoFit/>
+          </a:bodyPr>
+          <a:lstStyle/>
+          <a:p>
+            <a:r>
+              <a:rPr sz="3000" b="1">
+                <a:solidFill>
+                  <a:srgbClr val="25323A"/>
+                </a:solidFill>
+                <a:latin typeface="Segoe UI"/>
+              </a:rPr>
+              <a:t>Model vs field test — period &amp; damping match</a:t>
+            </a:r>
+          </a:p>
+        </p:txBody>
+      </p:sp>
+      <p:sp>
+        <p:nvSpPr>
+          <p:cNvPr id="4" name="Rectangle 3"/>
+          <p:cNvSpPr/>
+          <p:nvPr/>
+        </p:nvSpPr>
+        <p:spPr>
+          <a:xfrm>
+            <a:off x="658368" y="1444752"/>
+            <a:ext cx="2011680" cy="54864"/>
+          </a:xfrm>
+          <a:prstGeom prst="rect">
+            <a:avLst/>
+          </a:prstGeom>
+          <a:solidFill>
+            <a:srgbClr val="0C8B96"/>
+          </a:solidFill>
+          <a:ln>
+            <a:noFill/>
+          </a:ln>
+          <a:effectLst/>
+        </p:spPr>
+        <p:style>
+          <a:lnRef idx="1">
+            <a:schemeClr val="accent1"/>
+          </a:lnRef>
+          <a:fillRef idx="3">
+            <a:schemeClr val="accent1"/>
+          </a:fillRef>
+          <a:effectRef idx="2">
+            <a:schemeClr val="accent1"/>
+          </a:effectRef>
+          <a:fontRef idx="minor">
+            <a:schemeClr val="lt1"/>
+          </a:fontRef>
+        </p:style>
+        <p:txBody>
+          <a:bodyPr rtlCol="0" anchor="ctr"/>
+          <a:lstStyle/>
+          <a:p>
+            <a:pPr algn="ctr"/>
           </a:p>
         </p:txBody>
       </p:sp>
@@ -4944,39 +6556,15 @@
                 <a:tableStyleId>{5C22544A-7EE6-4342-B048-85BDC9FD1C3A}</a:tableStyleId>
               </a:tblPr>
               <a:tblGrid>
-                <a:gridCol w="2880360">
-                  <a:extLst>
-                    <a:ext uri="{9D8B030D-6E8A-4147-A177-3AD203B41FA5}">
-                      <a16:colId xmlns:a16="http://schemas.microsoft.com/office/drawing/2014/main" val="20000"/>
-                    </a:ext>
-                  </a:extLst>
-                </a:gridCol>
-                <a:gridCol w="2743200">
-                  <a:extLst>
-                    <a:ext uri="{9D8B030D-6E8A-4147-A177-3AD203B41FA5}">
-                      <a16:colId xmlns:a16="http://schemas.microsoft.com/office/drawing/2014/main" val="20001"/>
-                    </a:ext>
-                  </a:extLst>
-                </a:gridCol>
-                <a:gridCol w="2743200">
-                  <a:extLst>
-                    <a:ext uri="{9D8B030D-6E8A-4147-A177-3AD203B41FA5}">
-                      <a16:colId xmlns:a16="http://schemas.microsoft.com/office/drawing/2014/main" val="20002"/>
-                    </a:ext>
-                  </a:extLst>
-                </a:gridCol>
-                <a:gridCol w="2560320">
-                  <a:extLst>
-                    <a:ext uri="{9D8B030D-6E8A-4147-A177-3AD203B41FA5}">
-                      <a16:colId xmlns:a16="http://schemas.microsoft.com/office/drawing/2014/main" val="20003"/>
-                    </a:ext>
-                  </a:extLst>
-                </a:gridCol>
+                <a:gridCol w="2880360"/>
+                <a:gridCol w="2743200"/>
+                <a:gridCol w="2743200"/>
+                <a:gridCol w="2560320"/>
               </a:tblGrid>
               <a:tr h="384048">
                 <a:tc>
                   <a:txBody>
-                    <a:bodyPr/>
+                    <a:bodyPr wrap="square"/>
                     <a:lstStyle/>
                     <a:p>
                       <a:pPr algn="l"/>
@@ -4991,7 +6579,7 @@
                       </a:r>
                     </a:p>
                   </a:txBody>
-                  <a:tcPr marL="88900" marR="63500" marT="25400" marB="25400" anchor="ctr">
+                  <a:tcPr anchor="ctr" marL="88900" marR="63500" marT="25400" marB="25400">
                     <a:solidFill>
                       <a:srgbClr val="0C8B96"/>
                     </a:solidFill>
@@ -4999,7 +6587,7 @@
                 </a:tc>
                 <a:tc>
                   <a:txBody>
-                    <a:bodyPr/>
+                    <a:bodyPr wrap="square"/>
                     <a:lstStyle/>
                     <a:p>
                       <a:pPr algn="ctr"/>
@@ -5014,7 +6602,7 @@
                       </a:r>
                     </a:p>
                   </a:txBody>
-                  <a:tcPr marL="88900" marR="63500" marT="25400" marB="25400" anchor="ctr">
+                  <a:tcPr anchor="ctr" marL="88900" marR="63500" marT="25400" marB="25400">
                     <a:solidFill>
                       <a:srgbClr val="0C8B96"/>
                     </a:solidFill>
@@ -5022,7 +6610,7 @@
                 </a:tc>
                 <a:tc>
                   <a:txBody>
-                    <a:bodyPr/>
+                    <a:bodyPr wrap="square"/>
                     <a:lstStyle/>
                     <a:p>
                       <a:pPr algn="ctr"/>
@@ -5037,7 +6625,7 @@
                       </a:r>
                     </a:p>
                   </a:txBody>
-                  <a:tcPr marL="88900" marR="63500" marT="25400" marB="25400" anchor="ctr">
+                  <a:tcPr anchor="ctr" marL="88900" marR="63500" marT="25400" marB="25400">
                     <a:solidFill>
                       <a:srgbClr val="0C8B96"/>
                     </a:solidFill>
@@ -5045,7 +6633,7 @@
                 </a:tc>
                 <a:tc>
                   <a:txBody>
-                    <a:bodyPr/>
+                    <a:bodyPr wrap="square"/>
                     <a:lstStyle/>
                     <a:p>
                       <a:pPr algn="l"/>
@@ -5060,22 +6648,17 @@
                       </a:r>
                     </a:p>
                   </a:txBody>
-                  <a:tcPr marL="88900" marR="63500" marT="25400" marB="25400" anchor="ctr">
+                  <a:tcPr anchor="ctr" marL="88900" marR="63500" marT="25400" marB="25400">
                     <a:solidFill>
                       <a:srgbClr val="0C8B96"/>
                     </a:solidFill>
                   </a:tcPr>
                 </a:tc>
-                <a:extLst>
-                  <a:ext uri="{0D108BD9-81ED-4DB2-BD59-A6C34878D82A}">
-                    <a16:rowId xmlns:a16="http://schemas.microsoft.com/office/drawing/2014/main" val="10000"/>
-                  </a:ext>
-                </a:extLst>
               </a:tr>
               <a:tr h="640080">
                 <a:tc>
                   <a:txBody>
-                    <a:bodyPr/>
+                    <a:bodyPr wrap="square"/>
                     <a:lstStyle/>
                     <a:p>
                       <a:pPr algn="l"/>
@@ -5090,7 +6673,7 @@
                       </a:r>
                     </a:p>
                   </a:txBody>
-                  <a:tcPr marL="88900" marR="63500" marT="25400" marB="25400" anchor="ctr">
+                  <a:tcPr anchor="ctr" marL="88900" marR="63500" marT="25400" marB="25400">
                     <a:solidFill>
                       <a:srgbClr val="F3F8F9"/>
                     </a:solidFill>
@@ -5098,7 +6681,7 @@
                 </a:tc>
                 <a:tc>
                   <a:txBody>
-                    <a:bodyPr/>
+                    <a:bodyPr wrap="square"/>
                     <a:lstStyle/>
                     <a:p>
                       <a:pPr algn="ctr"/>
@@ -5113,7 +6696,7 @@
                       </a:r>
                     </a:p>
                   </a:txBody>
-                  <a:tcPr marL="88900" marR="63500" marT="25400" marB="25400" anchor="ctr">
+                  <a:tcPr anchor="ctr" marL="88900" marR="63500" marT="25400" marB="25400">
                     <a:solidFill>
                       <a:srgbClr val="F3F8F9"/>
                     </a:solidFill>
@@ -5121,7 +6704,7 @@
                 </a:tc>
                 <a:tc>
                   <a:txBody>
-                    <a:bodyPr/>
+                    <a:bodyPr wrap="square"/>
                     <a:lstStyle/>
                     <a:p>
                       <a:pPr algn="ctr"/>
@@ -5136,7 +6719,7 @@
                       </a:r>
                     </a:p>
                   </a:txBody>
-                  <a:tcPr marL="88900" marR="63500" marT="25400" marB="25400" anchor="ctr">
+                  <a:tcPr anchor="ctr" marL="88900" marR="63500" marT="25400" marB="25400">
                     <a:solidFill>
                       <a:srgbClr val="F3F8F9"/>
                     </a:solidFill>
@@ -5144,7 +6727,7 @@
                 </a:tc>
                 <a:tc>
                   <a:txBody>
-                    <a:bodyPr/>
+                    <a:bodyPr wrap="square"/>
                     <a:lstStyle/>
                     <a:p>
                       <a:pPr algn="l"/>
@@ -5159,22 +6742,17 @@
                       </a:r>
                     </a:p>
                   </a:txBody>
-                  <a:tcPr marL="88900" marR="63500" marT="25400" marB="25400" anchor="ctr">
+                  <a:tcPr anchor="ctr" marL="88900" marR="63500" marT="25400" marB="25400">
                     <a:solidFill>
                       <a:srgbClr val="F3F8F9"/>
                     </a:solidFill>
                   </a:tcPr>
                 </a:tc>
-                <a:extLst>
-                  <a:ext uri="{0D108BD9-81ED-4DB2-BD59-A6C34878D82A}">
-                    <a16:rowId xmlns:a16="http://schemas.microsoft.com/office/drawing/2014/main" val="10001"/>
-                  </a:ext>
-                </a:extLst>
               </a:tr>
               <a:tr h="640080">
                 <a:tc>
                   <a:txBody>
-                    <a:bodyPr/>
+                    <a:bodyPr wrap="square"/>
                     <a:lstStyle/>
                     <a:p>
                       <a:pPr algn="l"/>
@@ -5189,7 +6767,7 @@
                       </a:r>
                     </a:p>
                   </a:txBody>
-                  <a:tcPr marL="88900" marR="63500" marT="25400" marB="25400" anchor="ctr">
+                  <a:tcPr anchor="ctr" marL="88900" marR="63500" marT="25400" marB="25400">
                     <a:solidFill>
                       <a:srgbClr val="FFFFFF"/>
                     </a:solidFill>
@@ -5197,7 +6775,7 @@
                 </a:tc>
                 <a:tc>
                   <a:txBody>
-                    <a:bodyPr/>
+                    <a:bodyPr wrap="square"/>
                     <a:lstStyle/>
                     <a:p>
                       <a:pPr algn="ctr"/>
@@ -5212,7 +6790,7 @@
                       </a:r>
                     </a:p>
                   </a:txBody>
-                  <a:tcPr marL="88900" marR="63500" marT="25400" marB="25400" anchor="ctr">
+                  <a:tcPr anchor="ctr" marL="88900" marR="63500" marT="25400" marB="25400">
                     <a:solidFill>
                       <a:srgbClr val="FFFFFF"/>
                     </a:solidFill>
@@ -5220,7 +6798,7 @@
                 </a:tc>
                 <a:tc>
                   <a:txBody>
-                    <a:bodyPr/>
+                    <a:bodyPr wrap="square"/>
                     <a:lstStyle/>
                     <a:p>
                       <a:pPr algn="ctr"/>
@@ -5235,7 +6813,7 @@
                       </a:r>
                     </a:p>
                   </a:txBody>
-                  <a:tcPr marL="88900" marR="63500" marT="25400" marB="25400" anchor="ctr">
+                  <a:tcPr anchor="ctr" marL="88900" marR="63500" marT="25400" marB="25400">
                     <a:solidFill>
                       <a:srgbClr val="FFFFFF"/>
                     </a:solidFill>
@@ -5243,7 +6821,7 @@
                 </a:tc>
                 <a:tc>
                   <a:txBody>
-                    <a:bodyPr/>
+                    <a:bodyPr wrap="square"/>
                     <a:lstStyle/>
                     <a:p>
                       <a:pPr algn="l"/>
@@ -5258,17 +6836,12 @@
                       </a:r>
                     </a:p>
                   </a:txBody>
-                  <a:tcPr marL="88900" marR="63500" marT="25400" marB="25400" anchor="ctr">
+                  <a:tcPr anchor="ctr" marL="88900" marR="63500" marT="25400" marB="25400">
                     <a:solidFill>
                       <a:srgbClr val="FFFFFF"/>
                     </a:solidFill>
                   </a:tcPr>
                 </a:tc>
-                <a:extLst>
-                  <a:ext uri="{0D108BD9-81ED-4DB2-BD59-A6C34878D82A}">
-                    <a16:rowId xmlns:a16="http://schemas.microsoft.com/office/drawing/2014/main" val="10002"/>
-                  </a:ext>
-                </a:extLst>
               </a:tr>
             </a:tbl>
           </a:graphicData>
@@ -5315,7 +6888,6 @@
           <a:lstStyle/>
           <a:p>
             <a:pPr algn="ctr"/>
-            <a:endParaRPr/>
           </a:p>
         </p:txBody>
       </p:sp>
@@ -5532,8 +7104,8 @@
 </p:sld>
 </file>
 
-<file path=ppt/slides/slide14.xml><?xml version="1.0" encoding="utf-8"?>
-<p:sld xmlns:a="http://schemas.openxmlformats.org/drawingml/2006/main" xmlns:r="http://schemas.openxmlformats.org/officeDocument/2006/relationships" xmlns:p="http://schemas.openxmlformats.org/presentationml/2006/main">
+<file path=ppt/slides/slide16.xml><?xml version="1.0" encoding="utf-8"?>
+<p:sld xmlns:a="http://schemas.openxmlformats.org/drawingml/2006/main" xmlns:p="http://schemas.openxmlformats.org/presentationml/2006/main" xmlns:r="http://schemas.openxmlformats.org/officeDocument/2006/relationships">
   <p:cSld>
     <p:bg>
       <p:bgPr>
@@ -5549,14 +7121,7 @@
         <p:cNvGrpSpPr/>
         <p:nvPr/>
       </p:nvGrpSpPr>
-      <p:grpSpPr>
-        <a:xfrm>
-          <a:off x="0" y="0"/>
-          <a:ext cx="0" cy="0"/>
-          <a:chOff x="0" y="0"/>
-          <a:chExt cx="0" cy="0"/>
-        </a:xfrm>
-      </p:grpSpPr>
+      <p:grpSpPr/>
       <p:sp>
         <p:nvSpPr>
           <p:cNvPr id="2" name="TextBox 1"/>
@@ -5586,7 +7151,7 @@
                 </a:solidFill>
                 <a:latin typeface="Segoe UI"/>
               </a:rPr>
-              <a:t>THE PHYSICS ①</a:t>
+              <a:t>DESIGN STUDY</a:t>
             </a:r>
           </a:p>
         </p:txBody>
@@ -5620,7 +7185,7 @@
                 </a:solidFill>
                 <a:latin typeface="Segoe UI"/>
               </a:rPr>
-              <a:t>Where does T = 2.5 s come from? — first, without added mass</a:t>
+              <a:t>Where to put the heave plate? — pitch performance</a:t>
             </a:r>
           </a:p>
         </p:txBody>
@@ -5666,180 +7231,33 @@
           <a:lstStyle/>
           <a:p>
             <a:pPr algn="ctr"/>
-            <a:endParaRPr/>
-          </a:p>
-        </p:txBody>
-      </p:sp>
-      <p:sp>
-        <p:nvSpPr>
-          <p:cNvPr id="5" name="TextBox 4"/>
-          <p:cNvSpPr txBox="1"/>
+          </a:p>
+        </p:txBody>
+      </p:sp>
+      <p:pic>
+        <p:nvPicPr>
+          <p:cNvPr id="5" name="Picture 4" descr="plate_depth_pitch_study.png"/>
+          <p:cNvPicPr>
+            <a:picLocks noChangeAspect="1"/>
+          </p:cNvPicPr>
           <p:nvPr/>
-        </p:nvSpPr>
-        <p:spPr>
-          <a:xfrm>
-            <a:off x="777240" y="1783080"/>
-            <a:ext cx="10698480" cy="4572000"/>
-          </a:xfrm>
-          <a:prstGeom prst="rect">
-            <a:avLst/>
-          </a:prstGeom>
-          <a:noFill/>
-        </p:spPr>
-        <p:txBody>
-          <a:bodyPr wrap="square">
-            <a:spAutoFit/>
-          </a:bodyPr>
-          <a:lstStyle/>
-          <a:p>
-            <a:pPr>
-              <a:spcBef>
-                <a:spcPts val="200"/>
-              </a:spcBef>
-              <a:spcAft>
-                <a:spcPts val="1300"/>
-              </a:spcAft>
-            </a:pPr>
-            <a:r>
-              <a:rPr sz="1800">
-                <a:solidFill>
-                  <a:srgbClr val="0C8B96"/>
-                </a:solidFill>
-                <a:latin typeface="Segoe UI"/>
-              </a:rPr>
-              <a:t>•  </a:t>
-            </a:r>
-            <a:r>
-              <a:rPr sz="1800" b="1" i="0">
-                <a:solidFill>
-                  <a:srgbClr val="25323A"/>
-                </a:solidFill>
-                <a:latin typeface="Segoe UI"/>
-              </a:rPr>
-              <a:t>Heave is a one-DOF oscillator</a:t>
-            </a:r>
-            <a:r>
-              <a:rPr sz="1800" b="0" i="0">
-                <a:solidFill>
-                  <a:srgbClr val="25323A"/>
-                </a:solidFill>
-                <a:latin typeface="Segoe UI"/>
-              </a:rPr>
-              <a:t> — the buoy bobs vertically on the </a:t>
-            </a:r>
-            <a:r>
-              <a:rPr sz="1800" b="1" i="0">
-                <a:solidFill>
-                  <a:srgbClr val="0A5560"/>
-                </a:solidFill>
-                <a:latin typeface="Segoe UI"/>
-              </a:rPr>
-              <a:t>waterplane buoyancy spring</a:t>
-            </a:r>
-            <a:r>
-              <a:rPr sz="1800" b="0" i="0">
-                <a:solidFill>
-                  <a:srgbClr val="25323A"/>
-                </a:solidFill>
-                <a:latin typeface="Segoe UI"/>
-              </a:rPr>
-              <a:t>.</a:t>
-            </a:r>
-          </a:p>
-          <a:p>
-            <a:pPr>
-              <a:spcBef>
-                <a:spcPts val="200"/>
-              </a:spcBef>
-              <a:spcAft>
-                <a:spcPts val="1300"/>
-              </a:spcAft>
-            </a:pPr>
-            <a:r>
-              <a:rPr sz="1800">
-                <a:solidFill>
-                  <a:srgbClr val="0C8B96"/>
-                </a:solidFill>
-                <a:latin typeface="Segoe UI"/>
-              </a:rPr>
-              <a:t>•  </a:t>
-            </a:r>
-            <a:r>
-              <a:rPr sz="1800" b="0" i="0">
-                <a:solidFill>
-                  <a:srgbClr val="25323A"/>
-                </a:solidFill>
-                <a:latin typeface="Segoe UI"/>
-              </a:rPr>
-              <a:t>Stiffness </a:t>
-            </a:r>
-            <a:r>
-              <a:rPr sz="1800" b="1" i="0">
-                <a:solidFill>
-                  <a:srgbClr val="0A5560"/>
-                </a:solidFill>
-                <a:latin typeface="Segoe UI"/>
-              </a:rPr>
-              <a:t>C₃₃ = ρ g A_wp</a:t>
-            </a:r>
-            <a:r>
-              <a:rPr sz="1800" b="0" i="0">
-                <a:solidFill>
-                  <a:srgbClr val="25323A"/>
-                </a:solidFill>
-                <a:latin typeface="Segoe UI"/>
-              </a:rPr>
-              <a:t>: the restoring buoyancy per metre of submergence (A_wp = 6″ spar waterplane area).</a:t>
-            </a:r>
-          </a:p>
-          <a:p>
-            <a:pPr>
-              <a:spcBef>
-                <a:spcPts val="200"/>
-              </a:spcBef>
-              <a:spcAft>
-                <a:spcPts val="1300"/>
-              </a:spcAft>
-            </a:pPr>
-            <a:r>
-              <a:rPr sz="1800">
-                <a:solidFill>
-                  <a:srgbClr val="0C8B96"/>
-                </a:solidFill>
-                <a:latin typeface="Segoe UI"/>
-              </a:rPr>
-              <a:t>•  </a:t>
-            </a:r>
-            <a:r>
-              <a:rPr sz="1800" b="0" i="0">
-                <a:solidFill>
-                  <a:srgbClr val="25323A"/>
-                </a:solidFill>
-                <a:latin typeface="Segoe UI"/>
-              </a:rPr>
-              <a:t>The naive “dry” period uses the </a:t>
-            </a:r>
-            <a:r>
-              <a:rPr sz="1800" b="1" i="0">
-                <a:solidFill>
-                  <a:srgbClr val="25323A"/>
-                </a:solidFill>
-                <a:latin typeface="Segoe UI"/>
-              </a:rPr>
-              <a:t>structural mass M alone</a:t>
-            </a:r>
-            <a:r>
-              <a:rPr sz="1800" b="0" i="0">
-                <a:solidFill>
-                  <a:srgbClr val="25323A"/>
-                </a:solidFill>
-                <a:latin typeface="Segoe UI"/>
-              </a:rPr>
-              <a:t> — no water entrained:</a:t>
-            </a:r>
-          </a:p>
-        </p:txBody>
-      </p:sp>
+        </p:nvPicPr>
+        <p:blipFill>
+          <a:blip r:embed="rId2"/>
+          <a:stretch>
+            <a:fillRect/>
+          </a:stretch>
+        </p:blipFill>
+        <p:spPr>
+          <a:xfrm>
+            <a:off x="1298448" y="1554480"/>
+            <a:ext cx="9601200" cy="3857359"/>
+          </a:xfrm>
+          <a:prstGeom prst="rect">
+            <a:avLst/>
+          </a:prstGeom>
+        </p:spPr>
+      </p:pic>
       <p:sp>
         <p:nvSpPr>
           <p:cNvPr id="6" name="Rectangle 5"/>
@@ -5848,8 +7266,8 @@
         </p:nvSpPr>
         <p:spPr>
           <a:xfrm>
-            <a:off x="3429000" y="3246120"/>
-            <a:ext cx="5349240" cy="932688"/>
+            <a:off x="777240" y="5943600"/>
+            <a:ext cx="10607040" cy="731520"/>
           </a:xfrm>
           <a:prstGeom prst="rect">
             <a:avLst/>
@@ -5881,7 +7299,6 @@
           <a:lstStyle/>
           <a:p>
             <a:pPr algn="ctr"/>
-            <a:endParaRPr/>
           </a:p>
         </p:txBody>
       </p:sp>
@@ -5893,8 +7310,8 @@
         </p:nvSpPr>
         <p:spPr>
           <a:xfrm>
-            <a:off x="3429000" y="3346704"/>
-            <a:ext cx="5349240" cy="731520"/>
+            <a:off x="960120" y="5980176"/>
+            <a:ext cx="10241280" cy="658368"/>
           </a:xfrm>
           <a:prstGeom prst="rect">
             <a:avLst/>
@@ -5909,182 +7326,31 @@
           <a:p>
             <a:pPr algn="ctr"/>
             <a:r>
-              <a:rPr sz="2600" b="1">
-                <a:solidFill>
-                  <a:srgbClr val="25323A"/>
-                </a:solidFill>
-                <a:latin typeface="Cambria Math"/>
-              </a:rPr>
-              <a:t>T₀ = 2π √( M / C₃₃ )</a:t>
-            </a:r>
-          </a:p>
-        </p:txBody>
-      </p:sp>
-      <p:sp>
-        <p:nvSpPr>
-          <p:cNvPr id="8" name="TextBox 7"/>
-          <p:cNvSpPr txBox="1"/>
-          <p:nvPr/>
-        </p:nvSpPr>
-        <p:spPr>
-          <a:xfrm>
-            <a:off x="777240" y="4370832"/>
-            <a:ext cx="10607040" cy="502920"/>
-          </a:xfrm>
-          <a:prstGeom prst="rect">
-            <a:avLst/>
-          </a:prstGeom>
-          <a:noFill/>
-        </p:spPr>
-        <p:txBody>
-          <a:bodyPr wrap="square">
-            <a:spAutoFit/>
-          </a:bodyPr>
-          <a:lstStyle/>
-          <a:p>
-            <a:pPr algn="ctr"/>
-            <a:r>
-              <a:rPr sz="1700" b="1">
-                <a:solidFill>
-                  <a:srgbClr val="25323A"/>
-                </a:solidFill>
-                <a:latin typeface="Segoe UI"/>
-              </a:rPr>
-              <a:t>M = 21.52 kg        C₃₃ = 194.5 N/m</a:t>
-            </a:r>
-            <a:r>
-              <a:rPr sz="1700" b="0">
-                <a:solidFill>
-                  <a:srgbClr val="25323A"/>
-                </a:solidFill>
-                <a:latin typeface="Segoe UI"/>
-              </a:rPr>
-              <a:t>        →        </a:t>
-            </a:r>
-            <a:r>
-              <a:rPr sz="2000" b="1">
+              <a:rPr sz="1300" b="1">
                 <a:solidFill>
                   <a:srgbClr val="0A5560"/>
                 </a:solidFill>
                 <a:latin typeface="Segoe UI"/>
               </a:rPr>
-              <a:t>T₀ = 2.09 s</a:t>
-            </a:r>
-          </a:p>
-        </p:txBody>
-      </p:sp>
-      <p:sp>
-        <p:nvSpPr>
-          <p:cNvPr id="9" name="Rectangle 8"/>
-          <p:cNvSpPr/>
-          <p:nvPr/>
-        </p:nvSpPr>
-        <p:spPr>
-          <a:xfrm>
-            <a:off x="777240" y="5138928"/>
-            <a:ext cx="10607040" cy="1024128"/>
-          </a:xfrm>
-          <a:prstGeom prst="rect">
-            <a:avLst/>
-          </a:prstGeom>
-          <a:solidFill>
-            <a:srgbClr val="EEF6F7"/>
-          </a:solidFill>
-          <a:ln>
-            <a:noFill/>
-          </a:ln>
-          <a:effectLst/>
-        </p:spPr>
-        <p:style>
-          <a:lnRef idx="1">
-            <a:schemeClr val="accent1"/>
-          </a:lnRef>
-          <a:fillRef idx="3">
-            <a:schemeClr val="accent1"/>
-          </a:fillRef>
-          <a:effectRef idx="2">
-            <a:schemeClr val="accent1"/>
-          </a:effectRef>
-          <a:fontRef idx="minor">
-            <a:schemeClr val="lt1"/>
-          </a:fontRef>
-        </p:style>
-        <p:txBody>
-          <a:bodyPr rtlCol="0" anchor="ctr"/>
-          <a:lstStyle/>
-          <a:p>
-            <a:pPr algn="ctr"/>
-            <a:endParaRPr/>
-          </a:p>
-        </p:txBody>
-      </p:sp>
-      <p:sp>
-        <p:nvSpPr>
-          <p:cNvPr id="10" name="TextBox 9"/>
-          <p:cNvSpPr txBox="1"/>
-          <p:nvPr/>
-        </p:nvSpPr>
-        <p:spPr>
-          <a:xfrm>
-            <a:off x="1005840" y="5230368"/>
-            <a:ext cx="10149840" cy="859536"/>
-          </a:xfrm>
-          <a:prstGeom prst="rect">
-            <a:avLst/>
-          </a:prstGeom>
-          <a:noFill/>
-        </p:spPr>
-        <p:txBody>
-          <a:bodyPr wrap="square" anchor="ctr">
-            <a:spAutoFit/>
-          </a:bodyPr>
-          <a:lstStyle/>
-          <a:p>
-            <a:pPr algn="ctr"/>
-            <a:r>
-              <a:rPr sz="1500" b="0">
-                <a:solidFill>
-                  <a:srgbClr val="25323A"/>
-                </a:solidFill>
-                <a:latin typeface="Segoe UI"/>
-              </a:rPr>
-              <a:t>But the field test measured 2.50 s. </a:t>
-            </a:r>
-            <a:r>
-              <a:rPr sz="1500" b="1">
-                <a:solidFill>
-                  <a:srgbClr val="D1543A"/>
-                </a:solidFill>
-                <a:latin typeface="Segoe UI"/>
-              </a:rPr>
-              <a:t>The buoy behaves ~45% heavier than its structure</a:t>
-            </a:r>
-            <a:r>
-              <a:rPr sz="1500" b="0">
-                <a:solidFill>
-                  <a:srgbClr val="25323A"/>
-                </a:solidFill>
-                <a:latin typeface="Segoe UI"/>
-              </a:rPr>
-              <a:t> — it drags a slug of water with it as it accelerates. That missing inertia is </a:t>
-            </a:r>
-            <a:r>
-              <a:rPr sz="1500" b="1">
-                <a:solidFill>
-                  <a:srgbClr val="D1543A"/>
-                </a:solidFill>
-                <a:latin typeface="Segoe UI"/>
-              </a:rPr>
-              <a:t>added mass</a:t>
-            </a:r>
-            <a:r>
-              <a:rPr sz="1500" b="0">
-                <a:solidFill>
-                  <a:srgbClr val="25323A"/>
-                </a:solidFill>
-                <a:latin typeface="Segoe UI"/>
-              </a:rPr>
-              <a:t>.</a:t>
+              <a:t>Plate depth barely moves pitch</a:t>
+            </a:r>
+            <a:r>
+              <a:rPr sz="1300" b="0">
+                <a:solidFill>
+                  <a:srgbClr val="25323A"/>
+                </a:solidFill>
+                <a:latin typeface="Segoe UI"/>
+              </a:rPr>
+              <a:t> (2.10 → 2.14 s over a 4× lever-arm change) or heave — an axial plate meets pitch EDGE-ON, so its broadside added mass &amp; drag (which dominate heave) hardly engage it.  </a:t>
+            </a:r>
+            <a:r>
+              <a:rPr sz="1300" b="1">
+                <a:solidFill>
+                  <a:srgbClr val="0A5560"/>
+                </a:solidFill>
+                <a:latin typeface="Segoe UI"/>
+              </a:rPr>
+              <a:t>Deck tilt is a ballast/CoG job, not a plate-depth job.</a:t>
             </a:r>
           </a:p>
         </p:txBody>
@@ -6097,8 +7363,8 @@
 </p:sld>
 </file>
 
-<file path=ppt/slides/slide15.xml><?xml version="1.0" encoding="utf-8"?>
-<p:sld xmlns:a="http://schemas.openxmlformats.org/drawingml/2006/main" xmlns:r="http://schemas.openxmlformats.org/officeDocument/2006/relationships" xmlns:p="http://schemas.openxmlformats.org/presentationml/2006/main">
+<file path=ppt/slides/slide17.xml><?xml version="1.0" encoding="utf-8"?>
+<p:sld xmlns:a="http://schemas.openxmlformats.org/drawingml/2006/main" xmlns:p="http://schemas.openxmlformats.org/presentationml/2006/main" xmlns:r="http://schemas.openxmlformats.org/officeDocument/2006/relationships">
   <p:cSld>
     <p:bg>
       <p:bgPr>
@@ -6114,14 +7380,7 @@
         <p:cNvGrpSpPr/>
         <p:nvPr/>
       </p:nvGrpSpPr>
-      <p:grpSpPr>
-        <a:xfrm>
-          <a:off x="0" y="0"/>
-          <a:ext cx="0" cy="0"/>
-          <a:chOff x="0" y="0"/>
-          <a:chExt cx="0" cy="0"/>
-        </a:xfrm>
-      </p:grpSpPr>
+      <p:grpSpPr/>
       <p:sp>
         <p:nvSpPr>
           <p:cNvPr id="2" name="TextBox 1"/>
@@ -6151,7 +7410,7 @@
                 </a:solidFill>
                 <a:latin typeface="Segoe UI"/>
               </a:rPr>
-              <a:t>THE PHYSICS ②</a:t>
+              <a:t>PLATFORM STUDY</a:t>
             </a:r>
           </a:p>
         </p:txBody>
@@ -6185,7 +7444,7 @@
                 </a:solidFill>
                 <a:latin typeface="Segoe UI"/>
               </a:rPr>
-              <a:t>Added mass — how Capytaine computes it, and how it sets T</a:t>
+              <a:t>Do the buoy gimbals help the platform? — pin vs rigid</a:t>
             </a:r>
           </a:p>
         </p:txBody>
@@ -6231,155 +7490,19 @@
           <a:lstStyle/>
           <a:p>
             <a:pPr algn="ctr"/>
-            <a:endParaRPr/>
-          </a:p>
-        </p:txBody>
-      </p:sp>
-      <p:sp>
-        <p:nvSpPr>
-          <p:cNvPr id="5" name="Rectangle 4"/>
-          <p:cNvSpPr/>
-          <p:nvPr/>
-        </p:nvSpPr>
-        <p:spPr>
-          <a:xfrm>
-            <a:off x="502920" y="1737360"/>
-            <a:ext cx="5532120" cy="3913632"/>
-          </a:xfrm>
-          <a:prstGeom prst="rect">
-            <a:avLst/>
-          </a:prstGeom>
-          <a:solidFill>
-            <a:srgbClr val="F7FAFB"/>
-          </a:solidFill>
-          <a:ln w="15875">
-            <a:solidFill>
-              <a:srgbClr val="0C8B96"/>
-            </a:solidFill>
-          </a:ln>
-          <a:effectLst/>
-        </p:spPr>
-        <p:style>
-          <a:lnRef idx="1">
-            <a:schemeClr val="accent1"/>
-          </a:lnRef>
-          <a:fillRef idx="3">
-            <a:schemeClr val="accent1"/>
-          </a:fillRef>
-          <a:effectRef idx="2">
-            <a:schemeClr val="accent1"/>
-          </a:effectRef>
-          <a:fontRef idx="minor">
-            <a:schemeClr val="lt1"/>
-          </a:fontRef>
-        </p:style>
-        <p:txBody>
-          <a:bodyPr rtlCol="0" anchor="ctr"/>
-          <a:lstStyle/>
-          <a:p>
-            <a:pPr algn="ctr"/>
-            <a:endParaRPr/>
-          </a:p>
-        </p:txBody>
-      </p:sp>
-      <p:sp>
-        <p:nvSpPr>
-          <p:cNvPr id="6" name="Rectangle 5"/>
-          <p:cNvSpPr/>
-          <p:nvPr/>
-        </p:nvSpPr>
-        <p:spPr>
-          <a:xfrm>
-            <a:off x="502920" y="1737360"/>
-            <a:ext cx="5532120" cy="548640"/>
-          </a:xfrm>
-          <a:prstGeom prst="rect">
-            <a:avLst/>
-          </a:prstGeom>
-          <a:solidFill>
-            <a:srgbClr val="0C8B96"/>
-          </a:solidFill>
-          <a:ln>
-            <a:noFill/>
-          </a:ln>
-          <a:effectLst/>
-        </p:spPr>
-        <p:style>
-          <a:lnRef idx="1">
-            <a:schemeClr val="accent1"/>
-          </a:lnRef>
-          <a:fillRef idx="3">
-            <a:schemeClr val="accent1"/>
-          </a:fillRef>
-          <a:effectRef idx="2">
-            <a:schemeClr val="accent1"/>
-          </a:effectRef>
-          <a:fontRef idx="minor">
-            <a:schemeClr val="lt1"/>
-          </a:fontRef>
-        </p:style>
-        <p:txBody>
-          <a:bodyPr rtlCol="0" anchor="ctr"/>
-          <a:lstStyle/>
-          <a:p>
-            <a:pPr algn="ctr"/>
-            <a:r>
-              <a:rPr sz="1700" b="1">
-                <a:solidFill>
-                  <a:srgbClr val="FFFFFF"/>
-                </a:solidFill>
-                <a:latin typeface="Segoe UI"/>
-              </a:rPr>
-              <a:t>HOW CAPYTAINE COMPUTES A</a:t>
-            </a:r>
-          </a:p>
-        </p:txBody>
-      </p:sp>
-      <p:sp>
-        <p:nvSpPr>
-          <p:cNvPr id="7" name="TextBox 6"/>
+          </a:p>
+        </p:txBody>
+      </p:sp>
+      <p:sp>
+        <p:nvSpPr>
+          <p:cNvPr id="5" name="TextBox 4"/>
           <p:cNvSpPr txBox="1"/>
           <p:nvPr/>
         </p:nvSpPr>
         <p:spPr>
           <a:xfrm>
-            <a:off x="502920" y="2267712"/>
-            <a:ext cx="5532120" cy="310896"/>
-          </a:xfrm>
-          <a:prstGeom prst="rect">
-            <a:avLst/>
-          </a:prstGeom>
-          <a:noFill/>
-        </p:spPr>
-        <p:txBody>
-          <a:bodyPr wrap="none">
-            <a:spAutoFit/>
-          </a:bodyPr>
-          <a:lstStyle/>
-          <a:p>
-            <a:pPr algn="ctr"/>
-            <a:r>
-              <a:rPr sz="1050" i="1">
-                <a:solidFill>
-                  <a:srgbClr val="54636D"/>
-                </a:solidFill>
-                <a:latin typeface="Segoe UI"/>
-              </a:rPr>
-              <a:t>radiation problem · one run · per frequency ω</a:t>
-            </a:r>
-          </a:p>
-        </p:txBody>
-      </p:sp>
-      <p:sp>
-        <p:nvSpPr>
-          <p:cNvPr id="8" name="TextBox 7"/>
-          <p:cNvSpPr txBox="1"/>
-          <p:nvPr/>
-        </p:nvSpPr>
-        <p:spPr>
-          <a:xfrm>
-            <a:off x="758952" y="2670048"/>
-            <a:ext cx="5056631" cy="2862072"/>
+            <a:off x="777240" y="1920240"/>
+            <a:ext cx="10698480" cy="4572000"/>
           </a:xfrm>
           <a:prstGeom prst="rect">
             <a:avLst/>
@@ -6393,12 +7516,15 @@
           <a:lstStyle/>
           <a:p>
             <a:pPr>
+              <a:spcBef>
+                <a:spcPts val="200"/>
+              </a:spcBef>
               <a:spcAft>
-                <a:spcPts val="600"/>
+                <a:spcPts val="1200"/>
               </a:spcAft>
             </a:pPr>
             <a:r>
-              <a:rPr sz="1300">
+              <a:rPr sz="1800">
                 <a:solidFill>
                   <a:srgbClr val="0C8B96"/>
                 </a:solidFill>
@@ -6407,23 +7533,44 @@
               <a:t>•  </a:t>
             </a:r>
             <a:r>
-              <a:rPr sz="1300" b="0" i="0">
-                <a:solidFill>
-                  <a:srgbClr val="25323A"/>
-                </a:solidFill>
-                <a:latin typeface="Segoe UI"/>
-              </a:rPr>
-              <a:t>Force the hull to oscillate in still water at ω (heave DOF, no incoming waves).</a:t>
+              <a:rPr sz="1800" b="0" i="0">
+                <a:solidFill>
+                  <a:srgbClr val="25323A"/>
+                </a:solidFill>
+                <a:latin typeface="Segoe UI"/>
+              </a:rPr>
+              <a:t>Scaling up: 16 buoys on a shared platform — a </a:t>
+            </a:r>
+            <a:r>
+              <a:rPr sz="1800" b="1" i="0">
+                <a:solidFill>
+                  <a:srgbClr val="25323A"/>
+                </a:solidFill>
+                <a:latin typeface="Segoe UI"/>
+              </a:rPr>
+              <a:t>still, level deck</a:t>
+            </a:r>
+            <a:r>
+              <a:rPr sz="1800" b="0" i="0">
+                <a:solidFill>
+                  <a:srgbClr val="25323A"/>
+                </a:solidFill>
+                <a:latin typeface="Segoe UI"/>
+              </a:rPr>
+              <a:t> for rockets / datacenters / hotels.</a:t>
             </a:r>
           </a:p>
           <a:p>
             <a:pPr>
+              <a:spcBef>
+                <a:spcPts val="200"/>
+              </a:spcBef>
               <a:spcAft>
-                <a:spcPts val="600"/>
+                <a:spcPts val="1200"/>
               </a:spcAft>
             </a:pPr>
             <a:r>
-              <a:rPr sz="1300">
+              <a:rPr sz="1800">
                 <a:solidFill>
                   <a:srgbClr val="0C8B96"/>
                 </a:solidFill>
@@ -6432,23 +7579,44 @@
               <a:t>•  </a:t>
             </a:r>
             <a:r>
-              <a:rPr sz="1300" b="0" i="0">
-                <a:solidFill>
-                  <a:srgbClr val="25323A"/>
-                </a:solidFill>
-                <a:latin typeface="Segoe UI"/>
-              </a:rPr>
-              <a:t>Integrate the flow pressure over the hull → the hydrodynamic reaction force.</a:t>
+              <a:rPr sz="1800" b="0" i="0">
+                <a:solidFill>
+                  <a:srgbClr val="25323A"/>
+                </a:solidFill>
+                <a:latin typeface="Segoe UI"/>
+              </a:rPr>
+              <a:t>Each buoy joins the platform through the </a:t>
+            </a:r>
+            <a:r>
+              <a:rPr sz="1800" b="1" i="0">
+                <a:solidFill>
+                  <a:srgbClr val="25323A"/>
+                </a:solidFill>
+                <a:latin typeface="Segoe UI"/>
+              </a:rPr>
+              <a:t>gimbal at its top</a:t>
+            </a:r>
+            <a:r>
+              <a:rPr sz="1800" b="0" i="0">
+                <a:solidFill>
+                  <a:srgbClr val="25323A"/>
+                </a:solidFill>
+                <a:latin typeface="Segoe UI"/>
+              </a:rPr>
+              <a:t> (a pin: roll/pitch free). Does that beat welding the assembly rigid?</a:t>
             </a:r>
           </a:p>
           <a:p>
             <a:pPr>
+              <a:spcBef>
+                <a:spcPts val="200"/>
+              </a:spcBef>
               <a:spcAft>
-                <a:spcPts val="600"/>
+                <a:spcPts val="1200"/>
               </a:spcAft>
             </a:pPr>
             <a:r>
-              <a:rPr sz="1300">
+              <a:rPr sz="1800">
                 <a:solidFill>
                   <a:srgbClr val="0C8B96"/>
                 </a:solidFill>
@@ -6457,510 +7625,115 @@
               <a:t>•  </a:t>
             </a:r>
             <a:r>
-              <a:rPr sz="1300" b="1" i="0">
-                <a:solidFill>
-                  <a:srgbClr val="25323A"/>
-                </a:solidFill>
-                <a:latin typeface="Segoe UI"/>
-              </a:rPr>
-              <a:t>Split that force by phase:</a:t>
-            </a:r>
-          </a:p>
-          <a:p>
-            <a:pPr>
+              <a:rPr sz="1800" b="0" i="0">
+                <a:solidFill>
+                  <a:srgbClr val="25323A"/>
+                </a:solidFill>
+                <a:latin typeface="Segoe UI"/>
+              </a:rPr>
+              <a:t>Same 16-buoy deck, same hydro / drag / geometry — only the joint type changes:</a:t>
+            </a:r>
+          </a:p>
+          <a:p>
+            <a:pPr lvl="1">
+              <a:spcBef>
+                <a:spcPts val="200"/>
+              </a:spcBef>
               <a:spcAft>
-                <a:spcPts val="600"/>
+                <a:spcPts val="1200"/>
               </a:spcAft>
             </a:pPr>
             <a:r>
-              <a:rPr sz="1300">
-                <a:solidFill>
-                  <a:srgbClr val="0C8B96"/>
-                </a:solidFill>
-                <a:latin typeface="Segoe UI"/>
-              </a:rPr>
-              <a:t>    – </a:t>
-            </a:r>
-            <a:r>
-              <a:rPr sz="1300" b="0" i="0">
+              <a:rPr sz="1800">
+                <a:solidFill>
+                  <a:srgbClr val="54636D"/>
+                </a:solidFill>
+                <a:latin typeface="Segoe UI"/>
+              </a:rPr>
+              <a:t>      –  </a:t>
+            </a:r>
+            <a:r>
+              <a:rPr sz="1600" b="1" i="0">
                 <a:solidFill>
                   <a:srgbClr val="0A5560"/>
                 </a:solidFill>
                 <a:latin typeface="Segoe UI"/>
               </a:rPr>
-              <a:t>∝ acceleration  →  added mass A(ω)</a:t>
-            </a:r>
-          </a:p>
-          <a:p>
-            <a:pPr>
+              <a:t>Articulated</a:t>
+            </a:r>
+            <a:r>
+              <a:rPr sz="1600" b="0" i="0">
+                <a:solidFill>
+                  <a:srgbClr val="25323A"/>
+                </a:solidFill>
+                <a:latin typeface="Segoe UI"/>
+              </a:rPr>
+              <a:t> — every joint a pin (the current design)</a:t>
+            </a:r>
+          </a:p>
+          <a:p>
+            <a:pPr lvl="1">
+              <a:spcBef>
+                <a:spcPts val="200"/>
+              </a:spcBef>
               <a:spcAft>
-                <a:spcPts val="600"/>
+                <a:spcPts val="1200"/>
               </a:spcAft>
             </a:pPr>
             <a:r>
-              <a:rPr sz="1300">
-                <a:solidFill>
-                  <a:srgbClr val="0C8B96"/>
-                </a:solidFill>
-                <a:latin typeface="Segoe UI"/>
-              </a:rPr>
-              <a:t>    – </a:t>
-            </a:r>
-            <a:r>
-              <a:rPr sz="1300" b="0" i="0">
+              <a:rPr sz="1800">
                 <a:solidFill>
                   <a:srgbClr val="54636D"/>
                 </a:solidFill>
                 <a:latin typeface="Segoe UI"/>
               </a:rPr>
-              <a:t>∝ velocity  →  radiation damping B(ω)</a:t>
+              <a:t>      –  </a:t>
+            </a:r>
+            <a:r>
+              <a:rPr sz="1600" b="1" i="0">
+                <a:solidFill>
+                  <a:srgbClr val="D1543A"/>
+                </a:solidFill>
+                <a:latin typeface="Segoe UI"/>
+              </a:rPr>
+              <a:t>Whole-chain rigid</a:t>
+            </a:r>
+            <a:r>
+              <a:rPr sz="1600" b="0" i="0">
+                <a:solidFill>
+                  <a:srgbClr val="25323A"/>
+                </a:solidFill>
+                <a:latin typeface="Segoe UI"/>
+              </a:rPr>
+              <a:t> — every joint welded → one rigid raft</a:t>
             </a:r>
           </a:p>
           <a:p>
             <a:pPr>
+              <a:spcBef>
+                <a:spcPts val="200"/>
+              </a:spcBef>
               <a:spcAft>
-                <a:spcPts val="600"/>
+                <a:spcPts val="1200"/>
               </a:spcAft>
             </a:pPr>
             <a:r>
-              <a:rPr sz="1300">
+              <a:rPr sz="1800">
                 <a:solidFill>
                   <a:srgbClr val="0C8B96"/>
                 </a:solidFill>
                 <a:latin typeface="Segoe UI"/>
               </a:rPr>
-              <a:t>⇒  </a:t>
-            </a:r>
-            <a:r>
-              <a:rPr sz="1300" b="1" i="0">
-                <a:solidFill>
-                  <a:srgbClr val="25323A"/>
-                </a:solidFill>
-                <a:latin typeface="Segoe UI"/>
-              </a:rPr>
-              <a:t>F_rad = −A(ω)·ẍ − B(ω)·ẋ</a:t>
-            </a:r>
-          </a:p>
-          <a:p>
-            <a:pPr>
-              <a:spcAft>
-                <a:spcPts val="600"/>
-              </a:spcAft>
-            </a:pPr>
-            <a:r>
-              <a:rPr sz="1300">
-                <a:solidFill>
-                  <a:srgbClr val="0C8B96"/>
-                </a:solidFill>
-                <a:latin typeface="Segoe UI"/>
-              </a:rPr>
-              <a:t>⇒  </a:t>
-            </a:r>
-            <a:r>
-              <a:rPr sz="1300" b="1" i="0">
-                <a:solidFill>
-                  <a:srgbClr val="0A5560"/>
-                </a:solidFill>
-                <a:latin typeface="Segoe UI"/>
-              </a:rPr>
-              <a:t>A∞ (ω→∞ limit) = 9.7 kg ≈ 45% of M — mostly the broad plate.</a:t>
-            </a:r>
-          </a:p>
-        </p:txBody>
-      </p:sp>
-      <p:sp>
-        <p:nvSpPr>
-          <p:cNvPr id="9" name="Rectangle 8"/>
-          <p:cNvSpPr/>
-          <p:nvPr/>
-        </p:nvSpPr>
-        <p:spPr>
-          <a:xfrm>
-            <a:off x="6153912" y="1737360"/>
-            <a:ext cx="5532120" cy="3913632"/>
-          </a:xfrm>
-          <a:prstGeom prst="rect">
-            <a:avLst/>
-          </a:prstGeom>
-          <a:solidFill>
-            <a:srgbClr val="F7FAFB"/>
-          </a:solidFill>
-          <a:ln w="15875">
-            <a:solidFill>
-              <a:srgbClr val="0A5560"/>
-            </a:solidFill>
-          </a:ln>
-          <a:effectLst/>
-        </p:spPr>
-        <p:style>
-          <a:lnRef idx="1">
-            <a:schemeClr val="accent1"/>
-          </a:lnRef>
-          <a:fillRef idx="3">
-            <a:schemeClr val="accent1"/>
-          </a:fillRef>
-          <a:effectRef idx="2">
-            <a:schemeClr val="accent1"/>
-          </a:effectRef>
-          <a:fontRef idx="minor">
-            <a:schemeClr val="lt1"/>
-          </a:fontRef>
-        </p:style>
-        <p:txBody>
-          <a:bodyPr rtlCol="0" anchor="ctr"/>
-          <a:lstStyle/>
-          <a:p>
-            <a:pPr algn="ctr"/>
-            <a:endParaRPr/>
-          </a:p>
-        </p:txBody>
-      </p:sp>
-      <p:sp>
-        <p:nvSpPr>
-          <p:cNvPr id="10" name="Rectangle 9"/>
-          <p:cNvSpPr/>
-          <p:nvPr/>
-        </p:nvSpPr>
-        <p:spPr>
-          <a:xfrm>
-            <a:off x="6153912" y="1737360"/>
-            <a:ext cx="5532120" cy="548640"/>
-          </a:xfrm>
-          <a:prstGeom prst="rect">
-            <a:avLst/>
-          </a:prstGeom>
-          <a:solidFill>
-            <a:srgbClr val="0A5560"/>
-          </a:solidFill>
-          <a:ln>
-            <a:noFill/>
-          </a:ln>
-          <a:effectLst/>
-        </p:spPr>
-        <p:style>
-          <a:lnRef idx="1">
-            <a:schemeClr val="accent1"/>
-          </a:lnRef>
-          <a:fillRef idx="3">
-            <a:schemeClr val="accent1"/>
-          </a:fillRef>
-          <a:effectRef idx="2">
-            <a:schemeClr val="accent1"/>
-          </a:effectRef>
-          <a:fontRef idx="minor">
-            <a:schemeClr val="lt1"/>
-          </a:fontRef>
-        </p:style>
-        <p:txBody>
-          <a:bodyPr rtlCol="0" anchor="ctr"/>
-          <a:lstStyle/>
-          <a:p>
-            <a:pPr algn="ctr"/>
-            <a:r>
-              <a:rPr sz="1700" b="1">
-                <a:solidFill>
-                  <a:srgbClr val="FFFFFF"/>
-                </a:solidFill>
-                <a:latin typeface="Segoe UI"/>
-              </a:rPr>
-              <a:t>HOW A SETS THE PERIOD</a:t>
-            </a:r>
-          </a:p>
-        </p:txBody>
-      </p:sp>
-      <p:sp>
-        <p:nvSpPr>
-          <p:cNvPr id="11" name="TextBox 10"/>
-          <p:cNvSpPr txBox="1"/>
-          <p:nvPr/>
-        </p:nvSpPr>
-        <p:spPr>
-          <a:xfrm>
-            <a:off x="6153912" y="2267712"/>
-            <a:ext cx="5532120" cy="310896"/>
-          </a:xfrm>
-          <a:prstGeom prst="rect">
-            <a:avLst/>
-          </a:prstGeom>
-          <a:noFill/>
-        </p:spPr>
-        <p:txBody>
-          <a:bodyPr wrap="none">
-            <a:spAutoFit/>
-          </a:bodyPr>
-          <a:lstStyle/>
-          <a:p>
-            <a:pPr algn="ctr"/>
-            <a:r>
-              <a:rPr sz="1050" i="1">
-                <a:solidFill>
-                  <a:srgbClr val="54636D"/>
-                </a:solidFill>
-                <a:latin typeface="Segoe UI"/>
-              </a:rPr>
-              <a:t>extra inertia → longer period</a:t>
-            </a:r>
-          </a:p>
-        </p:txBody>
-      </p:sp>
-      <p:sp>
-        <p:nvSpPr>
-          <p:cNvPr id="12" name="TextBox 11"/>
-          <p:cNvSpPr txBox="1"/>
-          <p:nvPr/>
-        </p:nvSpPr>
-        <p:spPr>
-          <a:xfrm>
-            <a:off x="6409944" y="2670048"/>
-            <a:ext cx="5056631" cy="2862072"/>
-          </a:xfrm>
-          <a:prstGeom prst="rect">
-            <a:avLst/>
-          </a:prstGeom>
-          <a:noFill/>
-        </p:spPr>
-        <p:txBody>
-          <a:bodyPr wrap="square">
-            <a:spAutoFit/>
-          </a:bodyPr>
-          <a:lstStyle/>
-          <a:p>
-            <a:pPr>
-              <a:spcAft>
-                <a:spcPts val="600"/>
-              </a:spcAft>
-            </a:pPr>
-            <a:r>
-              <a:rPr sz="1300">
-                <a:solidFill>
-                  <a:srgbClr val="0A5560"/>
-                </a:solidFill>
-                <a:latin typeface="Segoe UI"/>
-              </a:rPr>
               <a:t>•  </a:t>
             </a:r>
             <a:r>
-              <a:rPr sz="1300" b="0" i="0">
-                <a:solidFill>
-                  <a:srgbClr val="25323A"/>
-                </a:solidFill>
-                <a:latin typeface="Segoe UI"/>
-              </a:rPr>
-              <a:t>Add A to the mass in the same oscillator:</a:t>
-            </a:r>
-          </a:p>
-          <a:p>
-            <a:pPr>
-              <a:spcAft>
-                <a:spcPts val="600"/>
-              </a:spcAft>
-            </a:pPr>
-            <a:r>
-              <a:rPr sz="1300">
-                <a:solidFill>
-                  <a:srgbClr val="0A5560"/>
-                </a:solidFill>
-                <a:latin typeface="Segoe UI"/>
-              </a:rPr>
-              <a:t>•  </a:t>
-            </a:r>
-            <a:r>
-              <a:rPr sz="1300" b="1" i="0">
-                <a:solidFill>
-                  <a:srgbClr val="0A5560"/>
-                </a:solidFill>
-                <a:latin typeface="Segoe UI"/>
-              </a:rPr>
-              <a:t>T = 2π √( (M + A) / C₃₃ )</a:t>
-            </a:r>
-          </a:p>
-          <a:p>
-            <a:pPr>
-              <a:spcAft>
-                <a:spcPts val="600"/>
-              </a:spcAft>
-            </a:pPr>
-            <a:r>
-              <a:rPr sz="1300">
-                <a:solidFill>
-                  <a:srgbClr val="0A5560"/>
-                </a:solidFill>
-                <a:latin typeface="Segoe UI"/>
-              </a:rPr>
-              <a:t>•  </a:t>
-            </a:r>
-            <a:r>
-              <a:rPr sz="1300" b="0" i="0">
-                <a:solidFill>
-                  <a:srgbClr val="25323A"/>
-                </a:solidFill>
-                <a:latin typeface="Segoe UI"/>
-              </a:rPr>
-              <a:t>Period-stretch factor = √((M+A)/M)</a:t>
-            </a:r>
-          </a:p>
-          <a:p>
-            <a:pPr>
-              <a:spcAft>
-                <a:spcPts val="600"/>
-              </a:spcAft>
-            </a:pPr>
-            <a:r>
-              <a:rPr sz="1300">
-                <a:solidFill>
-                  <a:srgbClr val="0A5560"/>
-                </a:solidFill>
-                <a:latin typeface="Segoe UI"/>
-              </a:rPr>
-              <a:t>•  </a:t>
-            </a:r>
-            <a:r>
-              <a:rPr sz="1300" b="1" i="0">
-                <a:solidFill>
-                  <a:srgbClr val="25323A"/>
-                </a:solidFill>
-                <a:latin typeface="Segoe UI"/>
-              </a:rPr>
-              <a:t>= √(31.2 / 21.5) = 1.205</a:t>
-            </a:r>
-          </a:p>
-          <a:p>
-            <a:pPr>
-              <a:spcAft>
-                <a:spcPts val="600"/>
-              </a:spcAft>
-            </a:pPr>
-            <a:r>
-              <a:rPr sz="1300">
-                <a:solidFill>
-                  <a:srgbClr val="0A5560"/>
-                </a:solidFill>
-                <a:latin typeface="Segoe UI"/>
-              </a:rPr>
-              <a:t>⇒  </a:t>
-            </a:r>
-            <a:r>
-              <a:rPr sz="1300" b="1" i="0">
-                <a:solidFill>
-                  <a:srgbClr val="0A5560"/>
-                </a:solidFill>
-                <a:latin typeface="Segoe UI"/>
-              </a:rPr>
-              <a:t>2.09 s  ×  1.205  =  2.52 s</a:t>
-            </a:r>
-          </a:p>
-          <a:p>
-            <a:pPr>
-              <a:spcAft>
-                <a:spcPts val="600"/>
-              </a:spcAft>
-            </a:pPr>
-            <a:r>
-              <a:rPr sz="1300">
-                <a:solidFill>
-                  <a:srgbClr val="0A5560"/>
-                </a:solidFill>
-                <a:latin typeface="Segoe UI"/>
-              </a:rPr>
-              <a:t>•  </a:t>
-            </a:r>
-            <a:r>
-              <a:rPr sz="1300" b="0" i="1">
-                <a:solidFill>
-                  <a:srgbClr val="25323A"/>
-                </a:solidFill>
-                <a:latin typeface="Segoe UI"/>
-              </a:rPr>
-              <a:t>Heave inertia is ~45% water — A moves the period; C₃₃ is known, so the period is a clean prediction, the damping is the measurement.</a:t>
-            </a:r>
-          </a:p>
-        </p:txBody>
-      </p:sp>
-      <p:sp>
-        <p:nvSpPr>
-          <p:cNvPr id="13" name="Rectangle 12"/>
-          <p:cNvSpPr/>
-          <p:nvPr/>
-        </p:nvSpPr>
-        <p:spPr>
-          <a:xfrm>
-            <a:off x="777240" y="5852160"/>
-            <a:ext cx="10927080" cy="713232"/>
-          </a:xfrm>
-          <a:prstGeom prst="rect">
-            <a:avLst/>
-          </a:prstGeom>
-          <a:solidFill>
-            <a:srgbClr val="EEF6F7"/>
-          </a:solidFill>
-          <a:ln>
-            <a:noFill/>
-          </a:ln>
-          <a:effectLst/>
-        </p:spPr>
-        <p:style>
-          <a:lnRef idx="1">
-            <a:schemeClr val="accent1"/>
-          </a:lnRef>
-          <a:fillRef idx="3">
-            <a:schemeClr val="accent1"/>
-          </a:fillRef>
-          <a:effectRef idx="2">
-            <a:schemeClr val="accent1"/>
-          </a:effectRef>
-          <a:fontRef idx="minor">
-            <a:schemeClr val="lt1"/>
-          </a:fontRef>
-        </p:style>
-        <p:txBody>
-          <a:bodyPr rtlCol="0" anchor="ctr"/>
-          <a:lstStyle/>
-          <a:p>
-            <a:pPr algn="ctr"/>
-            <a:endParaRPr/>
-          </a:p>
-        </p:txBody>
-      </p:sp>
-      <p:sp>
-        <p:nvSpPr>
-          <p:cNvPr id="14" name="TextBox 13"/>
-          <p:cNvSpPr txBox="1"/>
-          <p:nvPr/>
-        </p:nvSpPr>
-        <p:spPr>
-          <a:xfrm>
-            <a:off x="1005840" y="5888736"/>
-            <a:ext cx="10515600" cy="640080"/>
-          </a:xfrm>
-          <a:prstGeom prst="rect">
-            <a:avLst/>
-          </a:prstGeom>
-          <a:noFill/>
-        </p:spPr>
-        <p:txBody>
-          <a:bodyPr wrap="square" anchor="ctr">
-            <a:spAutoFit/>
-          </a:bodyPr>
-          <a:lstStyle/>
-          <a:p>
-            <a:pPr algn="ctr"/>
-            <a:r>
-              <a:rPr sz="1300" b="1">
-                <a:solidFill>
-                  <a:srgbClr val="0A5560"/>
-                </a:solidFill>
-                <a:latin typeface="Segoe UI"/>
-              </a:rPr>
-              <a:t>The field test (2.50 s) lands on the WET period 2.52 s</a:t>
-            </a:r>
-            <a:r>
-              <a:rPr sz="1300" b="0">
-                <a:solidFill>
-                  <a:srgbClr val="25323A"/>
-                </a:solidFill>
-                <a:latin typeface="Segoe UI"/>
-              </a:rPr>
-              <a:t> — not the dry 2.09 s. Direct evidence the entrained-water added mass (~9.7 kg) is real and correctly sized.</a:t>
+              <a:rPr sz="1800" b="0" i="0">
+                <a:solidFill>
+                  <a:srgbClr val="25323A"/>
+                </a:solidFill>
+                <a:latin typeface="Segoe UI"/>
+              </a:rPr>
+              <a:t>Metrics: deck tilt (pitch), heave, and the moment carried at each buoy→platform joint.</a:t>
             </a:r>
           </a:p>
         </p:txBody>
@@ -6973,8 +7746,8 @@
 </p:sld>
 </file>
 
-<file path=ppt/slides/slide16.xml><?xml version="1.0" encoding="utf-8"?>
-<p:sld xmlns:a="http://schemas.openxmlformats.org/drawingml/2006/main" xmlns:r="http://schemas.openxmlformats.org/officeDocument/2006/relationships" xmlns:p="http://schemas.openxmlformats.org/presentationml/2006/main">
+<file path=ppt/slides/slide18.xml><?xml version="1.0" encoding="utf-8"?>
+<p:sld xmlns:a="http://schemas.openxmlformats.org/drawingml/2006/main" xmlns:p="http://schemas.openxmlformats.org/presentationml/2006/main" xmlns:r="http://schemas.openxmlformats.org/officeDocument/2006/relationships">
   <p:cSld>
     <p:bg>
       <p:bgPr>
@@ -6990,14 +7763,7 @@
         <p:cNvGrpSpPr/>
         <p:nvPr/>
       </p:nvGrpSpPr>
-      <p:grpSpPr>
-        <a:xfrm>
-          <a:off x="0" y="0"/>
-          <a:ext cx="0" cy="0"/>
-          <a:chOff x="0" y="0"/>
-          <a:chExt cx="0" cy="0"/>
-        </a:xfrm>
-      </p:grpSpPr>
+      <p:grpSpPr/>
       <p:sp>
         <p:nvSpPr>
           <p:cNvPr id="2" name="TextBox 1"/>
@@ -7027,7 +7793,7 @@
                 </a:solidFill>
                 <a:latin typeface="Segoe UI"/>
               </a:rPr>
-              <a:t>DESIGN STUDY</a:t>
+              <a:t>PLATFORM STUDY</a:t>
             </a:r>
           </a:p>
         </p:txBody>
@@ -7061,7 +7827,7 @@
                 </a:solidFill>
                 <a:latin typeface="Segoe UI"/>
               </a:rPr>
-              <a:t>Where to put the heave plate? — pitch performance</a:t>
+              <a:t>Pin vs rigid — the pin wins on every axis</a:t>
             </a:r>
           </a:p>
         </p:txBody>
@@ -7107,13 +7873,12 @@
           <a:lstStyle/>
           <a:p>
             <a:pPr algn="ctr"/>
-            <a:endParaRPr/>
           </a:p>
         </p:txBody>
       </p:sp>
       <p:pic>
         <p:nvPicPr>
-          <p:cNvPr id="5" name="Picture 4" descr="plate_depth_pitch_study.png"/>
+          <p:cNvPr id="5" name="Picture 4" descr="pvr_verdict.png"/>
           <p:cNvPicPr>
             <a:picLocks noChangeAspect="1"/>
           </p:cNvPicPr>
@@ -7127,8 +7892,8 @@
         </p:blipFill>
         <p:spPr>
           <a:xfrm>
-            <a:off x="1298448" y="1554480"/>
-            <a:ext cx="9601200" cy="3857359"/>
+            <a:off x="640080" y="1783080"/>
+            <a:ext cx="10972800" cy="3614624"/>
           </a:xfrm>
           <a:prstGeom prst="rect">
             <a:avLst/>
@@ -7143,8 +7908,8 @@
         </p:nvSpPr>
         <p:spPr>
           <a:xfrm>
-            <a:off x="777240" y="5943600"/>
-            <a:ext cx="10607040" cy="731520"/>
+            <a:off x="777240" y="5806440"/>
+            <a:ext cx="10607040" cy="749808"/>
           </a:xfrm>
           <a:prstGeom prst="rect">
             <a:avLst/>
@@ -7176,7 +7941,6 @@
           <a:lstStyle/>
           <a:p>
             <a:pPr algn="ctr"/>
-            <a:endParaRPr/>
           </a:p>
         </p:txBody>
       </p:sp>
@@ -7188,7 +7952,7 @@
         </p:nvSpPr>
         <p:spPr>
           <a:xfrm>
-            <a:off x="960120" y="5980176"/>
+            <a:off x="960120" y="5852160"/>
             <a:ext cx="10241280" cy="658368"/>
           </a:xfrm>
           <a:prstGeom prst="rect">
@@ -7210,7 +7974,7 @@
                 </a:solidFill>
                 <a:latin typeface="Segoe UI"/>
               </a:rPr>
-              <a:t>Plate depth barely moves pitch</a:t>
+              <a:t>Same heave</a:t>
             </a:r>
             <a:r>
               <a:rPr sz="1300" b="0">
@@ -7219,16 +7983,43 @@
                 </a:solidFill>
                 <a:latin typeface="Segoe UI"/>
               </a:rPr>
-              <a:t> (2.10 → 2.14 s over a 4× lever-arm change) or heave — an axial plate meets pitch EDGE-ON, so its broadside added mass &amp; drag (which dominate heave) hardly engage it.  </a:t>
+              <a:t>; the rigid raft tilts </a:t>
             </a:r>
             <a:r>
               <a:rPr sz="1300" b="1">
                 <a:solidFill>
+                  <a:srgbClr val="D1543A"/>
+                </a:solidFill>
+                <a:latin typeface="Segoe UI"/>
+              </a:rPr>
+              <a:t>1.3–3.5× more</a:t>
+            </a:r>
+            <a:r>
+              <a:rPr sz="1300" b="0">
+                <a:solidFill>
+                  <a:srgbClr val="25323A"/>
+                </a:solidFill>
+                <a:latin typeface="Segoe UI"/>
+              </a:rPr>
+              <a:t>; and the pin carries </a:t>
+            </a:r>
+            <a:r>
+              <a:rPr sz="1300" b="1">
+                <a:solidFill>
                   <a:srgbClr val="0A5560"/>
                 </a:solidFill>
                 <a:latin typeface="Segoe UI"/>
               </a:rPr>
-              <a:t>Deck tilt is a ballast/CoG job, not a plate-depth job.</a:t>
+              <a:t>~zero connection moment</a:t>
+            </a:r>
+            <a:r>
+              <a:rPr sz="1300" b="0">
+                <a:solidFill>
+                  <a:srgbClr val="25323A"/>
+                </a:solidFill>
+                <a:latin typeface="Segoe UI"/>
+              </a:rPr>
+              <a:t> vs the weld's hundreds of N·m/m. The gimbals absorb buoy tilt instead of dumping it into the deck.</a:t>
             </a:r>
           </a:p>
         </p:txBody>
@@ -7241,8 +8032,8 @@
 </p:sld>
 </file>
 
-<file path=ppt/slides/slide17.xml><?xml version="1.0" encoding="utf-8"?>
-<p:sld xmlns:a="http://schemas.openxmlformats.org/drawingml/2006/main" xmlns:r="http://schemas.openxmlformats.org/officeDocument/2006/relationships" xmlns:p="http://schemas.openxmlformats.org/presentationml/2006/main">
+<file path=ppt/slides/slide2.xml><?xml version="1.0" encoding="utf-8"?>
+<p:sld xmlns:a="http://schemas.openxmlformats.org/drawingml/2006/main" xmlns:p="http://schemas.openxmlformats.org/presentationml/2006/main" xmlns:r="http://schemas.openxmlformats.org/officeDocument/2006/relationships">
   <p:cSld>
     <p:bg>
       <p:bgPr>
@@ -7258,14 +8049,7 @@
         <p:cNvGrpSpPr/>
         <p:nvPr/>
       </p:nvGrpSpPr>
-      <p:grpSpPr>
-        <a:xfrm>
-          <a:off x="0" y="0"/>
-          <a:ext cx="0" cy="0"/>
-          <a:chOff x="0" y="0"/>
-          <a:chExt cx="0" cy="0"/>
-        </a:xfrm>
-      </p:grpSpPr>
+      <p:grpSpPr/>
       <p:sp>
         <p:nvSpPr>
           <p:cNvPr id="2" name="TextBox 1"/>
@@ -7295,7 +8079,7 @@
                 </a:solidFill>
                 <a:latin typeface="Segoe UI"/>
               </a:rPr>
-              <a:t>PLATFORM STUDY</a:t>
+              <a:t>THE TOOL</a:t>
             </a:r>
           </a:p>
         </p:txBody>
@@ -7329,7 +8113,7 @@
                 </a:solidFill>
                 <a:latin typeface="Segoe UI"/>
               </a:rPr>
-              <a:t>Do the buoy gimbals help the platform? — pin vs rigid</a:t>
+              <a:t>What Capytaine computes</a:t>
             </a:r>
           </a:p>
         </p:txBody>
@@ -7375,7 +8159,6 @@
           <a:lstStyle/>
           <a:p>
             <a:pPr algn="ctr"/>
-            <a:endParaRPr/>
           </a:p>
         </p:txBody>
       </p:sp>
@@ -7387,7 +8170,7 @@
         </p:nvSpPr>
         <p:spPr>
           <a:xfrm>
-            <a:off x="777240" y="1920240"/>
+            <a:off x="777240" y="1828800"/>
             <a:ext cx="10698480" cy="4572000"/>
           </a:xfrm>
           <a:prstGeom prst="rect">
@@ -7425,7 +8208,7 @@
                 </a:solidFill>
                 <a:latin typeface="Segoe UI"/>
               </a:rPr>
-              <a:t>Scaling up: 16 buoys on a shared platform — a </a:t>
+              <a:t>Boundary-element (panel) solver for </a:t>
             </a:r>
             <a:r>
               <a:rPr sz="1800" b="1" i="0">
@@ -7434,7 +8217,7 @@
                 </a:solidFill>
                 <a:latin typeface="Segoe UI"/>
               </a:rPr>
-              <a:t>still, level deck</a:t>
+              <a:t>linear potential-flow hydrodynamics</a:t>
             </a:r>
             <a:r>
               <a:rPr sz="1800" b="0" i="0">
@@ -7443,7 +8226,7 @@
                 </a:solidFill>
                 <a:latin typeface="Segoe UI"/>
               </a:rPr>
-              <a:t> for rockets / datacenters / hotels.</a:t>
+              <a:t>.</a:t>
             </a:r>
           </a:p>
           <a:p>
@@ -7471,25 +8254,7 @@
                 </a:solidFill>
                 <a:latin typeface="Segoe UI"/>
               </a:rPr>
-              <a:t>Each buoy joins the platform through the </a:t>
-            </a:r>
-            <a:r>
-              <a:rPr sz="1800" b="1" i="0">
-                <a:solidFill>
-                  <a:srgbClr val="25323A"/>
-                </a:solidFill>
-                <a:latin typeface="Segoe UI"/>
-              </a:rPr>
-              <a:t>gimbal at its top</a:t>
-            </a:r>
-            <a:r>
-              <a:rPr sz="1800" b="0" i="0">
-                <a:solidFill>
-                  <a:srgbClr val="25323A"/>
-                </a:solidFill>
-                <a:latin typeface="Segoe UI"/>
-              </a:rPr>
-              <a:t> (a pin: roll/pitch free). Does that beat welding the assembly rigid?</a:t>
+              <a:t>In: the wetted hull as a mesh of panels.  Out: the flow (velocity potential φ) around it in regular waves at each frequency ω.</a:t>
             </a:r>
           </a:p>
           <a:p>
@@ -7517,7 +8282,71 @@
                 </a:solidFill>
                 <a:latin typeface="Segoe UI"/>
               </a:rPr>
-              <a:t>Same 16-buoy deck, same hydro / drag / geometry — only the joint type changes:</a:t>
+              <a:t>“Potential flow” = </a:t>
+            </a:r>
+            <a:r>
+              <a:rPr sz="1800" b="1" i="0">
+                <a:solidFill>
+                  <a:srgbClr val="0A5560"/>
+                </a:solidFill>
+                <a:latin typeface="Segoe UI"/>
+              </a:rPr>
+              <a:t>inviscid, irrotational, small (linear)</a:t>
+            </a:r>
+            <a:r>
+              <a:rPr sz="1800" b="0" i="0">
+                <a:solidFill>
+                  <a:srgbClr val="25323A"/>
+                </a:solidFill>
+                <a:latin typeface="Segoe UI"/>
+              </a:rPr>
+              <a:t> waves &amp; motions — the one assumption that sets both the outputs and the limits.</a:t>
+            </a:r>
+          </a:p>
+          <a:p>
+            <a:pPr>
+              <a:spcBef>
+                <a:spcPts val="200"/>
+              </a:spcBef>
+              <a:spcAft>
+                <a:spcPts val="1200"/>
+              </a:spcAft>
+            </a:pPr>
+            <a:r>
+              <a:rPr sz="1800">
+                <a:solidFill>
+                  <a:srgbClr val="0C8B96"/>
+                </a:solidFill>
+                <a:latin typeface="Segoe UI"/>
+              </a:rPr>
+              <a:t>•  </a:t>
+            </a:r>
+            <a:r>
+              <a:rPr sz="1800" b="0" i="0">
+                <a:solidFill>
+                  <a:srgbClr val="25323A"/>
+                </a:solidFill>
+                <a:latin typeface="Segoe UI"/>
+              </a:rPr>
+              <a:t>Key idea — </a:t>
+            </a:r>
+            <a:r>
+              <a:rPr sz="1800" b="1" i="0">
+                <a:solidFill>
+                  <a:srgbClr val="25323A"/>
+                </a:solidFill>
+                <a:latin typeface="Segoe UI"/>
+              </a:rPr>
+              <a:t>superposition</a:t>
+            </a:r>
+            <a:r>
+              <a:rPr sz="1800" b="0" i="0">
+                <a:solidFill>
+                  <a:srgbClr val="25323A"/>
+                </a:solidFill>
+                <a:latin typeface="Segoe UI"/>
+              </a:rPr>
+              <a:t>: the wave-body problem splits into two sub-problems, solved separately and added:</a:t>
             </a:r>
           </a:p>
           <a:p>
@@ -7545,7 +8374,7 @@
                 </a:solidFill>
                 <a:latin typeface="Segoe UI"/>
               </a:rPr>
-              <a:t>Articulated</a:t>
+              <a:t>Radiation</a:t>
             </a:r>
             <a:r>
               <a:rPr sz="1600" b="0" i="0">
@@ -7554,7 +8383,7 @@
                 </a:solidFill>
                 <a:latin typeface="Segoe UI"/>
               </a:rPr>
-              <a:t> — every joint a pin (the current design)</a:t>
+              <a:t> — the body wavemaking in still water</a:t>
             </a:r>
           </a:p>
           <a:p>
@@ -7578,11 +8407,11 @@
             <a:r>
               <a:rPr sz="1600" b="1" i="0">
                 <a:solidFill>
-                  <a:srgbClr val="D1543A"/>
-                </a:solidFill>
-                <a:latin typeface="Segoe UI"/>
-              </a:rPr>
-              <a:t>Whole-chain rigid</a:t>
+                  <a:srgbClr val="0A5560"/>
+                </a:solidFill>
+                <a:latin typeface="Segoe UI"/>
+              </a:rPr>
+              <a:t>Diffraction</a:t>
             </a:r>
             <a:r>
               <a:rPr sz="1600" b="0" i="0">
@@ -7591,35 +8420,7 @@
                 </a:solidFill>
                 <a:latin typeface="Segoe UI"/>
               </a:rPr>
-              <a:t> — every joint welded → one rigid raft</a:t>
-            </a:r>
-          </a:p>
-          <a:p>
-            <a:pPr>
-              <a:spcBef>
-                <a:spcPts val="200"/>
-              </a:spcBef>
-              <a:spcAft>
-                <a:spcPts val="1200"/>
-              </a:spcAft>
-            </a:pPr>
-            <a:r>
-              <a:rPr sz="1800">
-                <a:solidFill>
-                  <a:srgbClr val="0C8B96"/>
-                </a:solidFill>
-                <a:latin typeface="Segoe UI"/>
-              </a:rPr>
-              <a:t>•  </a:t>
-            </a:r>
-            <a:r>
-              <a:rPr sz="1800" b="0" i="0">
-                <a:solidFill>
-                  <a:srgbClr val="25323A"/>
-                </a:solidFill>
-                <a:latin typeface="Segoe UI"/>
-              </a:rPr>
-              <a:t>Metrics: deck tilt (pitch), heave, and the moment carried at each buoy→platform joint.</a:t>
+              <a:t> — the body held fixed under incoming waves</a:t>
             </a:r>
           </a:p>
         </p:txBody>
@@ -7632,8 +8433,8 @@
 </p:sld>
 </file>
 
-<file path=ppt/slides/slide18.xml><?xml version="1.0" encoding="utf-8"?>
-<p:sld xmlns:a="http://schemas.openxmlformats.org/drawingml/2006/main" xmlns:r="http://schemas.openxmlformats.org/officeDocument/2006/relationships" xmlns:p="http://schemas.openxmlformats.org/presentationml/2006/main">
+<file path=ppt/slides/slide3.xml><?xml version="1.0" encoding="utf-8"?>
+<p:sld xmlns:a="http://schemas.openxmlformats.org/drawingml/2006/main" xmlns:p="http://schemas.openxmlformats.org/presentationml/2006/main" xmlns:r="http://schemas.openxmlformats.org/officeDocument/2006/relationships">
   <p:cSld>
     <p:bg>
       <p:bgPr>
@@ -7649,14 +8450,7 @@
         <p:cNvGrpSpPr/>
         <p:nvPr/>
       </p:nvGrpSpPr>
-      <p:grpSpPr>
-        <a:xfrm>
-          <a:off x="0" y="0"/>
-          <a:ext cx="0" cy="0"/>
-          <a:chOff x="0" y="0"/>
-          <a:chExt cx="0" cy="0"/>
-        </a:xfrm>
-      </p:grpSpPr>
+      <p:grpSpPr/>
       <p:sp>
         <p:nvSpPr>
           <p:cNvPr id="2" name="TextBox 1"/>
@@ -7686,7 +8480,7 @@
                 </a:solidFill>
                 <a:latin typeface="Segoe UI"/>
               </a:rPr>
-              <a:t>PLATFORM STUDY</a:t>
+              <a:t>THE MODEL</a:t>
             </a:r>
           </a:p>
         </p:txBody>
@@ -7720,7 +8514,7 @@
                 </a:solidFill>
                 <a:latin typeface="Segoe UI"/>
               </a:rPr>
-              <a:t>Pin vs rigid — the pin wins on every axis</a:t>
+              <a:t>The mesh we solve on</a:t>
             </a:r>
           </a:p>
         </p:txBody>
@@ -7766,13 +8560,12 @@
           <a:lstStyle/>
           <a:p>
             <a:pPr algn="ctr"/>
-            <a:endParaRPr/>
           </a:p>
         </p:txBody>
       </p:sp>
       <p:pic>
         <p:nvPicPr>
-          <p:cNvPr id="5" name="Picture 4" descr="pvr_verdict.png"/>
+          <p:cNvPr id="5" name="Picture 4" descr="OSU_buoy_mesh_capytaine.png"/>
           <p:cNvPicPr>
             <a:picLocks noChangeAspect="1"/>
           </p:cNvPicPr>
@@ -7786,8 +8579,8 @@
         </p:blipFill>
         <p:spPr>
           <a:xfrm>
-            <a:off x="640080" y="1783080"/>
-            <a:ext cx="10972800" cy="3614624"/>
+            <a:off x="3063240" y="1371600"/>
+            <a:ext cx="6881071" cy="4553712"/>
           </a:xfrm>
           <a:prstGeom prst="rect">
             <a:avLst/>
@@ -7802,8 +8595,8 @@
         </p:nvSpPr>
         <p:spPr>
           <a:xfrm>
-            <a:off x="777240" y="5806440"/>
-            <a:ext cx="10607040" cy="749808"/>
+            <a:off x="777240" y="6035040"/>
+            <a:ext cx="10607040" cy="640080"/>
           </a:xfrm>
           <a:prstGeom prst="rect">
             <a:avLst/>
@@ -7835,7 +8628,6 @@
           <a:lstStyle/>
           <a:p>
             <a:pPr algn="ctr"/>
-            <a:endParaRPr/>
           </a:p>
         </p:txBody>
       </p:sp>
@@ -7847,8 +8639,8 @@
         </p:nvSpPr>
         <p:spPr>
           <a:xfrm>
-            <a:off x="960120" y="5852160"/>
-            <a:ext cx="10241280" cy="658368"/>
+            <a:off x="960120" y="6071616"/>
+            <a:ext cx="10241280" cy="566928"/>
           </a:xfrm>
           <a:prstGeom prst="rect">
             <a:avLst/>
@@ -7863,13 +8655,22 @@
           <a:p>
             <a:pPr algn="ctr"/>
             <a:r>
+              <a:rPr sz="1300" b="0">
+                <a:solidFill>
+                  <a:srgbClr val="25323A"/>
+                </a:solidFill>
+                <a:latin typeface="Segoe UI"/>
+              </a:rPr>
+              <a:t>6″ spar cylinder + a </a:t>
+            </a:r>
+            <a:r>
               <a:rPr sz="1300" b="1">
                 <a:solidFill>
                   <a:srgbClr val="0A5560"/>
                 </a:solidFill>
                 <a:latin typeface="Segoe UI"/>
               </a:rPr>
-              <a:t>Same heave</a:t>
+              <a:t>placeholder solid equal-area disc</a:t>
             </a:r>
             <a:r>
               <a:rPr sz="1300" b="0">
@@ -7878,16 +8679,16 @@
                 </a:solidFill>
                 <a:latin typeface="Segoe UI"/>
               </a:rPr>
-              <a:t>; the rigid raft tilts </a:t>
+              <a:t> for the perforated heave plate.  Capytaine meshes the </a:t>
             </a:r>
             <a:r>
               <a:rPr sz="1300" b="1">
                 <a:solidFill>
-                  <a:srgbClr val="D1543A"/>
-                </a:solidFill>
-                <a:latin typeface="Segoe UI"/>
-              </a:rPr>
-              <a:t>1.3–3.5× more</a:t>
+                  <a:srgbClr val="25323A"/>
+                </a:solidFill>
+                <a:latin typeface="Segoe UI"/>
+              </a:rPr>
+              <a:t>wetted part (z &lt; 0, 3408 panels)</a:t>
             </a:r>
             <a:r>
               <a:rPr sz="1300" b="0">
@@ -7896,25 +8697,7 @@
                 </a:solidFill>
                 <a:latin typeface="Segoe UI"/>
               </a:rPr>
-              <a:t>; and the pin carries </a:t>
-            </a:r>
-            <a:r>
-              <a:rPr sz="1300" b="1">
-                <a:solidFill>
-                  <a:srgbClr val="0A5560"/>
-                </a:solidFill>
-                <a:latin typeface="Segoe UI"/>
-              </a:rPr>
-              <a:t>~zero connection moment</a:t>
-            </a:r>
-            <a:r>
-              <a:rPr sz="1300" b="0">
-                <a:solidFill>
-                  <a:srgbClr val="25323A"/>
-                </a:solidFill>
-                <a:latin typeface="Segoe UI"/>
-              </a:rPr>
-              <a:t> vs the weld's hundreds of N·m/m. The gimbals absorb buoy tilt instead of dumping it into the deck.</a:t>
+              <a:t>; the plate’s real hydro comes from the tank.</a:t>
             </a:r>
           </a:p>
         </p:txBody>
@@ -7927,8 +8710,8 @@
 </p:sld>
 </file>
 
-<file path=ppt/slides/slide2.xml><?xml version="1.0" encoding="utf-8"?>
-<p:sld xmlns:a="http://schemas.openxmlformats.org/drawingml/2006/main" xmlns:r="http://schemas.openxmlformats.org/officeDocument/2006/relationships" xmlns:p="http://schemas.openxmlformats.org/presentationml/2006/main">
+<file path=ppt/slides/slide4.xml><?xml version="1.0" encoding="utf-8"?>
+<p:sld xmlns:a="http://schemas.openxmlformats.org/drawingml/2006/main" xmlns:p="http://schemas.openxmlformats.org/presentationml/2006/main" xmlns:r="http://schemas.openxmlformats.org/officeDocument/2006/relationships">
   <p:cSld>
     <p:bg>
       <p:bgPr>
@@ -7944,14 +8727,7 @@
         <p:cNvGrpSpPr/>
         <p:nvPr/>
       </p:nvGrpSpPr>
-      <p:grpSpPr>
-        <a:xfrm>
-          <a:off x="0" y="0"/>
-          <a:ext cx="0" cy="0"/>
-          <a:chOff x="0" y="0"/>
-          <a:chExt cx="0" cy="0"/>
-        </a:xfrm>
-      </p:grpSpPr>
+      <p:grpSpPr/>
       <p:sp>
         <p:nvSpPr>
           <p:cNvPr id="2" name="TextBox 1"/>
@@ -7981,7 +8757,7 @@
                 </a:solidFill>
                 <a:latin typeface="Segoe UI"/>
               </a:rPr>
-              <a:t>THE TOOL</a:t>
+              <a:t>OVERVIEW</a:t>
             </a:r>
           </a:p>
         </p:txBody>
@@ -8015,7 +8791,7 @@
                 </a:solidFill>
                 <a:latin typeface="Segoe UI"/>
               </a:rPr>
-              <a:t>What Capytaine computes</a:t>
+              <a:t>The two sub-problems — and how they combine</a:t>
             </a:r>
           </a:p>
         </p:txBody>
@@ -8061,273 +8837,33 @@
           <a:lstStyle/>
           <a:p>
             <a:pPr algn="ctr"/>
-            <a:endParaRPr/>
-          </a:p>
-        </p:txBody>
-      </p:sp>
-      <p:sp>
-        <p:nvSpPr>
-          <p:cNvPr id="5" name="TextBox 4"/>
-          <p:cNvSpPr txBox="1"/>
+          </a:p>
+        </p:txBody>
+      </p:sp>
+      <p:pic>
+        <p:nvPicPr>
+          <p:cNvPr id="5" name="Picture 4" descr="Capytaine_explained.png"/>
+          <p:cNvPicPr>
+            <a:picLocks noChangeAspect="1"/>
+          </p:cNvPicPr>
           <p:nvPr/>
-        </p:nvSpPr>
-        <p:spPr>
-          <a:xfrm>
-            <a:off x="777240" y="1828800"/>
-            <a:ext cx="10698480" cy="4572000"/>
-          </a:xfrm>
-          <a:prstGeom prst="rect">
-            <a:avLst/>
-          </a:prstGeom>
-          <a:noFill/>
-        </p:spPr>
-        <p:txBody>
-          <a:bodyPr wrap="square">
-            <a:spAutoFit/>
-          </a:bodyPr>
-          <a:lstStyle/>
-          <a:p>
-            <a:pPr>
-              <a:spcBef>
-                <a:spcPts val="200"/>
-              </a:spcBef>
-              <a:spcAft>
-                <a:spcPts val="1200"/>
-              </a:spcAft>
-            </a:pPr>
-            <a:r>
-              <a:rPr sz="1800">
-                <a:solidFill>
-                  <a:srgbClr val="0C8B96"/>
-                </a:solidFill>
-                <a:latin typeface="Segoe UI"/>
-              </a:rPr>
-              <a:t>•  </a:t>
-            </a:r>
-            <a:r>
-              <a:rPr sz="1800" b="0" i="0">
-                <a:solidFill>
-                  <a:srgbClr val="25323A"/>
-                </a:solidFill>
-                <a:latin typeface="Segoe UI"/>
-              </a:rPr>
-              <a:t>Boundary-element (panel) solver for </a:t>
-            </a:r>
-            <a:r>
-              <a:rPr sz="1800" b="1" i="0">
-                <a:solidFill>
-                  <a:srgbClr val="25323A"/>
-                </a:solidFill>
-                <a:latin typeface="Segoe UI"/>
-              </a:rPr>
-              <a:t>linear potential-flow hydrodynamics</a:t>
-            </a:r>
-            <a:r>
-              <a:rPr sz="1800" b="0" i="0">
-                <a:solidFill>
-                  <a:srgbClr val="25323A"/>
-                </a:solidFill>
-                <a:latin typeface="Segoe UI"/>
-              </a:rPr>
-              <a:t>.</a:t>
-            </a:r>
-          </a:p>
-          <a:p>
-            <a:pPr>
-              <a:spcBef>
-                <a:spcPts val="200"/>
-              </a:spcBef>
-              <a:spcAft>
-                <a:spcPts val="1200"/>
-              </a:spcAft>
-            </a:pPr>
-            <a:r>
-              <a:rPr sz="1800">
-                <a:solidFill>
-                  <a:srgbClr val="0C8B96"/>
-                </a:solidFill>
-                <a:latin typeface="Segoe UI"/>
-              </a:rPr>
-              <a:t>•  </a:t>
-            </a:r>
-            <a:r>
-              <a:rPr sz="1800" b="0" i="0">
-                <a:solidFill>
-                  <a:srgbClr val="25323A"/>
-                </a:solidFill>
-                <a:latin typeface="Segoe UI"/>
-              </a:rPr>
-              <a:t>In: the wetted hull as a mesh of panels.  Out: the flow (velocity potential φ) around it in regular waves at each frequency ω.</a:t>
-            </a:r>
-          </a:p>
-          <a:p>
-            <a:pPr>
-              <a:spcBef>
-                <a:spcPts val="200"/>
-              </a:spcBef>
-              <a:spcAft>
-                <a:spcPts val="1200"/>
-              </a:spcAft>
-            </a:pPr>
-            <a:r>
-              <a:rPr sz="1800">
-                <a:solidFill>
-                  <a:srgbClr val="0C8B96"/>
-                </a:solidFill>
-                <a:latin typeface="Segoe UI"/>
-              </a:rPr>
-              <a:t>•  </a:t>
-            </a:r>
-            <a:r>
-              <a:rPr sz="1800" b="0" i="0">
-                <a:solidFill>
-                  <a:srgbClr val="25323A"/>
-                </a:solidFill>
-                <a:latin typeface="Segoe UI"/>
-              </a:rPr>
-              <a:t>“Potential flow” = </a:t>
-            </a:r>
-            <a:r>
-              <a:rPr sz="1800" b="1" i="0">
-                <a:solidFill>
-                  <a:srgbClr val="0A5560"/>
-                </a:solidFill>
-                <a:latin typeface="Segoe UI"/>
-              </a:rPr>
-              <a:t>inviscid, irrotational, small (linear)</a:t>
-            </a:r>
-            <a:r>
-              <a:rPr sz="1800" b="0" i="0">
-                <a:solidFill>
-                  <a:srgbClr val="25323A"/>
-                </a:solidFill>
-                <a:latin typeface="Segoe UI"/>
-              </a:rPr>
-              <a:t> waves &amp; motions — the one assumption that sets both the outputs and the limits.</a:t>
-            </a:r>
-          </a:p>
-          <a:p>
-            <a:pPr>
-              <a:spcBef>
-                <a:spcPts val="200"/>
-              </a:spcBef>
-              <a:spcAft>
-                <a:spcPts val="1200"/>
-              </a:spcAft>
-            </a:pPr>
-            <a:r>
-              <a:rPr sz="1800">
-                <a:solidFill>
-                  <a:srgbClr val="0C8B96"/>
-                </a:solidFill>
-                <a:latin typeface="Segoe UI"/>
-              </a:rPr>
-              <a:t>•  </a:t>
-            </a:r>
-            <a:r>
-              <a:rPr sz="1800" b="0" i="0">
-                <a:solidFill>
-                  <a:srgbClr val="25323A"/>
-                </a:solidFill>
-                <a:latin typeface="Segoe UI"/>
-              </a:rPr>
-              <a:t>Key idea — </a:t>
-            </a:r>
-            <a:r>
-              <a:rPr sz="1800" b="1" i="0">
-                <a:solidFill>
-                  <a:srgbClr val="25323A"/>
-                </a:solidFill>
-                <a:latin typeface="Segoe UI"/>
-              </a:rPr>
-              <a:t>superposition</a:t>
-            </a:r>
-            <a:r>
-              <a:rPr sz="1800" b="0" i="0">
-                <a:solidFill>
-                  <a:srgbClr val="25323A"/>
-                </a:solidFill>
-                <a:latin typeface="Segoe UI"/>
-              </a:rPr>
-              <a:t>: the wave-body problem splits into two sub-problems, solved separately and added:</a:t>
-            </a:r>
-          </a:p>
-          <a:p>
-            <a:pPr lvl="1">
-              <a:spcBef>
-                <a:spcPts val="200"/>
-              </a:spcBef>
-              <a:spcAft>
-                <a:spcPts val="1200"/>
-              </a:spcAft>
-            </a:pPr>
-            <a:r>
-              <a:rPr sz="1800">
-                <a:solidFill>
-                  <a:srgbClr val="54636D"/>
-                </a:solidFill>
-                <a:latin typeface="Segoe UI"/>
-              </a:rPr>
-              <a:t>      –  </a:t>
-            </a:r>
-            <a:r>
-              <a:rPr sz="1600" b="1" i="0">
-                <a:solidFill>
-                  <a:srgbClr val="0A5560"/>
-                </a:solidFill>
-                <a:latin typeface="Segoe UI"/>
-              </a:rPr>
-              <a:t>Radiation</a:t>
-            </a:r>
-            <a:r>
-              <a:rPr sz="1600" b="0" i="0">
-                <a:solidFill>
-                  <a:srgbClr val="25323A"/>
-                </a:solidFill>
-                <a:latin typeface="Segoe UI"/>
-              </a:rPr>
-              <a:t> — the body wavemaking in still water</a:t>
-            </a:r>
-          </a:p>
-          <a:p>
-            <a:pPr lvl="1">
-              <a:spcBef>
-                <a:spcPts val="200"/>
-              </a:spcBef>
-              <a:spcAft>
-                <a:spcPts val="1200"/>
-              </a:spcAft>
-            </a:pPr>
-            <a:r>
-              <a:rPr sz="1800">
-                <a:solidFill>
-                  <a:srgbClr val="54636D"/>
-                </a:solidFill>
-                <a:latin typeface="Segoe UI"/>
-              </a:rPr>
-              <a:t>      –  </a:t>
-            </a:r>
-            <a:r>
-              <a:rPr sz="1600" b="1" i="0">
-                <a:solidFill>
-                  <a:srgbClr val="0A5560"/>
-                </a:solidFill>
-                <a:latin typeface="Segoe UI"/>
-              </a:rPr>
-              <a:t>Diffraction</a:t>
-            </a:r>
-            <a:r>
-              <a:rPr sz="1600" b="0" i="0">
-                <a:solidFill>
-                  <a:srgbClr val="25323A"/>
-                </a:solidFill>
-                <a:latin typeface="Segoe UI"/>
-              </a:rPr>
-              <a:t> — the body held fixed under incoming waves</a:t>
-            </a:r>
-          </a:p>
-        </p:txBody>
-      </p:sp>
+        </p:nvPicPr>
+        <p:blipFill>
+          <a:blip r:embed="rId2"/>
+          <a:stretch>
+            <a:fillRect/>
+          </a:stretch>
+        </p:blipFill>
+        <p:spPr>
+          <a:xfrm>
+            <a:off x="1600200" y="1691640"/>
+            <a:ext cx="7848985" cy="4754880"/>
+          </a:xfrm>
+          <a:prstGeom prst="rect">
+            <a:avLst/>
+          </a:prstGeom>
+        </p:spPr>
+      </p:pic>
     </p:spTree>
   </p:cSld>
   <p:clrMapOvr>
@@ -8336,8 +8872,8 @@
 </p:sld>
 </file>
 
-<file path=ppt/slides/slide3.xml><?xml version="1.0" encoding="utf-8"?>
-<p:sld xmlns:a="http://schemas.openxmlformats.org/drawingml/2006/main" xmlns:r="http://schemas.openxmlformats.org/officeDocument/2006/relationships" xmlns:p="http://schemas.openxmlformats.org/presentationml/2006/main">
+<file path=ppt/slides/slide5.xml><?xml version="1.0" encoding="utf-8"?>
+<p:sld xmlns:a="http://schemas.openxmlformats.org/drawingml/2006/main" xmlns:p="http://schemas.openxmlformats.org/presentationml/2006/main" xmlns:r="http://schemas.openxmlformats.org/officeDocument/2006/relationships">
   <p:cSld>
     <p:bg>
       <p:bgPr>
@@ -8353,14 +8889,7 @@
         <p:cNvGrpSpPr/>
         <p:nvPr/>
       </p:nvGrpSpPr>
-      <p:grpSpPr>
-        <a:xfrm>
-          <a:off x="0" y="0"/>
-          <a:ext cx="0" cy="0"/>
-          <a:chOff x="0" y="0"/>
-          <a:chExt cx="0" cy="0"/>
-        </a:xfrm>
-      </p:grpSpPr>
+      <p:grpSpPr/>
       <p:sp>
         <p:nvSpPr>
           <p:cNvPr id="2" name="TextBox 1"/>
@@ -8390,7 +8919,7 @@
                 </a:solidFill>
                 <a:latin typeface="Segoe UI"/>
               </a:rPr>
-              <a:t>THE MODEL</a:t>
+              <a:t>SUB-PROBLEM ①</a:t>
             </a:r>
           </a:p>
         </p:txBody>
@@ -8424,7 +8953,7 @@
                 </a:solidFill>
                 <a:latin typeface="Segoe UI"/>
               </a:rPr>
-              <a:t>The mesh we solve on</a:t>
+              <a:t>Radiation — “body as a wavemaker”</a:t>
             </a:r>
           </a:p>
         </p:txBody>
@@ -8470,89 +8999,19 @@
           <a:lstStyle/>
           <a:p>
             <a:pPr algn="ctr"/>
-            <a:endParaRPr/>
-          </a:p>
-        </p:txBody>
-      </p:sp>
-      <p:pic>
-        <p:nvPicPr>
-          <p:cNvPr id="5" name="Picture 4" descr="OSU_buoy_mesh_capytaine.png"/>
-          <p:cNvPicPr>
-            <a:picLocks noChangeAspect="1"/>
-          </p:cNvPicPr>
-          <p:nvPr/>
-        </p:nvPicPr>
-        <p:blipFill>
-          <a:blip r:embed="rId2"/>
-          <a:stretch>
-            <a:fillRect/>
-          </a:stretch>
-        </p:blipFill>
-        <p:spPr>
-          <a:xfrm>
-            <a:off x="3063240" y="1371600"/>
-            <a:ext cx="6881071" cy="4553712"/>
-          </a:xfrm>
-          <a:prstGeom prst="rect">
-            <a:avLst/>
-          </a:prstGeom>
-        </p:spPr>
-      </p:pic>
-      <p:sp>
-        <p:nvSpPr>
-          <p:cNvPr id="6" name="Rectangle 5"/>
-          <p:cNvSpPr/>
-          <p:nvPr/>
-        </p:nvSpPr>
-        <p:spPr>
-          <a:xfrm>
-            <a:off x="777240" y="6035040"/>
-            <a:ext cx="10607040" cy="640080"/>
-          </a:xfrm>
-          <a:prstGeom prst="rect">
-            <a:avLst/>
-          </a:prstGeom>
-          <a:solidFill>
-            <a:srgbClr val="EEF6F7"/>
-          </a:solidFill>
-          <a:ln>
-            <a:noFill/>
-          </a:ln>
-          <a:effectLst/>
-        </p:spPr>
-        <p:style>
-          <a:lnRef idx="1">
-            <a:schemeClr val="accent1"/>
-          </a:lnRef>
-          <a:fillRef idx="3">
-            <a:schemeClr val="accent1"/>
-          </a:fillRef>
-          <a:effectRef idx="2">
-            <a:schemeClr val="accent1"/>
-          </a:effectRef>
-          <a:fontRef idx="minor">
-            <a:schemeClr val="lt1"/>
-          </a:fontRef>
-        </p:style>
-        <p:txBody>
-          <a:bodyPr rtlCol="0" anchor="ctr"/>
-          <a:lstStyle/>
-          <a:p>
-            <a:pPr algn="ctr"/>
-            <a:endParaRPr/>
-          </a:p>
-        </p:txBody>
-      </p:sp>
-      <p:sp>
-        <p:nvSpPr>
-          <p:cNvPr id="7" name="TextBox 6"/>
+          </a:p>
+        </p:txBody>
+      </p:sp>
+      <p:sp>
+        <p:nvSpPr>
+          <p:cNvPr id="5" name="TextBox 4"/>
           <p:cNvSpPr txBox="1"/>
           <p:nvPr/>
         </p:nvSpPr>
         <p:spPr>
           <a:xfrm>
-            <a:off x="960120" y="6071616"/>
-            <a:ext cx="10241280" cy="566928"/>
+            <a:off x="777240" y="1828800"/>
+            <a:ext cx="10698480" cy="4572000"/>
           </a:xfrm>
           <a:prstGeom prst="rect">
             <a:avLst/>
@@ -8560,56 +9019,230 @@
           <a:noFill/>
         </p:spPr>
         <p:txBody>
-          <a:bodyPr wrap="square" anchor="ctr">
+          <a:bodyPr wrap="square">
             <a:spAutoFit/>
           </a:bodyPr>
           <a:lstStyle/>
           <a:p>
-            <a:pPr algn="ctr"/>
-            <a:r>
-              <a:rPr sz="1300" b="0">
-                <a:solidFill>
-                  <a:srgbClr val="25323A"/>
-                </a:solidFill>
-                <a:latin typeface="Segoe UI"/>
-              </a:rPr>
-              <a:t>6″ spar cylinder + a </a:t>
-            </a:r>
-            <a:r>
-              <a:rPr sz="1300" b="1">
+            <a:pPr>
+              <a:spcBef>
+                <a:spcPts val="200"/>
+              </a:spcBef>
+              <a:spcAft>
+                <a:spcPts val="1200"/>
+              </a:spcAft>
+            </a:pPr>
+            <a:r>
+              <a:rPr sz="1800">
+                <a:solidFill>
+                  <a:srgbClr val="0C8B96"/>
+                </a:solidFill>
+                <a:latin typeface="Segoe UI"/>
+              </a:rPr>
+              <a:t>•  </a:t>
+            </a:r>
+            <a:r>
+              <a:rPr sz="1800" b="0" i="0">
+                <a:solidFill>
+                  <a:srgbClr val="25323A"/>
+                </a:solidFill>
+                <a:latin typeface="Segoe UI"/>
+              </a:rPr>
+              <a:t>Turn incident waves </a:t>
+            </a:r>
+            <a:r>
+              <a:rPr sz="1800" b="1" i="0">
+                <a:solidFill>
+                  <a:srgbClr val="25323A"/>
+                </a:solidFill>
+                <a:latin typeface="Segoe UI"/>
+              </a:rPr>
+              <a:t>off</a:t>
+            </a:r>
+            <a:r>
+              <a:rPr sz="1800" b="0" i="0">
+                <a:solidFill>
+                  <a:srgbClr val="25323A"/>
+                </a:solidFill>
+                <a:latin typeface="Segoe UI"/>
+              </a:rPr>
+              <a:t>. Force the body to oscillate in still water — one DOF at a time, at each ω.</a:t>
+            </a:r>
+          </a:p>
+          <a:p>
+            <a:pPr>
+              <a:spcBef>
+                <a:spcPts val="200"/>
+              </a:spcBef>
+              <a:spcAft>
+                <a:spcPts val="1200"/>
+              </a:spcAft>
+            </a:pPr>
+            <a:r>
+              <a:rPr sz="1800">
+                <a:solidFill>
+                  <a:srgbClr val="0C8B96"/>
+                </a:solidFill>
+                <a:latin typeface="Segoe UI"/>
+              </a:rPr>
+              <a:t>•  </a:t>
+            </a:r>
+            <a:r>
+              <a:rPr sz="1800" b="0" i="0">
+                <a:solidFill>
+                  <a:srgbClr val="25323A"/>
+                </a:solidFill>
+                <a:latin typeface="Segoe UI"/>
+              </a:rPr>
+              <a:t>It radiates its own waves; the reaction force has two pieces:</a:t>
+            </a:r>
+          </a:p>
+          <a:p>
+            <a:pPr lvl="1">
+              <a:spcBef>
+                <a:spcPts val="200"/>
+              </a:spcBef>
+              <a:spcAft>
+                <a:spcPts val="1200"/>
+              </a:spcAft>
+            </a:pPr>
+            <a:r>
+              <a:rPr sz="1800">
+                <a:solidFill>
+                  <a:srgbClr val="54636D"/>
+                </a:solidFill>
+                <a:latin typeface="Segoe UI"/>
+              </a:rPr>
+              <a:t>      –  </a:t>
+            </a:r>
+            <a:r>
+              <a:rPr sz="1600" b="1" i="0">
                 <a:solidFill>
                   <a:srgbClr val="0A5560"/>
                 </a:solidFill>
                 <a:latin typeface="Segoe UI"/>
               </a:rPr>
-              <a:t>placeholder solid equal-area disc</a:t>
-            </a:r>
-            <a:r>
-              <a:rPr sz="1300" b="0">
-                <a:solidFill>
-                  <a:srgbClr val="25323A"/>
-                </a:solidFill>
-                <a:latin typeface="Segoe UI"/>
-              </a:rPr>
-              <a:t> for the perforated heave plate.  Capytaine meshes the </a:t>
-            </a:r>
-            <a:r>
-              <a:rPr sz="1300" b="1">
-                <a:solidFill>
-                  <a:srgbClr val="25323A"/>
-                </a:solidFill>
-                <a:latin typeface="Segoe UI"/>
-              </a:rPr>
-              <a:t>wetted part (z &lt; 0, 3408 panels)</a:t>
-            </a:r>
-            <a:r>
-              <a:rPr sz="1300" b="0">
-                <a:solidFill>
-                  <a:srgbClr val="25323A"/>
-                </a:solidFill>
-                <a:latin typeface="Segoe UI"/>
-              </a:rPr>
-              <a:t>; the plate’s real hydro comes from the tank.</a:t>
+              <a:t>Added mass A(ω)</a:t>
+            </a:r>
+            <a:r>
+              <a:rPr sz="1600" b="0" i="0">
+                <a:solidFill>
+                  <a:srgbClr val="25323A"/>
+                </a:solidFill>
+                <a:latin typeface="Segoe UI"/>
+              </a:rPr>
+              <a:t> — in phase with acceleration (virtual mass of entrained water).</a:t>
+            </a:r>
+          </a:p>
+          <a:p>
+            <a:pPr lvl="1">
+              <a:spcBef>
+                <a:spcPts val="200"/>
+              </a:spcBef>
+              <a:spcAft>
+                <a:spcPts val="1200"/>
+              </a:spcAft>
+            </a:pPr>
+            <a:r>
+              <a:rPr sz="1800">
+                <a:solidFill>
+                  <a:srgbClr val="54636D"/>
+                </a:solidFill>
+                <a:latin typeface="Segoe UI"/>
+              </a:rPr>
+              <a:t>      –  </a:t>
+            </a:r>
+            <a:r>
+              <a:rPr sz="1600" b="1" i="0">
+                <a:solidFill>
+                  <a:srgbClr val="0A5560"/>
+                </a:solidFill>
+                <a:latin typeface="Segoe UI"/>
+              </a:rPr>
+              <a:t>Radiation damping B(ω)</a:t>
+            </a:r>
+            <a:r>
+              <a:rPr sz="1600" b="0" i="0">
+                <a:solidFill>
+                  <a:srgbClr val="25323A"/>
+                </a:solidFill>
+                <a:latin typeface="Segoe UI"/>
+              </a:rPr>
+              <a:t> — in phase with velocity (energy carried off as radiated waves).</a:t>
+            </a:r>
+          </a:p>
+          <a:p>
+            <a:pPr>
+              <a:spcBef>
+                <a:spcPts val="200"/>
+              </a:spcBef>
+              <a:spcAft>
+                <a:spcPts val="1200"/>
+              </a:spcAft>
+            </a:pPr>
+            <a:r>
+              <a:rPr sz="1800">
+                <a:solidFill>
+                  <a:srgbClr val="0C8B96"/>
+                </a:solidFill>
+                <a:latin typeface="Segoe UI"/>
+              </a:rPr>
+              <a:t>•  </a:t>
+            </a:r>
+            <a:r>
+              <a:rPr sz="1800" b="0" i="0">
+                <a:solidFill>
+                  <a:srgbClr val="25323A"/>
+                </a:solidFill>
+                <a:latin typeface="Segoe UI"/>
+              </a:rPr>
+              <a:t>6×6 matrices per ω — captures cross-DOF coupling (e.g. heave → pitch).</a:t>
+            </a:r>
+          </a:p>
+          <a:p>
+            <a:pPr>
+              <a:spcBef>
+                <a:spcPts val="200"/>
+              </a:spcBef>
+              <a:spcAft>
+                <a:spcPts val="1200"/>
+              </a:spcAft>
+            </a:pPr>
+            <a:r>
+              <a:rPr sz="1800">
+                <a:solidFill>
+                  <a:srgbClr val="0C8B96"/>
+                </a:solidFill>
+                <a:latin typeface="Segoe UI"/>
+              </a:rPr>
+              <a:t>•  </a:t>
+            </a:r>
+            <a:r>
+              <a:rPr sz="1800" b="0" i="0">
+                <a:solidFill>
+                  <a:srgbClr val="25323A"/>
+                </a:solidFill>
+                <a:latin typeface="Segoe UI"/>
+              </a:rPr>
+              <a:t>→ This run produces the </a:t>
+            </a:r>
+            <a:r>
+              <a:rPr sz="1800" b="1" i="0">
+                <a:solidFill>
+                  <a:srgbClr val="25323A"/>
+                </a:solidFill>
+                <a:latin typeface="Segoe UI"/>
+              </a:rPr>
+              <a:t>A(ω) and B(ω)</a:t>
+            </a:r>
+            <a:r>
+              <a:rPr sz="1800" b="0" i="0">
+                <a:solidFill>
+                  <a:srgbClr val="25323A"/>
+                </a:solidFill>
+                <a:latin typeface="Segoe UI"/>
+              </a:rPr>
+              <a:t> curves.</a:t>
             </a:r>
           </a:p>
         </p:txBody>
@@ -8622,8 +9255,8 @@
 </p:sld>
 </file>
 
-<file path=ppt/slides/slide4.xml><?xml version="1.0" encoding="utf-8"?>
-<p:sld xmlns:a="http://schemas.openxmlformats.org/drawingml/2006/main" xmlns:r="http://schemas.openxmlformats.org/officeDocument/2006/relationships" xmlns:p="http://schemas.openxmlformats.org/presentationml/2006/main">
+<file path=ppt/slides/slide6.xml><?xml version="1.0" encoding="utf-8"?>
+<p:sld xmlns:a="http://schemas.openxmlformats.org/drawingml/2006/main" xmlns:p="http://schemas.openxmlformats.org/presentationml/2006/main" xmlns:r="http://schemas.openxmlformats.org/officeDocument/2006/relationships">
   <p:cSld>
     <p:bg>
       <p:bgPr>
@@ -8639,14 +9272,7 @@
         <p:cNvGrpSpPr/>
         <p:nvPr/>
       </p:nvGrpSpPr>
-      <p:grpSpPr>
-        <a:xfrm>
-          <a:off x="0" y="0"/>
-          <a:ext cx="0" cy="0"/>
-          <a:chOff x="0" y="0"/>
-          <a:chExt cx="0" cy="0"/>
-        </a:xfrm>
-      </p:grpSpPr>
+      <p:grpSpPr/>
       <p:sp>
         <p:nvSpPr>
           <p:cNvPr id="2" name="TextBox 1"/>
@@ -8676,7 +9302,7 @@
                 </a:solidFill>
                 <a:latin typeface="Segoe UI"/>
               </a:rPr>
-              <a:t>OVERVIEW</a:t>
+              <a:t>SUB-PROBLEM ②</a:t>
             </a:r>
           </a:p>
         </p:txBody>
@@ -8710,7 +9336,7 @@
                 </a:solidFill>
                 <a:latin typeface="Segoe UI"/>
               </a:rPr>
-              <a:t>The two sub-problems — and how they combine</a:t>
+              <a:t>Diffraction — “body as an obstacle”</a:t>
             </a:r>
           </a:p>
         </p:txBody>
@@ -8756,34 +9382,290 @@
           <a:lstStyle/>
           <a:p>
             <a:pPr algn="ctr"/>
-            <a:endParaRPr/>
-          </a:p>
-        </p:txBody>
-      </p:sp>
-      <p:pic>
-        <p:nvPicPr>
-          <p:cNvPr id="5" name="Picture 4" descr="Capytaine_explained.png"/>
-          <p:cNvPicPr>
-            <a:picLocks noChangeAspect="1"/>
-          </p:cNvPicPr>
+          </a:p>
+        </p:txBody>
+      </p:sp>
+      <p:sp>
+        <p:nvSpPr>
+          <p:cNvPr id="5" name="TextBox 4"/>
+          <p:cNvSpPr txBox="1"/>
           <p:nvPr/>
-        </p:nvPicPr>
-        <p:blipFill>
-          <a:blip r:embed="rId2"/>
-          <a:stretch>
-            <a:fillRect/>
-          </a:stretch>
-        </p:blipFill>
-        <p:spPr>
-          <a:xfrm>
-            <a:off x="1600200" y="1691640"/>
-            <a:ext cx="7848985" cy="4754880"/>
-          </a:xfrm>
-          <a:prstGeom prst="rect">
-            <a:avLst/>
-          </a:prstGeom>
-        </p:spPr>
-      </p:pic>
+        </p:nvSpPr>
+        <p:spPr>
+          <a:xfrm>
+            <a:off x="777240" y="1828800"/>
+            <a:ext cx="10698480" cy="4572000"/>
+          </a:xfrm>
+          <a:prstGeom prst="rect">
+            <a:avLst/>
+          </a:prstGeom>
+          <a:noFill/>
+        </p:spPr>
+        <p:txBody>
+          <a:bodyPr wrap="square">
+            <a:spAutoFit/>
+          </a:bodyPr>
+          <a:lstStyle/>
+          <a:p>
+            <a:pPr>
+              <a:spcBef>
+                <a:spcPts val="200"/>
+              </a:spcBef>
+              <a:spcAft>
+                <a:spcPts val="1200"/>
+              </a:spcAft>
+            </a:pPr>
+            <a:r>
+              <a:rPr sz="1800">
+                <a:solidFill>
+                  <a:srgbClr val="0C8B96"/>
+                </a:solidFill>
+                <a:latin typeface="Segoe UI"/>
+              </a:rPr>
+              <a:t>•  </a:t>
+            </a:r>
+            <a:r>
+              <a:rPr sz="1800" b="0" i="0">
+                <a:solidFill>
+                  <a:srgbClr val="25323A"/>
+                </a:solidFill>
+                <a:latin typeface="Segoe UI"/>
+              </a:rPr>
+              <a:t>Hold the body </a:t>
+            </a:r>
+            <a:r>
+              <a:rPr sz="1800" b="1" i="0">
+                <a:solidFill>
+                  <a:srgbClr val="25323A"/>
+                </a:solidFill>
+                <a:latin typeface="Segoe UI"/>
+              </a:rPr>
+              <a:t>fixed</a:t>
+            </a:r>
+            <a:r>
+              <a:rPr sz="1800" b="0" i="0">
+                <a:solidFill>
+                  <a:srgbClr val="25323A"/>
+                </a:solidFill>
+                <a:latin typeface="Segoe UI"/>
+              </a:rPr>
+              <a:t>. Let incident waves scatter off it.</a:t>
+            </a:r>
+          </a:p>
+          <a:p>
+            <a:pPr>
+              <a:spcBef>
+                <a:spcPts val="200"/>
+              </a:spcBef>
+              <a:spcAft>
+                <a:spcPts val="1200"/>
+              </a:spcAft>
+            </a:pPr>
+            <a:r>
+              <a:rPr sz="1800">
+                <a:solidFill>
+                  <a:srgbClr val="0C8B96"/>
+                </a:solidFill>
+                <a:latin typeface="Segoe UI"/>
+              </a:rPr>
+              <a:t>•  </a:t>
+            </a:r>
+            <a:r>
+              <a:rPr sz="1800" b="0" i="0">
+                <a:solidFill>
+                  <a:srgbClr val="25323A"/>
+                </a:solidFill>
+                <a:latin typeface="Segoe UI"/>
+              </a:rPr>
+              <a:t>Net wave-pressure force on the fixed hull = </a:t>
+            </a:r>
+            <a:r>
+              <a:rPr sz="1800" b="1" i="0">
+                <a:solidFill>
+                  <a:srgbClr val="0A5560"/>
+                </a:solidFill>
+                <a:latin typeface="Segoe UI"/>
+              </a:rPr>
+              <a:t>excitation force F_exc(ω, β)</a:t>
+            </a:r>
+            <a:r>
+              <a:rPr sz="1800" b="0" i="0">
+                <a:solidFill>
+                  <a:srgbClr val="25323A"/>
+                </a:solidFill>
+                <a:latin typeface="Segoe UI"/>
+              </a:rPr>
+              <a:t>  (β = wave heading):</a:t>
+            </a:r>
+          </a:p>
+          <a:p>
+            <a:pPr lvl="1">
+              <a:spcBef>
+                <a:spcPts val="200"/>
+              </a:spcBef>
+              <a:spcAft>
+                <a:spcPts val="1200"/>
+              </a:spcAft>
+            </a:pPr>
+            <a:r>
+              <a:rPr sz="1800">
+                <a:solidFill>
+                  <a:srgbClr val="54636D"/>
+                </a:solidFill>
+                <a:latin typeface="Segoe UI"/>
+              </a:rPr>
+              <a:t>      –  </a:t>
+            </a:r>
+            <a:r>
+              <a:rPr sz="1600" b="1" i="0">
+                <a:solidFill>
+                  <a:srgbClr val="25323A"/>
+                </a:solidFill>
+                <a:latin typeface="Segoe UI"/>
+              </a:rPr>
+              <a:t>Froude–Krylov</a:t>
+            </a:r>
+            <a:r>
+              <a:rPr sz="1600" b="0" i="0">
+                <a:solidFill>
+                  <a:srgbClr val="25323A"/>
+                </a:solidFill>
+                <a:latin typeface="Segoe UI"/>
+              </a:rPr>
+              <a:t> — force from the undisturbed incident-wave pressure.</a:t>
+            </a:r>
+          </a:p>
+          <a:p>
+            <a:pPr lvl="1">
+              <a:spcBef>
+                <a:spcPts val="200"/>
+              </a:spcBef>
+              <a:spcAft>
+                <a:spcPts val="1200"/>
+              </a:spcAft>
+            </a:pPr>
+            <a:r>
+              <a:rPr sz="1800">
+                <a:solidFill>
+                  <a:srgbClr val="54636D"/>
+                </a:solidFill>
+                <a:latin typeface="Segoe UI"/>
+              </a:rPr>
+              <a:t>      –  </a:t>
+            </a:r>
+            <a:r>
+              <a:rPr sz="1600" b="1" i="0">
+                <a:solidFill>
+                  <a:srgbClr val="25323A"/>
+                </a:solidFill>
+                <a:latin typeface="Segoe UI"/>
+              </a:rPr>
+              <a:t>Diffraction</a:t>
+            </a:r>
+            <a:r>
+              <a:rPr sz="1600" b="0" i="0">
+                <a:solidFill>
+                  <a:srgbClr val="25323A"/>
+                </a:solidFill>
+                <a:latin typeface="Segoe UI"/>
+              </a:rPr>
+              <a:t> — correction because the body scatters the waves.</a:t>
+            </a:r>
+          </a:p>
+          <a:p>
+            <a:pPr>
+              <a:spcBef>
+                <a:spcPts val="200"/>
+              </a:spcBef>
+              <a:spcAft>
+                <a:spcPts val="1200"/>
+              </a:spcAft>
+            </a:pPr>
+            <a:r>
+              <a:rPr sz="1800">
+                <a:solidFill>
+                  <a:srgbClr val="0C8B96"/>
+                </a:solidFill>
+                <a:latin typeface="Segoe UI"/>
+              </a:rPr>
+              <a:t>•  </a:t>
+            </a:r>
+            <a:r>
+              <a:rPr sz="1800" b="0" i="0">
+                <a:solidFill>
+                  <a:srgbClr val="25323A"/>
+                </a:solidFill>
+                <a:latin typeface="Segoe UI"/>
+              </a:rPr>
+              <a:t>→ This run produces the wave forcing </a:t>
+            </a:r>
+            <a:r>
+              <a:rPr sz="1800" b="1" i="0">
+                <a:solidFill>
+                  <a:srgbClr val="25323A"/>
+                </a:solidFill>
+                <a:latin typeface="Segoe UI"/>
+              </a:rPr>
+              <a:t>F_exc(ω)</a:t>
+            </a:r>
+            <a:r>
+              <a:rPr sz="1800" b="0" i="0">
+                <a:solidFill>
+                  <a:srgbClr val="25323A"/>
+                </a:solidFill>
+                <a:latin typeface="Segoe UI"/>
+              </a:rPr>
+              <a:t> that drives the motion.</a:t>
+            </a:r>
+          </a:p>
+          <a:p>
+            <a:pPr>
+              <a:spcBef>
+                <a:spcPts val="200"/>
+              </a:spcBef>
+              <a:spcAft>
+                <a:spcPts val="1200"/>
+              </a:spcAft>
+            </a:pPr>
+            <a:r>
+              <a:rPr sz="1800">
+                <a:solidFill>
+                  <a:srgbClr val="0C8B96"/>
+                </a:solidFill>
+                <a:latin typeface="Segoe UI"/>
+              </a:rPr>
+              <a:t>•  </a:t>
+            </a:r>
+            <a:r>
+              <a:rPr sz="1800" b="0" i="0">
+                <a:solidFill>
+                  <a:srgbClr val="25323A"/>
+                </a:solidFill>
+                <a:latin typeface="Segoe UI"/>
+              </a:rPr>
+              <a:t>Plus the hydrostatic stiffness </a:t>
+            </a:r>
+            <a:r>
+              <a:rPr sz="1800" b="1" i="0">
+                <a:solidFill>
+                  <a:srgbClr val="25323A"/>
+                </a:solidFill>
+                <a:latin typeface="Segoe UI"/>
+              </a:rPr>
+              <a:t>C</a:t>
+            </a:r>
+            <a:r>
+              <a:rPr sz="1800" b="0" i="0">
+                <a:solidFill>
+                  <a:srgbClr val="25323A"/>
+                </a:solidFill>
+                <a:latin typeface="Segoe UI"/>
+              </a:rPr>
+              <a:t> (buoyancy / waterplane) from the geometry.</a:t>
+            </a:r>
+          </a:p>
+        </p:txBody>
+      </p:sp>
     </p:spTree>
   </p:cSld>
   <p:clrMapOvr>
@@ -8792,8 +9674,8 @@
 </p:sld>
 </file>
 
-<file path=ppt/slides/slide5.xml><?xml version="1.0" encoding="utf-8"?>
-<p:sld xmlns:a="http://schemas.openxmlformats.org/drawingml/2006/main" xmlns:r="http://schemas.openxmlformats.org/officeDocument/2006/relationships" xmlns:p="http://schemas.openxmlformats.org/presentationml/2006/main">
+<file path=ppt/slides/slide7.xml><?xml version="1.0" encoding="utf-8"?>
+<p:sld xmlns:a="http://schemas.openxmlformats.org/drawingml/2006/main" xmlns:p="http://schemas.openxmlformats.org/presentationml/2006/main" xmlns:r="http://schemas.openxmlformats.org/officeDocument/2006/relationships">
   <p:cSld>
     <p:bg>
       <p:bgPr>
@@ -8809,14 +9691,7 @@
         <p:cNvGrpSpPr/>
         <p:nvPr/>
       </p:nvGrpSpPr>
-      <p:grpSpPr>
-        <a:xfrm>
-          <a:off x="0" y="0"/>
-          <a:ext cx="0" cy="0"/>
-          <a:chOff x="0" y="0"/>
-          <a:chExt cx="0" cy="0"/>
-        </a:xfrm>
-      </p:grpSpPr>
+      <p:grpSpPr/>
       <p:sp>
         <p:nvSpPr>
           <p:cNvPr id="2" name="TextBox 1"/>
@@ -8846,7 +9721,7 @@
                 </a:solidFill>
                 <a:latin typeface="Segoe UI"/>
               </a:rPr>
-              <a:t>SUB-PROBLEM ①</a:t>
+              <a:t>THE BRIDGE</a:t>
             </a:r>
           </a:p>
         </p:txBody>
@@ -8880,7 +9755,7 @@
                 </a:solidFill>
                 <a:latin typeface="Segoe UI"/>
               </a:rPr>
-              <a:t>Radiation — “body as a wavemaker”</a:t>
+              <a:t>From frequency domain to time-domain simulation</a:t>
             </a:r>
           </a:p>
         </p:txBody>
@@ -8926,7 +9801,6 @@
           <a:lstStyle/>
           <a:p>
             <a:pPr algn="ctr"/>
-            <a:endParaRPr/>
           </a:p>
         </p:txBody>
       </p:sp>
@@ -8938,7 +9812,7 @@
         </p:nvSpPr>
         <p:spPr>
           <a:xfrm>
-            <a:off x="777240" y="1828800"/>
+            <a:off x="777240" y="1737360"/>
             <a:ext cx="10698480" cy="4572000"/>
           </a:xfrm>
           <a:prstGeom prst="rect">
@@ -8957,7 +9831,7 @@
                 <a:spcPts val="200"/>
               </a:spcBef>
               <a:spcAft>
-                <a:spcPts val="1200"/>
+                <a:spcPts val="600"/>
               </a:spcAft>
             </a:pPr>
             <a:r>
@@ -8976,7 +9850,7 @@
                 </a:solidFill>
                 <a:latin typeface="Segoe UI"/>
               </a:rPr>
-              <a:t>Turn incident waves </a:t>
+              <a:t>A(ω), B(ω) can’t go straight into a time-stepper — a transient contains all frequencies at once. Bridge = the </a:t>
             </a:r>
             <a:r>
               <a:rPr sz="1800" b="1" i="0">
@@ -8985,7 +9859,7 @@
                 </a:solidFill>
                 <a:latin typeface="Segoe UI"/>
               </a:rPr>
-              <a:t>off</a:t>
+              <a:t>Cummins equation</a:t>
             </a:r>
             <a:r>
               <a:rPr sz="1800" b="0" i="0">
@@ -8994,16 +9868,118 @@
                 </a:solidFill>
                 <a:latin typeface="Segoe UI"/>
               </a:rPr>
-              <a:t>. Force the body to oscillate in still water — one DOF at a time, at each ω.</a:t>
-            </a:r>
-          </a:p>
+              <a:t>:</a:t>
+            </a:r>
+          </a:p>
+        </p:txBody>
+      </p:sp>
+      <p:sp>
+        <p:nvSpPr>
+          <p:cNvPr id="6" name="Rectangle 5"/>
+          <p:cNvSpPr/>
+          <p:nvPr/>
+        </p:nvSpPr>
+        <p:spPr>
+          <a:xfrm>
+            <a:off x="777240" y="2514600"/>
+            <a:ext cx="10607040" cy="1051560"/>
+          </a:xfrm>
+          <a:prstGeom prst="rect">
+            <a:avLst/>
+          </a:prstGeom>
+          <a:solidFill>
+            <a:srgbClr val="EEF6F7"/>
+          </a:solidFill>
+          <a:ln>
+            <a:noFill/>
+          </a:ln>
+          <a:effectLst/>
+        </p:spPr>
+        <p:style>
+          <a:lnRef idx="1">
+            <a:schemeClr val="accent1"/>
+          </a:lnRef>
+          <a:fillRef idx="3">
+            <a:schemeClr val="accent1"/>
+          </a:fillRef>
+          <a:effectRef idx="2">
+            <a:schemeClr val="accent1"/>
+          </a:effectRef>
+          <a:fontRef idx="minor">
+            <a:schemeClr val="lt1"/>
+          </a:fontRef>
+        </p:style>
+        <p:txBody>
+          <a:bodyPr rtlCol="0" anchor="ctr"/>
+          <a:lstStyle/>
+          <a:p>
+            <a:pPr algn="ctr"/>
+          </a:p>
+        </p:txBody>
+      </p:sp>
+      <p:sp>
+        <p:nvSpPr>
+          <p:cNvPr id="7" name="TextBox 6"/>
+          <p:cNvSpPr txBox="1"/>
+          <p:nvPr/>
+        </p:nvSpPr>
+        <p:spPr>
+          <a:xfrm>
+            <a:off x="914400" y="2651760"/>
+            <a:ext cx="10332720" cy="822960"/>
+          </a:xfrm>
+          <a:prstGeom prst="rect">
+            <a:avLst/>
+          </a:prstGeom>
+          <a:noFill/>
+        </p:spPr>
+        <p:txBody>
+          <a:bodyPr wrap="square" anchor="ctr">
+            <a:spAutoFit/>
+          </a:bodyPr>
+          <a:lstStyle/>
+          <a:p>
+            <a:pPr algn="ctr"/>
+            <a:r>
+              <a:rPr sz="2200" b="1">
+                <a:solidFill>
+                  <a:srgbClr val="25323A"/>
+                </a:solidFill>
+                <a:latin typeface="Cambria Math"/>
+              </a:rPr>
+              <a:t>(M + A∞) ẍ  +  ∫₀ᵗ K(t−τ) ẋ(τ) dτ  +  C x  =  F_exc(t)  +  F_drag(ẋ)</a:t>
+            </a:r>
+          </a:p>
+        </p:txBody>
+      </p:sp>
+      <p:sp>
+        <p:nvSpPr>
+          <p:cNvPr id="8" name="TextBox 7"/>
+          <p:cNvSpPr txBox="1"/>
+          <p:nvPr/>
+        </p:nvSpPr>
+        <p:spPr>
+          <a:xfrm>
+            <a:off x="777240" y="3749039"/>
+            <a:ext cx="10698480" cy="4572000"/>
+          </a:xfrm>
+          <a:prstGeom prst="rect">
+            <a:avLst/>
+          </a:prstGeom>
+          <a:noFill/>
+        </p:spPr>
+        <p:txBody>
+          <a:bodyPr wrap="square">
+            <a:spAutoFit/>
+          </a:bodyPr>
+          <a:lstStyle/>
           <a:p>
             <a:pPr>
               <a:spcBef>
                 <a:spcPts val="200"/>
               </a:spcBef>
               <a:spcAft>
-                <a:spcPts val="1200"/>
+                <a:spcPts val="1000"/>
               </a:spcAft>
             </a:pPr>
             <a:r>
@@ -9016,87 +9992,22 @@
               <a:t>•  </a:t>
             </a:r>
             <a:r>
+              <a:rPr sz="1800" b="1" i="0">
+                <a:solidFill>
+                  <a:srgbClr val="0A5560"/>
+                </a:solidFill>
+                <a:latin typeface="Segoe UI"/>
+              </a:rPr>
+              <a:t>A∞</a:t>
+            </a:r>
+            <a:r>
               <a:rPr sz="1800" b="0" i="0">
                 <a:solidFill>
                   <a:srgbClr val="25323A"/>
                 </a:solidFill>
                 <a:latin typeface="Segoe UI"/>
               </a:rPr>
-              <a:t>It radiates its own waves; the reaction force has two pieces:</a:t>
-            </a:r>
-          </a:p>
-          <a:p>
-            <a:pPr lvl="1">
-              <a:spcBef>
-                <a:spcPts val="200"/>
-              </a:spcBef>
-              <a:spcAft>
-                <a:spcPts val="1200"/>
-              </a:spcAft>
-            </a:pPr>
-            <a:r>
-              <a:rPr sz="1800">
-                <a:solidFill>
-                  <a:srgbClr val="54636D"/>
-                </a:solidFill>
-                <a:latin typeface="Segoe UI"/>
-              </a:rPr>
-              <a:t>      –  </a:t>
-            </a:r>
-            <a:r>
-              <a:rPr sz="1600" b="1" i="0">
-                <a:solidFill>
-                  <a:srgbClr val="0A5560"/>
-                </a:solidFill>
-                <a:latin typeface="Segoe UI"/>
-              </a:rPr>
-              <a:t>Added mass A(ω)</a:t>
-            </a:r>
-            <a:r>
-              <a:rPr sz="1600" b="0" i="0">
-                <a:solidFill>
-                  <a:srgbClr val="25323A"/>
-                </a:solidFill>
-                <a:latin typeface="Segoe UI"/>
-              </a:rPr>
-              <a:t> — in phase with acceleration (virtual mass of entrained water).</a:t>
-            </a:r>
-          </a:p>
-          <a:p>
-            <a:pPr lvl="1">
-              <a:spcBef>
-                <a:spcPts val="200"/>
-              </a:spcBef>
-              <a:spcAft>
-                <a:spcPts val="1200"/>
-              </a:spcAft>
-            </a:pPr>
-            <a:r>
-              <a:rPr sz="1800">
-                <a:solidFill>
-                  <a:srgbClr val="54636D"/>
-                </a:solidFill>
-                <a:latin typeface="Segoe UI"/>
-              </a:rPr>
-              <a:t>      –  </a:t>
-            </a:r>
-            <a:r>
-              <a:rPr sz="1600" b="1" i="0">
-                <a:solidFill>
-                  <a:srgbClr val="0A5560"/>
-                </a:solidFill>
-                <a:latin typeface="Segoe UI"/>
-              </a:rPr>
-              <a:t>Radiation damping B(ω)</a:t>
-            </a:r>
-            <a:r>
-              <a:rPr sz="1600" b="0" i="0">
-                <a:solidFill>
-                  <a:srgbClr val="25323A"/>
-                </a:solidFill>
-                <a:latin typeface="Segoe UI"/>
-              </a:rPr>
-              <a:t> — in phase with velocity (energy carried off as radiated waves).</a:t>
+              <a:t> = infinite-frequency added mass.</a:t>
             </a:r>
           </a:p>
           <a:p>
@@ -9105,7 +10016,7 @@
                 <a:spcPts val="200"/>
               </a:spcBef>
               <a:spcAft>
-                <a:spcPts val="1200"/>
+                <a:spcPts val="1000"/>
               </a:spcAft>
             </a:pPr>
             <a:r>
@@ -9118,13 +10029,40 @@
               <a:t>•  </a:t>
             </a:r>
             <a:r>
+              <a:rPr sz="1800" b="1" i="0">
+                <a:solidFill>
+                  <a:srgbClr val="0A5560"/>
+                </a:solidFill>
+                <a:latin typeface="Segoe UI"/>
+              </a:rPr>
+              <a:t>K(t) = (2/π)∫ B(ω) cos(ωt) dω</a:t>
+            </a:r>
+            <a:r>
               <a:rPr sz="1800" b="0" i="0">
                 <a:solidFill>
                   <a:srgbClr val="25323A"/>
                 </a:solidFill>
                 <a:latin typeface="Segoe UI"/>
               </a:rPr>
-              <a:t>6×6 matrices per ω — captures cross-DOF coupling (e.g. heave → pitch).</a:t>
+              <a:t> — the retardation kernel = </a:t>
+            </a:r>
+            <a:r>
+              <a:rPr sz="1800" b="0" i="1">
+                <a:solidFill>
+                  <a:srgbClr val="25323A"/>
+                </a:solidFill>
+                <a:latin typeface="Segoe UI"/>
+              </a:rPr>
+              <a:t>fluid memory</a:t>
+            </a:r>
+            <a:r>
+              <a:rPr sz="1800" b="0" i="0">
+                <a:solidFill>
+                  <a:srgbClr val="25323A"/>
+                </a:solidFill>
+                <a:latin typeface="Segoe UI"/>
+              </a:rPr>
+              <a:t> of previously radiated waves.</a:t>
             </a:r>
           </a:p>
           <a:p>
@@ -9133,7 +10071,7 @@
                 <a:spcPts val="200"/>
               </a:spcBef>
               <a:spcAft>
-                <a:spcPts val="1200"/>
+                <a:spcPts val="1000"/>
               </a:spcAft>
             </a:pPr>
             <a:r>
@@ -9152,7 +10090,7 @@
                 </a:solidFill>
                 <a:latin typeface="Segoe UI"/>
               </a:rPr>
-              <a:t>→ This run produces the </a:t>
+              <a:t>Mapping:  </a:t>
             </a:r>
             <a:r>
               <a:rPr sz="1800" b="1" i="0">
@@ -9161,7 +10099,7 @@
                 </a:solidFill>
                 <a:latin typeface="Segoe UI"/>
               </a:rPr>
-              <a:t>A(ω) and B(ω)</a:t>
+              <a:t>Radiation → A∞ + K(t)</a:t>
             </a:r>
             <a:r>
               <a:rPr sz="1800" b="0" i="0">
@@ -9170,7 +10108,43 @@
                 </a:solidFill>
                 <a:latin typeface="Segoe UI"/>
               </a:rPr>
-              <a:t> curves.</a:t>
+              <a:t>   ·   </a:t>
+            </a:r>
+            <a:r>
+              <a:rPr sz="1800" b="1" i="0">
+                <a:solidFill>
+                  <a:srgbClr val="25323A"/>
+                </a:solidFill>
+                <a:latin typeface="Segoe UI"/>
+              </a:rPr>
+              <a:t>Diffraction → F_exc</a:t>
+            </a:r>
+            <a:r>
+              <a:rPr sz="1800" b="0" i="0">
+                <a:solidFill>
+                  <a:srgbClr val="25323A"/>
+                </a:solidFill>
+                <a:latin typeface="Segoe UI"/>
+              </a:rPr>
+              <a:t>   ·   </a:t>
+            </a:r>
+            <a:r>
+              <a:rPr sz="1800" b="1" i="0">
+                <a:solidFill>
+                  <a:srgbClr val="25323A"/>
+                </a:solidFill>
+                <a:latin typeface="Segoe UI"/>
+              </a:rPr>
+              <a:t>Hydrostatics → C</a:t>
+            </a:r>
+            <a:r>
+              <a:rPr sz="1800" b="0" i="0">
+                <a:solidFill>
+                  <a:srgbClr val="25323A"/>
+                </a:solidFill>
+                <a:latin typeface="Segoe UI"/>
+              </a:rPr>
+              <a:t>.  FloatSim integrates this in time.</a:t>
             </a:r>
           </a:p>
         </p:txBody>
@@ -9183,8 +10157,8 @@
 </p:sld>
 </file>
 
-<file path=ppt/slides/slide6.xml><?xml version="1.0" encoding="utf-8"?>
-<p:sld xmlns:a="http://schemas.openxmlformats.org/drawingml/2006/main" xmlns:r="http://schemas.openxmlformats.org/officeDocument/2006/relationships" xmlns:p="http://schemas.openxmlformats.org/presentationml/2006/main">
+<file path=ppt/slides/slide8.xml><?xml version="1.0" encoding="utf-8"?>
+<p:sld xmlns:a="http://schemas.openxmlformats.org/drawingml/2006/main" xmlns:p="http://schemas.openxmlformats.org/presentationml/2006/main" xmlns:r="http://schemas.openxmlformats.org/officeDocument/2006/relationships">
   <p:cSld>
     <p:bg>
       <p:bgPr>
@@ -9200,14 +10174,7 @@
         <p:cNvGrpSpPr/>
         <p:nvPr/>
       </p:nvGrpSpPr>
-      <p:grpSpPr>
-        <a:xfrm>
-          <a:off x="0" y="0"/>
-          <a:ext cx="0" cy="0"/>
-          <a:chOff x="0" y="0"/>
-          <a:chExt cx="0" cy="0"/>
-        </a:xfrm>
-      </p:grpSpPr>
+      <p:grpSpPr/>
       <p:sp>
         <p:nvSpPr>
           <p:cNvPr id="2" name="TextBox 1"/>
@@ -9237,7 +10204,7 @@
                 </a:solidFill>
                 <a:latin typeface="Segoe UI"/>
               </a:rPr>
-              <a:t>SUB-PROBLEM ②</a:t>
+              <a:t>DIVISION OF LABOUR</a:t>
             </a:r>
           </a:p>
         </p:txBody>
@@ -9271,7 +10238,7 @@
                 </a:solidFill>
                 <a:latin typeface="Segoe UI"/>
               </a:rPr>
-              <a:t>Diffraction — “body as an obstacle”</a:t>
+              <a:t>Who computes what — Capytaine vs FloatSim</a:t>
             </a:r>
           </a:p>
         </p:txBody>
@@ -9317,20 +10284,153 @@
           <a:lstStyle/>
           <a:p>
             <a:pPr algn="ctr"/>
-            <a:endParaRPr/>
-          </a:p>
-        </p:txBody>
-      </p:sp>
-      <p:sp>
-        <p:nvSpPr>
-          <p:cNvPr id="5" name="TextBox 4"/>
+          </a:p>
+        </p:txBody>
+      </p:sp>
+      <p:sp>
+        <p:nvSpPr>
+          <p:cNvPr id="5" name="Rectangle 4"/>
+          <p:cNvSpPr/>
+          <p:nvPr/>
+        </p:nvSpPr>
+        <p:spPr>
+          <a:xfrm>
+            <a:off x="502920" y="1783080"/>
+            <a:ext cx="5029200" cy="4160520"/>
+          </a:xfrm>
+          <a:prstGeom prst="rect">
+            <a:avLst/>
+          </a:prstGeom>
+          <a:solidFill>
+            <a:srgbClr val="F7FAFB"/>
+          </a:solidFill>
+          <a:ln w="15875">
+            <a:solidFill>
+              <a:srgbClr val="0C8B96"/>
+            </a:solidFill>
+          </a:ln>
+          <a:effectLst/>
+        </p:spPr>
+        <p:style>
+          <a:lnRef idx="1">
+            <a:schemeClr val="accent1"/>
+          </a:lnRef>
+          <a:fillRef idx="3">
+            <a:schemeClr val="accent1"/>
+          </a:fillRef>
+          <a:effectRef idx="2">
+            <a:schemeClr val="accent1"/>
+          </a:effectRef>
+          <a:fontRef idx="minor">
+            <a:schemeClr val="lt1"/>
+          </a:fontRef>
+        </p:style>
+        <p:txBody>
+          <a:bodyPr rtlCol="0" anchor="ctr"/>
+          <a:lstStyle/>
+          <a:p>
+            <a:pPr algn="ctr"/>
+          </a:p>
+        </p:txBody>
+      </p:sp>
+      <p:sp>
+        <p:nvSpPr>
+          <p:cNvPr id="6" name="Rectangle 5"/>
+          <p:cNvSpPr/>
+          <p:nvPr/>
+        </p:nvSpPr>
+        <p:spPr>
+          <a:xfrm>
+            <a:off x="502920" y="1783080"/>
+            <a:ext cx="5029200" cy="548640"/>
+          </a:xfrm>
+          <a:prstGeom prst="rect">
+            <a:avLst/>
+          </a:prstGeom>
+          <a:solidFill>
+            <a:srgbClr val="0C8B96"/>
+          </a:solidFill>
+          <a:ln>
+            <a:noFill/>
+          </a:ln>
+          <a:effectLst/>
+        </p:spPr>
+        <p:style>
+          <a:lnRef idx="1">
+            <a:schemeClr val="accent1"/>
+          </a:lnRef>
+          <a:fillRef idx="3">
+            <a:schemeClr val="accent1"/>
+          </a:fillRef>
+          <a:effectRef idx="2">
+            <a:schemeClr val="accent1"/>
+          </a:effectRef>
+          <a:fontRef idx="minor">
+            <a:schemeClr val="lt1"/>
+          </a:fontRef>
+        </p:style>
+        <p:txBody>
+          <a:bodyPr rtlCol="0" anchor="ctr"/>
+          <a:lstStyle/>
+          <a:p>
+            <a:pPr algn="ctr"/>
+            <a:r>
+              <a:rPr sz="1700" b="1">
+                <a:solidFill>
+                  <a:srgbClr val="FFFFFF"/>
+                </a:solidFill>
+                <a:latin typeface="Segoe UI"/>
+              </a:rPr>
+              <a:t>CAPYTAINE</a:t>
+            </a:r>
+          </a:p>
+        </p:txBody>
+      </p:sp>
+      <p:sp>
+        <p:nvSpPr>
+          <p:cNvPr id="7" name="TextBox 6"/>
           <p:cNvSpPr txBox="1"/>
           <p:nvPr/>
         </p:nvSpPr>
         <p:spPr>
           <a:xfrm>
-            <a:off x="777240" y="1828800"/>
-            <a:ext cx="10698480" cy="4572000"/>
+            <a:off x="502920" y="2313432"/>
+            <a:ext cx="5029200" cy="310896"/>
+          </a:xfrm>
+          <a:prstGeom prst="rect">
+            <a:avLst/>
+          </a:prstGeom>
+          <a:noFill/>
+        </p:spPr>
+        <p:txBody>
+          <a:bodyPr wrap="none">
+            <a:spAutoFit/>
+          </a:bodyPr>
+          <a:lstStyle/>
+          <a:p>
+            <a:pPr algn="ctr"/>
+            <a:r>
+              <a:rPr sz="1050" i="1">
+                <a:solidFill>
+                  <a:srgbClr val="54636D"/>
+                </a:solidFill>
+                <a:latin typeface="Segoe UI"/>
+              </a:rPr>
+              <a:t>run once · frequency domain · linear + inviscid</a:t>
+            </a:r>
+          </a:p>
+        </p:txBody>
+      </p:sp>
+      <p:sp>
+        <p:nvSpPr>
+          <p:cNvPr id="8" name="TextBox 7"/>
+          <p:cNvSpPr txBox="1"/>
+          <p:nvPr/>
+        </p:nvSpPr>
+        <p:spPr>
+          <a:xfrm>
+            <a:off x="758952" y="2715768"/>
+            <a:ext cx="4553712" cy="3108960"/>
           </a:xfrm>
           <a:prstGeom prst="rect">
             <a:avLst/>
@@ -9344,15 +10444,12 @@
           <a:lstStyle/>
           <a:p>
             <a:pPr>
-              <a:spcBef>
-                <a:spcPts val="200"/>
-              </a:spcBef>
               <a:spcAft>
-                <a:spcPts val="1200"/>
+                <a:spcPts val="600"/>
               </a:spcAft>
             </a:pPr>
             <a:r>
-              <a:rPr sz="1800">
+              <a:rPr sz="1300">
                 <a:solidFill>
                   <a:srgbClr val="0C8B96"/>
                 </a:solidFill>
@@ -9361,44 +10458,23 @@
               <a:t>•  </a:t>
             </a:r>
             <a:r>
-              <a:rPr sz="1800" b="0" i="0">
-                <a:solidFill>
-                  <a:srgbClr val="25323A"/>
-                </a:solidFill>
-                <a:latin typeface="Segoe UI"/>
-              </a:rPr>
-              <a:t>Hold the body </a:t>
-            </a:r>
-            <a:r>
-              <a:rPr sz="1800" b="1" i="0">
-                <a:solidFill>
-                  <a:srgbClr val="25323A"/>
-                </a:solidFill>
-                <a:latin typeface="Segoe UI"/>
-              </a:rPr>
-              <a:t>fixed</a:t>
-            </a:r>
-            <a:r>
-              <a:rPr sz="1800" b="0" i="0">
-                <a:solidFill>
-                  <a:srgbClr val="25323A"/>
-                </a:solidFill>
-                <a:latin typeface="Segoe UI"/>
-              </a:rPr>
-              <a:t>. Let incident waves scatter off it.</a:t>
+              <a:rPr sz="1300" b="0" i="0">
+                <a:solidFill>
+                  <a:srgbClr val="25323A"/>
+                </a:solidFill>
+                <a:latin typeface="Segoe UI"/>
+              </a:rPr>
+              <a:t>Panel mesh of the wetted hull</a:t>
             </a:r>
           </a:p>
           <a:p>
             <a:pPr>
-              <a:spcBef>
-                <a:spcPts val="200"/>
-              </a:spcBef>
               <a:spcAft>
-                <a:spcPts val="1200"/>
+                <a:spcPts val="600"/>
               </a:spcAft>
             </a:pPr>
             <a:r>
-              <a:rPr sz="1800">
+              <a:rPr sz="1300">
                 <a:solidFill>
                   <a:srgbClr val="0C8B96"/>
                 </a:solidFill>
@@ -9407,197 +10483,606 @@
               <a:t>•  </a:t>
             </a:r>
             <a:r>
-              <a:rPr sz="1800" b="0" i="0">
-                <a:solidFill>
-                  <a:srgbClr val="25323A"/>
-                </a:solidFill>
-                <a:latin typeface="Segoe UI"/>
-              </a:rPr>
-              <a:t>Net wave-pressure force on the fixed hull = </a:t>
-            </a:r>
-            <a:r>
-              <a:rPr sz="1800" b="1" i="0">
-                <a:solidFill>
-                  <a:srgbClr val="0A5560"/>
-                </a:solidFill>
-                <a:latin typeface="Segoe UI"/>
-              </a:rPr>
-              <a:t>excitation force F_exc(ω, β)</a:t>
-            </a:r>
-            <a:r>
-              <a:rPr sz="1800" b="0" i="0">
-                <a:solidFill>
-                  <a:srgbClr val="25323A"/>
-                </a:solidFill>
-                <a:latin typeface="Segoe UI"/>
-              </a:rPr>
-              <a:t>  (β = wave heading):</a:t>
-            </a:r>
-          </a:p>
-          <a:p>
-            <a:pPr lvl="1">
-              <a:spcBef>
-                <a:spcPts val="200"/>
-              </a:spcBef>
+              <a:rPr sz="1300" b="0" i="0">
+                <a:solidFill>
+                  <a:srgbClr val="25323A"/>
+                </a:solidFill>
+                <a:latin typeface="Segoe UI"/>
+              </a:rPr>
+              <a:t>Radiation problem → A(ω), A∞ and B(ω)</a:t>
+            </a:r>
+          </a:p>
+          <a:p>
+            <a:pPr>
               <a:spcAft>
-                <a:spcPts val="1200"/>
+                <a:spcPts val="600"/>
               </a:spcAft>
             </a:pPr>
             <a:r>
-              <a:rPr sz="1800">
-                <a:solidFill>
-                  <a:srgbClr val="54636D"/>
-                </a:solidFill>
-                <a:latin typeface="Segoe UI"/>
-              </a:rPr>
-              <a:t>      –  </a:t>
-            </a:r>
-            <a:r>
-              <a:rPr sz="1600" b="1" i="0">
-                <a:solidFill>
-                  <a:srgbClr val="25323A"/>
-                </a:solidFill>
-                <a:latin typeface="Segoe UI"/>
-              </a:rPr>
-              <a:t>Froude–Krylov</a:t>
-            </a:r>
-            <a:r>
-              <a:rPr sz="1600" b="0" i="0">
-                <a:solidFill>
-                  <a:srgbClr val="25323A"/>
-                </a:solidFill>
-                <a:latin typeface="Segoe UI"/>
-              </a:rPr>
-              <a:t> — force from the undisturbed incident-wave pressure.</a:t>
-            </a:r>
-          </a:p>
-          <a:p>
-            <a:pPr lvl="1">
-              <a:spcBef>
-                <a:spcPts val="200"/>
-              </a:spcBef>
+              <a:rPr sz="1300">
+                <a:solidFill>
+                  <a:srgbClr val="0C8B96"/>
+                </a:solidFill>
+                <a:latin typeface="Segoe UI"/>
+              </a:rPr>
+              <a:t>•  </a:t>
+            </a:r>
+            <a:r>
+              <a:rPr sz="1300" b="0" i="0">
+                <a:solidFill>
+                  <a:srgbClr val="25323A"/>
+                </a:solidFill>
+                <a:latin typeface="Segoe UI"/>
+              </a:rPr>
+              <a:t>Diffraction problem → F_exc(ω, β)</a:t>
+            </a:r>
+          </a:p>
+          <a:p>
+            <a:pPr>
               <a:spcAft>
-                <a:spcPts val="1200"/>
+                <a:spcPts val="600"/>
               </a:spcAft>
             </a:pPr>
             <a:r>
-              <a:rPr sz="1800">
-                <a:solidFill>
-                  <a:srgbClr val="54636D"/>
-                </a:solidFill>
-                <a:latin typeface="Segoe UI"/>
-              </a:rPr>
-              <a:t>      –  </a:t>
-            </a:r>
-            <a:r>
-              <a:rPr sz="1600" b="1" i="0">
-                <a:solidFill>
-                  <a:srgbClr val="25323A"/>
-                </a:solidFill>
-                <a:latin typeface="Segoe UI"/>
-              </a:rPr>
-              <a:t>Diffraction</a:t>
-            </a:r>
-            <a:r>
-              <a:rPr sz="1600" b="0" i="0">
-                <a:solidFill>
-                  <a:srgbClr val="25323A"/>
-                </a:solidFill>
-                <a:latin typeface="Segoe UI"/>
-              </a:rPr>
-              <a:t> — correction because the body scatters the waves.</a:t>
+              <a:rPr sz="1300">
+                <a:solidFill>
+                  <a:srgbClr val="0C8B96"/>
+                </a:solidFill>
+                <a:latin typeface="Segoe UI"/>
+              </a:rPr>
+              <a:t>•  </a:t>
+            </a:r>
+            <a:r>
+              <a:rPr sz="1300" b="0" i="0">
+                <a:solidFill>
+                  <a:srgbClr val="25323A"/>
+                </a:solidFill>
+                <a:latin typeface="Segoe UI"/>
+              </a:rPr>
+              <a:t>Hydrostatic stiffness C (buoyancy)</a:t>
             </a:r>
           </a:p>
           <a:p>
             <a:pPr>
-              <a:spcBef>
+              <a:spcAft>
                 <a:spcPts val="200"/>
-              </a:spcBef>
-              <a:spcAft>
-                <a:spcPts val="1200"/>
               </a:spcAft>
             </a:pPr>
             <a:r>
-              <a:rPr sz="1800">
+              <a:rPr sz="1300">
                 <a:solidFill>
                   <a:srgbClr val="0C8B96"/>
                 </a:solidFill>
                 <a:latin typeface="Segoe UI"/>
               </a:rPr>
-              <a:t>•  </a:t>
-            </a:r>
-            <a:r>
-              <a:rPr sz="1800" b="0" i="0">
-                <a:solidFill>
-                  <a:srgbClr val="25323A"/>
-                </a:solidFill>
-                <a:latin typeface="Segoe UI"/>
-              </a:rPr>
-              <a:t>→ This run produces the wave forcing </a:t>
-            </a:r>
-            <a:r>
-              <a:rPr sz="1800" b="1" i="0">
-                <a:solidFill>
-                  <a:srgbClr val="25323A"/>
-                </a:solidFill>
-                <a:latin typeface="Segoe UI"/>
-              </a:rPr>
-              <a:t>F_exc(ω)</a:t>
-            </a:r>
-            <a:r>
-              <a:rPr sz="1800" b="0" i="0">
-                <a:solidFill>
-                  <a:srgbClr val="25323A"/>
-                </a:solidFill>
-                <a:latin typeface="Segoe UI"/>
-              </a:rPr>
-              <a:t> that drives the motion.</a:t>
-            </a:r>
-          </a:p>
+              <a:t>⇒  </a:t>
+            </a:r>
+            <a:r>
+              <a:rPr sz="1300" b="1" i="0">
+                <a:solidFill>
+                  <a:srgbClr val="0A5560"/>
+                </a:solidFill>
+                <a:latin typeface="Segoe UI"/>
+              </a:rPr>
+              <a:t>Outputs: hydrodynamic coefficients</a:t>
+            </a:r>
+          </a:p>
+        </p:txBody>
+      </p:sp>
+      <p:sp>
+        <p:nvSpPr>
+          <p:cNvPr id="9" name="Rectangle 8"/>
+          <p:cNvSpPr/>
+          <p:nvPr/>
+        </p:nvSpPr>
+        <p:spPr>
+          <a:xfrm>
+            <a:off x="6656832" y="1783080"/>
+            <a:ext cx="5029200" cy="4160520"/>
+          </a:xfrm>
+          <a:prstGeom prst="rect">
+            <a:avLst/>
+          </a:prstGeom>
+          <a:solidFill>
+            <a:srgbClr val="F7FAFB"/>
+          </a:solidFill>
+          <a:ln w="15875">
+            <a:solidFill>
+              <a:srgbClr val="0A5560"/>
+            </a:solidFill>
+          </a:ln>
+          <a:effectLst/>
+        </p:spPr>
+        <p:style>
+          <a:lnRef idx="1">
+            <a:schemeClr val="accent1"/>
+          </a:lnRef>
+          <a:fillRef idx="3">
+            <a:schemeClr val="accent1"/>
+          </a:fillRef>
+          <a:effectRef idx="2">
+            <a:schemeClr val="accent1"/>
+          </a:effectRef>
+          <a:fontRef idx="minor">
+            <a:schemeClr val="lt1"/>
+          </a:fontRef>
+        </p:style>
+        <p:txBody>
+          <a:bodyPr rtlCol="0" anchor="ctr"/>
+          <a:lstStyle/>
+          <a:p>
+            <a:pPr algn="ctr"/>
+          </a:p>
+        </p:txBody>
+      </p:sp>
+      <p:sp>
+        <p:nvSpPr>
+          <p:cNvPr id="10" name="Rectangle 9"/>
+          <p:cNvSpPr/>
+          <p:nvPr/>
+        </p:nvSpPr>
+        <p:spPr>
+          <a:xfrm>
+            <a:off x="6656832" y="1783080"/>
+            <a:ext cx="5029200" cy="548640"/>
+          </a:xfrm>
+          <a:prstGeom prst="rect">
+            <a:avLst/>
+          </a:prstGeom>
+          <a:solidFill>
+            <a:srgbClr val="0A5560"/>
+          </a:solidFill>
+          <a:ln>
+            <a:noFill/>
+          </a:ln>
+          <a:effectLst/>
+        </p:spPr>
+        <p:style>
+          <a:lnRef idx="1">
+            <a:schemeClr val="accent1"/>
+          </a:lnRef>
+          <a:fillRef idx="3">
+            <a:schemeClr val="accent1"/>
+          </a:fillRef>
+          <a:effectRef idx="2">
+            <a:schemeClr val="accent1"/>
+          </a:effectRef>
+          <a:fontRef idx="minor">
+            <a:schemeClr val="lt1"/>
+          </a:fontRef>
+        </p:style>
+        <p:txBody>
+          <a:bodyPr rtlCol="0" anchor="ctr"/>
+          <a:lstStyle/>
+          <a:p>
+            <a:pPr algn="ctr"/>
+            <a:r>
+              <a:rPr sz="1700" b="1">
+                <a:solidFill>
+                  <a:srgbClr val="FFFFFF"/>
+                </a:solidFill>
+                <a:latin typeface="Segoe UI"/>
+              </a:rPr>
+              <a:t>FLOATSIM</a:t>
+            </a:r>
+          </a:p>
+        </p:txBody>
+      </p:sp>
+      <p:sp>
+        <p:nvSpPr>
+          <p:cNvPr id="11" name="TextBox 10"/>
+          <p:cNvSpPr txBox="1"/>
+          <p:nvPr/>
+        </p:nvSpPr>
+        <p:spPr>
+          <a:xfrm>
+            <a:off x="6656832" y="2313432"/>
+            <a:ext cx="5029200" cy="310896"/>
+          </a:xfrm>
+          <a:prstGeom prst="rect">
+            <a:avLst/>
+          </a:prstGeom>
+          <a:noFill/>
+        </p:spPr>
+        <p:txBody>
+          <a:bodyPr wrap="none">
+            <a:spAutoFit/>
+          </a:bodyPr>
+          <a:lstStyle/>
+          <a:p>
+            <a:pPr algn="ctr"/>
+            <a:r>
+              <a:rPr sz="1050" i="1">
+                <a:solidFill>
+                  <a:srgbClr val="54636D"/>
+                </a:solidFill>
+                <a:latin typeface="Segoe UI"/>
+              </a:rPr>
+              <a:t>per simulation · time domain</a:t>
+            </a:r>
+          </a:p>
+        </p:txBody>
+      </p:sp>
+      <p:sp>
+        <p:nvSpPr>
+          <p:cNvPr id="12" name="TextBox 11"/>
+          <p:cNvSpPr txBox="1"/>
+          <p:nvPr/>
+        </p:nvSpPr>
+        <p:spPr>
+          <a:xfrm>
+            <a:off x="6912864" y="2715768"/>
+            <a:ext cx="4553712" cy="3108960"/>
+          </a:xfrm>
+          <a:prstGeom prst="rect">
+            <a:avLst/>
+          </a:prstGeom>
+          <a:noFill/>
+        </p:spPr>
+        <p:txBody>
+          <a:bodyPr wrap="square">
+            <a:spAutoFit/>
+          </a:bodyPr>
+          <a:lstStyle/>
           <a:p>
             <a:pPr>
-              <a:spcBef>
-                <a:spcPts val="200"/>
-              </a:spcBef>
               <a:spcAft>
-                <a:spcPts val="1200"/>
+                <a:spcPts val="600"/>
               </a:spcAft>
             </a:pPr>
             <a:r>
-              <a:rPr sz="1800">
-                <a:solidFill>
-                  <a:srgbClr val="0C8B96"/>
+              <a:rPr sz="1300">
+                <a:solidFill>
+                  <a:srgbClr val="0A5560"/>
                 </a:solidFill>
                 <a:latin typeface="Segoe UI"/>
               </a:rPr>
               <a:t>•  </a:t>
             </a:r>
             <a:r>
-              <a:rPr sz="1800" b="0" i="0">
-                <a:solidFill>
-                  <a:srgbClr val="25323A"/>
-                </a:solidFill>
-                <a:latin typeface="Segoe UI"/>
-              </a:rPr>
-              <a:t>Plus the hydrostatic stiffness </a:t>
-            </a:r>
-            <a:r>
-              <a:rPr sz="1800" b="1" i="0">
-                <a:solidFill>
-                  <a:srgbClr val="25323A"/>
-                </a:solidFill>
-                <a:latin typeface="Segoe UI"/>
-              </a:rPr>
-              <a:t>C</a:t>
-            </a:r>
-            <a:r>
-              <a:rPr sz="1800" b="0" i="0">
-                <a:solidFill>
-                  <a:srgbClr val="25323A"/>
-                </a:solidFill>
-                <a:latin typeface="Segoe UI"/>
-              </a:rPr>
-              <a:t> (buoyancy / waterplane) from the geometry.</a:t>
+              <a:rPr sz="1300" b="0" i="0">
+                <a:solidFill>
+                  <a:srgbClr val="25323A"/>
+                </a:solidFill>
+                <a:latin typeface="Segoe UI"/>
+              </a:rPr>
+              <a:t>Retardation kernel K(t) from B(ω)</a:t>
+            </a:r>
+          </a:p>
+          <a:p>
+            <a:pPr>
+              <a:spcAft>
+                <a:spcPts val="600"/>
+              </a:spcAft>
+            </a:pPr>
+            <a:r>
+              <a:rPr sz="1300">
+                <a:solidFill>
+                  <a:srgbClr val="0A5560"/>
+                </a:solidFill>
+                <a:latin typeface="Segoe UI"/>
+              </a:rPr>
+              <a:t>•  </a:t>
+            </a:r>
+            <a:r>
+              <a:rPr sz="1300" b="0" i="0">
+                <a:solidFill>
+                  <a:srgbClr val="25323A"/>
+                </a:solidFill>
+                <a:latin typeface="Segoe UI"/>
+              </a:rPr>
+              <a:t>Body mass &amp; inertia M (structure)</a:t>
+            </a:r>
+          </a:p>
+          <a:p>
+            <a:pPr>
+              <a:spcAft>
+                <a:spcPts val="600"/>
+              </a:spcAft>
+            </a:pPr>
+            <a:r>
+              <a:rPr sz="1300">
+                <a:solidFill>
+                  <a:srgbClr val="0A5560"/>
+                </a:solidFill>
+                <a:latin typeface="Segoe UI"/>
+              </a:rPr>
+              <a:t>•  </a:t>
+            </a:r>
+            <a:r>
+              <a:rPr sz="1300" b="0" i="0">
+                <a:solidFill>
+                  <a:srgbClr val="25323A"/>
+                </a:solidFill>
+                <a:latin typeface="Segoe UI"/>
+              </a:rPr>
+              <a:t>Assemble (M+A∞), C + gravity m·g·z_G</a:t>
+            </a:r>
+          </a:p>
+          <a:p>
+            <a:pPr>
+              <a:spcAft>
+                <a:spcPts val="600"/>
+              </a:spcAft>
+            </a:pPr>
+            <a:r>
+              <a:rPr sz="1300">
+                <a:solidFill>
+                  <a:srgbClr val="0A5560"/>
+                </a:solidFill>
+                <a:latin typeface="Segoe UI"/>
+              </a:rPr>
+              <a:t>•  </a:t>
+            </a:r>
+            <a:r>
+              <a:rPr sz="1300" b="0" i="0">
+                <a:solidFill>
+                  <a:srgbClr val="D1543A"/>
+                </a:solidFill>
+                <a:latin typeface="Segoe UI"/>
+              </a:rPr>
+              <a:t>Viscous Morison drag F_drag — not in BEM</a:t>
+            </a:r>
+          </a:p>
+          <a:p>
+            <a:pPr>
+              <a:spcAft>
+                <a:spcPts val="600"/>
+              </a:spcAft>
+            </a:pPr>
+            <a:r>
+              <a:rPr sz="1300">
+                <a:solidFill>
+                  <a:srgbClr val="0A5560"/>
+                </a:solidFill>
+                <a:latin typeface="Segoe UI"/>
+              </a:rPr>
+              <a:t>•  </a:t>
+            </a:r>
+            <a:r>
+              <a:rPr sz="1300" b="0" i="0">
+                <a:solidFill>
+                  <a:srgbClr val="25323A"/>
+                </a:solidFill>
+                <a:latin typeface="Segoe UI"/>
+              </a:rPr>
+              <a:t>Static equilibrium solve</a:t>
+            </a:r>
+          </a:p>
+          <a:p>
+            <a:pPr>
+              <a:spcAft>
+                <a:spcPts val="600"/>
+              </a:spcAft>
+            </a:pPr>
+            <a:r>
+              <a:rPr sz="1300">
+                <a:solidFill>
+                  <a:srgbClr val="0A5560"/>
+                </a:solidFill>
+                <a:latin typeface="Segoe UI"/>
+              </a:rPr>
+              <a:t>•  </a:t>
+            </a:r>
+            <a:r>
+              <a:rPr sz="1300" b="0" i="0">
+                <a:solidFill>
+                  <a:srgbClr val="25323A"/>
+                </a:solidFill>
+                <a:latin typeface="Segoe UI"/>
+              </a:rPr>
+              <a:t>Time-integrate the Cummins EoM → x(t)</a:t>
+            </a:r>
+          </a:p>
+          <a:p>
+            <a:pPr>
+              <a:spcAft>
+                <a:spcPts val="200"/>
+              </a:spcAft>
+            </a:pPr>
+            <a:r>
+              <a:rPr sz="1300">
+                <a:solidFill>
+                  <a:srgbClr val="0A5560"/>
+                </a:solidFill>
+                <a:latin typeface="Segoe UI"/>
+              </a:rPr>
+              <a:t>⇒  </a:t>
+            </a:r>
+            <a:r>
+              <a:rPr sz="1300" b="1" i="0">
+                <a:solidFill>
+                  <a:srgbClr val="0A5560"/>
+                </a:solidFill>
+                <a:latin typeface="Segoe UI"/>
+              </a:rPr>
+              <a:t>Output: decay period T &amp; damping ζ</a:t>
+            </a:r>
+          </a:p>
+        </p:txBody>
+      </p:sp>
+      <p:sp>
+        <p:nvSpPr>
+          <p:cNvPr id="13" name="Right Arrow 12"/>
+          <p:cNvSpPr/>
+          <p:nvPr/>
+        </p:nvSpPr>
+        <p:spPr>
+          <a:xfrm>
+            <a:off x="5596128" y="3246120"/>
+            <a:ext cx="932688" cy="457200"/>
+          </a:xfrm>
+          <a:prstGeom prst="rightArrow">
+            <a:avLst/>
+          </a:prstGeom>
+          <a:solidFill>
+            <a:srgbClr val="54636D"/>
+          </a:solidFill>
+          <a:ln>
+            <a:noFill/>
+          </a:ln>
+          <a:effectLst/>
+        </p:spPr>
+        <p:style>
+          <a:lnRef idx="1">
+            <a:schemeClr val="accent1"/>
+          </a:lnRef>
+          <a:fillRef idx="3">
+            <a:schemeClr val="accent1"/>
+          </a:fillRef>
+          <a:effectRef idx="2">
+            <a:schemeClr val="accent1"/>
+          </a:effectRef>
+          <a:fontRef idx="minor">
+            <a:schemeClr val="lt1"/>
+          </a:fontRef>
+        </p:style>
+        <p:txBody>
+          <a:bodyPr rtlCol="0" anchor="ctr"/>
+          <a:lstStyle/>
+          <a:p>
+            <a:pPr algn="ctr"/>
+          </a:p>
+        </p:txBody>
+      </p:sp>
+      <p:sp>
+        <p:nvSpPr>
+          <p:cNvPr id="14" name="TextBox 13"/>
+          <p:cNvSpPr txBox="1"/>
+          <p:nvPr/>
+        </p:nvSpPr>
+        <p:spPr>
+          <a:xfrm>
+            <a:off x="5257800" y="3730752"/>
+            <a:ext cx="1600200" cy="640080"/>
+          </a:xfrm>
+          <a:prstGeom prst="rect">
+            <a:avLst/>
+          </a:prstGeom>
+          <a:noFill/>
+        </p:spPr>
+        <p:txBody>
+          <a:bodyPr wrap="none">
+            <a:spAutoFit/>
+          </a:bodyPr>
+          <a:lstStyle/>
+          <a:p>
+            <a:pPr algn="ctr"/>
+            <a:r>
+              <a:rPr sz="900">
+                <a:solidFill>
+                  <a:srgbClr val="54636D"/>
+                </a:solidFill>
+                <a:latin typeface="Consolas"/>
+              </a:rPr>
+              <a:t>capytaine_
+osu_buoy.nc</a:t>
+            </a:r>
+          </a:p>
+        </p:txBody>
+      </p:sp>
+      <p:sp>
+        <p:nvSpPr>
+          <p:cNvPr id="15" name="Rectangle 14"/>
+          <p:cNvSpPr/>
+          <p:nvPr/>
+        </p:nvSpPr>
+        <p:spPr>
+          <a:xfrm>
+            <a:off x="777240" y="6108192"/>
+            <a:ext cx="10927080" cy="566928"/>
+          </a:xfrm>
+          <a:prstGeom prst="rect">
+            <a:avLst/>
+          </a:prstGeom>
+          <a:solidFill>
+            <a:srgbClr val="EEF6F7"/>
+          </a:solidFill>
+          <a:ln>
+            <a:noFill/>
+          </a:ln>
+          <a:effectLst/>
+        </p:spPr>
+        <p:style>
+          <a:lnRef idx="1">
+            <a:schemeClr val="accent1"/>
+          </a:lnRef>
+          <a:fillRef idx="3">
+            <a:schemeClr val="accent1"/>
+          </a:fillRef>
+          <a:effectRef idx="2">
+            <a:schemeClr val="accent1"/>
+          </a:effectRef>
+          <a:fontRef idx="minor">
+            <a:schemeClr val="lt1"/>
+          </a:fontRef>
+        </p:style>
+        <p:txBody>
+          <a:bodyPr rtlCol="0" anchor="ctr"/>
+          <a:lstStyle/>
+          <a:p>
+            <a:pPr algn="ctr"/>
+          </a:p>
+        </p:txBody>
+      </p:sp>
+      <p:sp>
+        <p:nvSpPr>
+          <p:cNvPr id="16" name="TextBox 15"/>
+          <p:cNvSpPr txBox="1"/>
+          <p:nvPr/>
+        </p:nvSpPr>
+        <p:spPr>
+          <a:xfrm>
+            <a:off x="960120" y="6144768"/>
+            <a:ext cx="10515600" cy="493776"/>
+          </a:xfrm>
+          <a:prstGeom prst="rect">
+            <a:avLst/>
+          </a:prstGeom>
+          <a:noFill/>
+        </p:spPr>
+        <p:txBody>
+          <a:bodyPr wrap="square" anchor="ctr">
+            <a:spAutoFit/>
+          </a:bodyPr>
+          <a:lstStyle/>
+          <a:p>
+            <a:pPr algn="ctr"/>
+            <a:r>
+              <a:rPr sz="1250" b="1">
+                <a:solidFill>
+                  <a:srgbClr val="0A5560"/>
+                </a:solidFill>
+                <a:latin typeface="Segoe UI"/>
+              </a:rPr>
+              <a:t>Capytaine = the hydrodynamic coefficients</a:t>
+            </a:r>
+            <a:r>
+              <a:rPr sz="1250" b="0">
+                <a:solidFill>
+                  <a:srgbClr val="25323A"/>
+                </a:solidFill>
+                <a:latin typeface="Segoe UI"/>
+              </a:rPr>
+              <a:t>   ·   </a:t>
+            </a:r>
+            <a:r>
+              <a:rPr sz="1250" b="1">
+                <a:solidFill>
+                  <a:srgbClr val="0A5560"/>
+                </a:solidFill>
+                <a:latin typeface="Segoe UI"/>
+              </a:rPr>
+              <a:t>FloatSim = the equation of motion in time</a:t>
+            </a:r>
+            <a:r>
+              <a:rPr sz="1250" b="0">
+                <a:solidFill>
+                  <a:srgbClr val="25323A"/>
+                </a:solidFill>
+                <a:latin typeface="Segoe UI"/>
+              </a:rPr>
+              <a:t>  (adds mass, viscous drag, mooring, equilibrium; converts B(ω)→K(t)).  Decay T and ζ are a FloatSim output.</a:t>
             </a:r>
           </a:p>
         </p:txBody>
@@ -9610,8 +11095,8 @@
 </p:sld>
 </file>
 
-<file path=ppt/slides/slide7.xml><?xml version="1.0" encoding="utf-8"?>
-<p:sld xmlns:a="http://schemas.openxmlformats.org/drawingml/2006/main" xmlns:r="http://schemas.openxmlformats.org/officeDocument/2006/relationships" xmlns:p="http://schemas.openxmlformats.org/presentationml/2006/main">
+<file path=ppt/slides/slide9.xml><?xml version="1.0" encoding="utf-8"?>
+<p:sld xmlns:a="http://schemas.openxmlformats.org/drawingml/2006/main" xmlns:p="http://schemas.openxmlformats.org/presentationml/2006/main" xmlns:r="http://schemas.openxmlformats.org/officeDocument/2006/relationships">
   <p:cSld>
     <p:bg>
       <p:bgPr>
@@ -9627,14 +11112,7 @@
         <p:cNvGrpSpPr/>
         <p:nvPr/>
       </p:nvGrpSpPr>
-      <p:grpSpPr>
-        <a:xfrm>
-          <a:off x="0" y="0"/>
-          <a:ext cx="0" cy="0"/>
-          <a:chOff x="0" y="0"/>
-          <a:chExt cx="0" cy="0"/>
-        </a:xfrm>
-      </p:grpSpPr>
+      <p:grpSpPr/>
       <p:sp>
         <p:nvSpPr>
           <p:cNvPr id="2" name="TextBox 1"/>
@@ -9664,7 +11142,7 @@
                 </a:solidFill>
                 <a:latin typeface="Segoe UI"/>
               </a:rPr>
-              <a:t>THE BRIDGE</a:t>
+              <a:t>CAVEATS</a:t>
             </a:r>
           </a:p>
         </p:txBody>
@@ -9698,7 +11176,7 @@
                 </a:solidFill>
                 <a:latin typeface="Segoe UI"/>
               </a:rPr>
-              <a:t>From frequency domain to time-domain simulation</a:t>
+              <a:t>Limits — and why the heave plate needs the tank</a:t>
             </a:r>
           </a:p>
         </p:txBody>
@@ -9744,1449 +11222,6 @@
           <a:lstStyle/>
           <a:p>
             <a:pPr algn="ctr"/>
-            <a:endParaRPr/>
-          </a:p>
-        </p:txBody>
-      </p:sp>
-      <p:sp>
-        <p:nvSpPr>
-          <p:cNvPr id="5" name="TextBox 4"/>
-          <p:cNvSpPr txBox="1"/>
-          <p:nvPr/>
-        </p:nvSpPr>
-        <p:spPr>
-          <a:xfrm>
-            <a:off x="777240" y="1737360"/>
-            <a:ext cx="10698480" cy="4572000"/>
-          </a:xfrm>
-          <a:prstGeom prst="rect">
-            <a:avLst/>
-          </a:prstGeom>
-          <a:noFill/>
-        </p:spPr>
-        <p:txBody>
-          <a:bodyPr wrap="square">
-            <a:spAutoFit/>
-          </a:bodyPr>
-          <a:lstStyle/>
-          <a:p>
-            <a:pPr>
-              <a:spcBef>
-                <a:spcPts val="200"/>
-              </a:spcBef>
-              <a:spcAft>
-                <a:spcPts val="600"/>
-              </a:spcAft>
-            </a:pPr>
-            <a:r>
-              <a:rPr sz="1800">
-                <a:solidFill>
-                  <a:srgbClr val="0C8B96"/>
-                </a:solidFill>
-                <a:latin typeface="Segoe UI"/>
-              </a:rPr>
-              <a:t>•  </a:t>
-            </a:r>
-            <a:r>
-              <a:rPr sz="1800" b="0" i="0">
-                <a:solidFill>
-                  <a:srgbClr val="25323A"/>
-                </a:solidFill>
-                <a:latin typeface="Segoe UI"/>
-              </a:rPr>
-              <a:t>A(ω), B(ω) can’t go straight into a time-stepper — a transient contains all frequencies at once. Bridge = the </a:t>
-            </a:r>
-            <a:r>
-              <a:rPr sz="1800" b="1" i="0">
-                <a:solidFill>
-                  <a:srgbClr val="25323A"/>
-                </a:solidFill>
-                <a:latin typeface="Segoe UI"/>
-              </a:rPr>
-              <a:t>Cummins equation</a:t>
-            </a:r>
-            <a:r>
-              <a:rPr sz="1800" b="0" i="0">
-                <a:solidFill>
-                  <a:srgbClr val="25323A"/>
-                </a:solidFill>
-                <a:latin typeface="Segoe UI"/>
-              </a:rPr>
-              <a:t>:</a:t>
-            </a:r>
-          </a:p>
-        </p:txBody>
-      </p:sp>
-      <p:sp>
-        <p:nvSpPr>
-          <p:cNvPr id="6" name="Rectangle 5"/>
-          <p:cNvSpPr/>
-          <p:nvPr/>
-        </p:nvSpPr>
-        <p:spPr>
-          <a:xfrm>
-            <a:off x="777240" y="2514600"/>
-            <a:ext cx="10607040" cy="1051560"/>
-          </a:xfrm>
-          <a:prstGeom prst="rect">
-            <a:avLst/>
-          </a:prstGeom>
-          <a:solidFill>
-            <a:srgbClr val="EEF6F7"/>
-          </a:solidFill>
-          <a:ln>
-            <a:noFill/>
-          </a:ln>
-          <a:effectLst/>
-        </p:spPr>
-        <p:style>
-          <a:lnRef idx="1">
-            <a:schemeClr val="accent1"/>
-          </a:lnRef>
-          <a:fillRef idx="3">
-            <a:schemeClr val="accent1"/>
-          </a:fillRef>
-          <a:effectRef idx="2">
-            <a:schemeClr val="accent1"/>
-          </a:effectRef>
-          <a:fontRef idx="minor">
-            <a:schemeClr val="lt1"/>
-          </a:fontRef>
-        </p:style>
-        <p:txBody>
-          <a:bodyPr rtlCol="0" anchor="ctr"/>
-          <a:lstStyle/>
-          <a:p>
-            <a:pPr algn="ctr"/>
-            <a:endParaRPr/>
-          </a:p>
-        </p:txBody>
-      </p:sp>
-      <p:sp>
-        <p:nvSpPr>
-          <p:cNvPr id="7" name="TextBox 6"/>
-          <p:cNvSpPr txBox="1"/>
-          <p:nvPr/>
-        </p:nvSpPr>
-        <p:spPr>
-          <a:xfrm>
-            <a:off x="914400" y="2651760"/>
-            <a:ext cx="10332720" cy="822960"/>
-          </a:xfrm>
-          <a:prstGeom prst="rect">
-            <a:avLst/>
-          </a:prstGeom>
-          <a:noFill/>
-        </p:spPr>
-        <p:txBody>
-          <a:bodyPr wrap="square" anchor="ctr">
-            <a:spAutoFit/>
-          </a:bodyPr>
-          <a:lstStyle/>
-          <a:p>
-            <a:pPr algn="ctr"/>
-            <a:r>
-              <a:rPr sz="2200" b="1">
-                <a:solidFill>
-                  <a:srgbClr val="25323A"/>
-                </a:solidFill>
-                <a:latin typeface="Cambria Math"/>
-              </a:rPr>
-              <a:t>(M + A∞) ẍ  +  ∫₀ᵗ K(t−τ) ẋ(τ) dτ  +  C x  =  F_exc(t)  +  F_drag(ẋ)</a:t>
-            </a:r>
-          </a:p>
-        </p:txBody>
-      </p:sp>
-      <p:sp>
-        <p:nvSpPr>
-          <p:cNvPr id="8" name="TextBox 7"/>
-          <p:cNvSpPr txBox="1"/>
-          <p:nvPr/>
-        </p:nvSpPr>
-        <p:spPr>
-          <a:xfrm>
-            <a:off x="777240" y="3749039"/>
-            <a:ext cx="10698480" cy="4572000"/>
-          </a:xfrm>
-          <a:prstGeom prst="rect">
-            <a:avLst/>
-          </a:prstGeom>
-          <a:noFill/>
-        </p:spPr>
-        <p:txBody>
-          <a:bodyPr wrap="square">
-            <a:spAutoFit/>
-          </a:bodyPr>
-          <a:lstStyle/>
-          <a:p>
-            <a:pPr>
-              <a:spcBef>
-                <a:spcPts val="200"/>
-              </a:spcBef>
-              <a:spcAft>
-                <a:spcPts val="1000"/>
-              </a:spcAft>
-            </a:pPr>
-            <a:r>
-              <a:rPr sz="1800">
-                <a:solidFill>
-                  <a:srgbClr val="0C8B96"/>
-                </a:solidFill>
-                <a:latin typeface="Segoe UI"/>
-              </a:rPr>
-              <a:t>•  </a:t>
-            </a:r>
-            <a:r>
-              <a:rPr sz="1800" b="1" i="0">
-                <a:solidFill>
-                  <a:srgbClr val="0A5560"/>
-                </a:solidFill>
-                <a:latin typeface="Segoe UI"/>
-              </a:rPr>
-              <a:t>A∞</a:t>
-            </a:r>
-            <a:r>
-              <a:rPr sz="1800" b="0" i="0">
-                <a:solidFill>
-                  <a:srgbClr val="25323A"/>
-                </a:solidFill>
-                <a:latin typeface="Segoe UI"/>
-              </a:rPr>
-              <a:t> = infinite-frequency added mass.</a:t>
-            </a:r>
-          </a:p>
-          <a:p>
-            <a:pPr>
-              <a:spcBef>
-                <a:spcPts val="200"/>
-              </a:spcBef>
-              <a:spcAft>
-                <a:spcPts val="1000"/>
-              </a:spcAft>
-            </a:pPr>
-            <a:r>
-              <a:rPr sz="1800">
-                <a:solidFill>
-                  <a:srgbClr val="0C8B96"/>
-                </a:solidFill>
-                <a:latin typeface="Segoe UI"/>
-              </a:rPr>
-              <a:t>•  </a:t>
-            </a:r>
-            <a:r>
-              <a:rPr sz="1800" b="1" i="0">
-                <a:solidFill>
-                  <a:srgbClr val="0A5560"/>
-                </a:solidFill>
-                <a:latin typeface="Segoe UI"/>
-              </a:rPr>
-              <a:t>K(t) = (2/π)∫ B(ω) cos(ωt) dω</a:t>
-            </a:r>
-            <a:r>
-              <a:rPr sz="1800" b="0" i="0">
-                <a:solidFill>
-                  <a:srgbClr val="25323A"/>
-                </a:solidFill>
-                <a:latin typeface="Segoe UI"/>
-              </a:rPr>
-              <a:t> — the retardation kernel = </a:t>
-            </a:r>
-            <a:r>
-              <a:rPr sz="1800" b="0" i="1">
-                <a:solidFill>
-                  <a:srgbClr val="25323A"/>
-                </a:solidFill>
-                <a:latin typeface="Segoe UI"/>
-              </a:rPr>
-              <a:t>fluid memory</a:t>
-            </a:r>
-            <a:r>
-              <a:rPr sz="1800" b="0" i="0">
-                <a:solidFill>
-                  <a:srgbClr val="25323A"/>
-                </a:solidFill>
-                <a:latin typeface="Segoe UI"/>
-              </a:rPr>
-              <a:t> of previously radiated waves.</a:t>
-            </a:r>
-          </a:p>
-          <a:p>
-            <a:pPr>
-              <a:spcBef>
-                <a:spcPts val="200"/>
-              </a:spcBef>
-              <a:spcAft>
-                <a:spcPts val="1000"/>
-              </a:spcAft>
-            </a:pPr>
-            <a:r>
-              <a:rPr sz="1800">
-                <a:solidFill>
-                  <a:srgbClr val="0C8B96"/>
-                </a:solidFill>
-                <a:latin typeface="Segoe UI"/>
-              </a:rPr>
-              <a:t>•  </a:t>
-            </a:r>
-            <a:r>
-              <a:rPr sz="1800" b="0" i="0">
-                <a:solidFill>
-                  <a:srgbClr val="25323A"/>
-                </a:solidFill>
-                <a:latin typeface="Segoe UI"/>
-              </a:rPr>
-              <a:t>Mapping:  </a:t>
-            </a:r>
-            <a:r>
-              <a:rPr sz="1800" b="1" i="0">
-                <a:solidFill>
-                  <a:srgbClr val="25323A"/>
-                </a:solidFill>
-                <a:latin typeface="Segoe UI"/>
-              </a:rPr>
-              <a:t>Radiation → A∞ + K(t)</a:t>
-            </a:r>
-            <a:r>
-              <a:rPr sz="1800" b="0" i="0">
-                <a:solidFill>
-                  <a:srgbClr val="25323A"/>
-                </a:solidFill>
-                <a:latin typeface="Segoe UI"/>
-              </a:rPr>
-              <a:t>   ·   </a:t>
-            </a:r>
-            <a:r>
-              <a:rPr sz="1800" b="1" i="0">
-                <a:solidFill>
-                  <a:srgbClr val="25323A"/>
-                </a:solidFill>
-                <a:latin typeface="Segoe UI"/>
-              </a:rPr>
-              <a:t>Diffraction → F_exc</a:t>
-            </a:r>
-            <a:r>
-              <a:rPr sz="1800" b="0" i="0">
-                <a:solidFill>
-                  <a:srgbClr val="25323A"/>
-                </a:solidFill>
-                <a:latin typeface="Segoe UI"/>
-              </a:rPr>
-              <a:t>   ·   </a:t>
-            </a:r>
-            <a:r>
-              <a:rPr sz="1800" b="1" i="0">
-                <a:solidFill>
-                  <a:srgbClr val="25323A"/>
-                </a:solidFill>
-                <a:latin typeface="Segoe UI"/>
-              </a:rPr>
-              <a:t>Hydrostatics → C</a:t>
-            </a:r>
-            <a:r>
-              <a:rPr sz="1800" b="0" i="0">
-                <a:solidFill>
-                  <a:srgbClr val="25323A"/>
-                </a:solidFill>
-                <a:latin typeface="Segoe UI"/>
-              </a:rPr>
-              <a:t>.  FloatSim integrates this in time.</a:t>
-            </a:r>
-          </a:p>
-        </p:txBody>
-      </p:sp>
-    </p:spTree>
-  </p:cSld>
-  <p:clrMapOvr>
-    <a:masterClrMapping/>
-  </p:clrMapOvr>
-</p:sld>
-</file>
-
-<file path=ppt/slides/slide8.xml><?xml version="1.0" encoding="utf-8"?>
-<p:sld xmlns:a="http://schemas.openxmlformats.org/drawingml/2006/main" xmlns:r="http://schemas.openxmlformats.org/officeDocument/2006/relationships" xmlns:p="http://schemas.openxmlformats.org/presentationml/2006/main">
-  <p:cSld>
-    <p:bg>
-      <p:bgPr>
-        <a:solidFill>
-          <a:srgbClr val="FFFFFF"/>
-        </a:solidFill>
-        <a:effectLst/>
-      </p:bgPr>
-    </p:bg>
-    <p:spTree>
-      <p:nvGrpSpPr>
-        <p:cNvPr id="1" name=""/>
-        <p:cNvGrpSpPr/>
-        <p:nvPr/>
-      </p:nvGrpSpPr>
-      <p:grpSpPr>
-        <a:xfrm>
-          <a:off x="0" y="0"/>
-          <a:ext cx="0" cy="0"/>
-          <a:chOff x="0" y="0"/>
-          <a:chExt cx="0" cy="0"/>
-        </a:xfrm>
-      </p:grpSpPr>
-      <p:sp>
-        <p:nvSpPr>
-          <p:cNvPr id="2" name="TextBox 1"/>
-          <p:cNvSpPr txBox="1"/>
-          <p:nvPr/>
-        </p:nvSpPr>
-        <p:spPr>
-          <a:xfrm>
-            <a:off x="640080" y="384048"/>
-            <a:ext cx="10972800" cy="365760"/>
-          </a:xfrm>
-          <a:prstGeom prst="rect">
-            <a:avLst/>
-          </a:prstGeom>
-          <a:noFill/>
-        </p:spPr>
-        <p:txBody>
-          <a:bodyPr wrap="none">
-            <a:spAutoFit/>
-          </a:bodyPr>
-          <a:lstStyle/>
-          <a:p>
-            <a:r>
-              <a:rPr sz="1300" b="1">
-                <a:solidFill>
-                  <a:srgbClr val="0C8B96"/>
-                </a:solidFill>
-                <a:latin typeface="Segoe UI"/>
-              </a:rPr>
-              <a:t>DIVISION OF LABOUR</a:t>
-            </a:r>
-          </a:p>
-        </p:txBody>
-      </p:sp>
-      <p:sp>
-        <p:nvSpPr>
-          <p:cNvPr id="3" name="TextBox 2"/>
-          <p:cNvSpPr txBox="1"/>
-          <p:nvPr/>
-        </p:nvSpPr>
-        <p:spPr>
-          <a:xfrm>
-            <a:off x="640080" y="658368"/>
-            <a:ext cx="10972800" cy="822960"/>
-          </a:xfrm>
-          <a:prstGeom prst="rect">
-            <a:avLst/>
-          </a:prstGeom>
-          <a:noFill/>
-        </p:spPr>
-        <p:txBody>
-          <a:bodyPr wrap="none">
-            <a:spAutoFit/>
-          </a:bodyPr>
-          <a:lstStyle/>
-          <a:p>
-            <a:r>
-              <a:rPr sz="3000" b="1">
-                <a:solidFill>
-                  <a:srgbClr val="25323A"/>
-                </a:solidFill>
-                <a:latin typeface="Segoe UI"/>
-              </a:rPr>
-              <a:t>Who computes what — Capytaine vs FloatSim</a:t>
-            </a:r>
-          </a:p>
-        </p:txBody>
-      </p:sp>
-      <p:sp>
-        <p:nvSpPr>
-          <p:cNvPr id="4" name="Rectangle 3"/>
-          <p:cNvSpPr/>
-          <p:nvPr/>
-        </p:nvSpPr>
-        <p:spPr>
-          <a:xfrm>
-            <a:off x="658368" y="1444752"/>
-            <a:ext cx="2011680" cy="54864"/>
-          </a:xfrm>
-          <a:prstGeom prst="rect">
-            <a:avLst/>
-          </a:prstGeom>
-          <a:solidFill>
-            <a:srgbClr val="0C8B96"/>
-          </a:solidFill>
-          <a:ln>
-            <a:noFill/>
-          </a:ln>
-          <a:effectLst/>
-        </p:spPr>
-        <p:style>
-          <a:lnRef idx="1">
-            <a:schemeClr val="accent1"/>
-          </a:lnRef>
-          <a:fillRef idx="3">
-            <a:schemeClr val="accent1"/>
-          </a:fillRef>
-          <a:effectRef idx="2">
-            <a:schemeClr val="accent1"/>
-          </a:effectRef>
-          <a:fontRef idx="minor">
-            <a:schemeClr val="lt1"/>
-          </a:fontRef>
-        </p:style>
-        <p:txBody>
-          <a:bodyPr rtlCol="0" anchor="ctr"/>
-          <a:lstStyle/>
-          <a:p>
-            <a:pPr algn="ctr"/>
-            <a:endParaRPr/>
-          </a:p>
-        </p:txBody>
-      </p:sp>
-      <p:sp>
-        <p:nvSpPr>
-          <p:cNvPr id="5" name="Rectangle 4"/>
-          <p:cNvSpPr/>
-          <p:nvPr/>
-        </p:nvSpPr>
-        <p:spPr>
-          <a:xfrm>
-            <a:off x="502920" y="1783080"/>
-            <a:ext cx="5029200" cy="4160520"/>
-          </a:xfrm>
-          <a:prstGeom prst="rect">
-            <a:avLst/>
-          </a:prstGeom>
-          <a:solidFill>
-            <a:srgbClr val="F7FAFB"/>
-          </a:solidFill>
-          <a:ln w="15875">
-            <a:solidFill>
-              <a:srgbClr val="0C8B96"/>
-            </a:solidFill>
-          </a:ln>
-          <a:effectLst/>
-        </p:spPr>
-        <p:style>
-          <a:lnRef idx="1">
-            <a:schemeClr val="accent1"/>
-          </a:lnRef>
-          <a:fillRef idx="3">
-            <a:schemeClr val="accent1"/>
-          </a:fillRef>
-          <a:effectRef idx="2">
-            <a:schemeClr val="accent1"/>
-          </a:effectRef>
-          <a:fontRef idx="minor">
-            <a:schemeClr val="lt1"/>
-          </a:fontRef>
-        </p:style>
-        <p:txBody>
-          <a:bodyPr rtlCol="0" anchor="ctr"/>
-          <a:lstStyle/>
-          <a:p>
-            <a:pPr algn="ctr"/>
-            <a:endParaRPr/>
-          </a:p>
-        </p:txBody>
-      </p:sp>
-      <p:sp>
-        <p:nvSpPr>
-          <p:cNvPr id="6" name="Rectangle 5"/>
-          <p:cNvSpPr/>
-          <p:nvPr/>
-        </p:nvSpPr>
-        <p:spPr>
-          <a:xfrm>
-            <a:off x="502920" y="1783080"/>
-            <a:ext cx="5029200" cy="548640"/>
-          </a:xfrm>
-          <a:prstGeom prst="rect">
-            <a:avLst/>
-          </a:prstGeom>
-          <a:solidFill>
-            <a:srgbClr val="0C8B96"/>
-          </a:solidFill>
-          <a:ln>
-            <a:noFill/>
-          </a:ln>
-          <a:effectLst/>
-        </p:spPr>
-        <p:style>
-          <a:lnRef idx="1">
-            <a:schemeClr val="accent1"/>
-          </a:lnRef>
-          <a:fillRef idx="3">
-            <a:schemeClr val="accent1"/>
-          </a:fillRef>
-          <a:effectRef idx="2">
-            <a:schemeClr val="accent1"/>
-          </a:effectRef>
-          <a:fontRef idx="minor">
-            <a:schemeClr val="lt1"/>
-          </a:fontRef>
-        </p:style>
-        <p:txBody>
-          <a:bodyPr rtlCol="0" anchor="ctr"/>
-          <a:lstStyle/>
-          <a:p>
-            <a:pPr algn="ctr"/>
-            <a:r>
-              <a:rPr sz="1700" b="1">
-                <a:solidFill>
-                  <a:srgbClr val="FFFFFF"/>
-                </a:solidFill>
-                <a:latin typeface="Segoe UI"/>
-              </a:rPr>
-              <a:t>CAPYTAINE</a:t>
-            </a:r>
-          </a:p>
-        </p:txBody>
-      </p:sp>
-      <p:sp>
-        <p:nvSpPr>
-          <p:cNvPr id="7" name="TextBox 6"/>
-          <p:cNvSpPr txBox="1"/>
-          <p:nvPr/>
-        </p:nvSpPr>
-        <p:spPr>
-          <a:xfrm>
-            <a:off x="502920" y="2313432"/>
-            <a:ext cx="5029200" cy="310896"/>
-          </a:xfrm>
-          <a:prstGeom prst="rect">
-            <a:avLst/>
-          </a:prstGeom>
-          <a:noFill/>
-        </p:spPr>
-        <p:txBody>
-          <a:bodyPr wrap="none">
-            <a:spAutoFit/>
-          </a:bodyPr>
-          <a:lstStyle/>
-          <a:p>
-            <a:pPr algn="ctr"/>
-            <a:r>
-              <a:rPr sz="1050" i="1">
-                <a:solidFill>
-                  <a:srgbClr val="54636D"/>
-                </a:solidFill>
-                <a:latin typeface="Segoe UI"/>
-              </a:rPr>
-              <a:t>run once · frequency domain · linear + inviscid</a:t>
-            </a:r>
-          </a:p>
-        </p:txBody>
-      </p:sp>
-      <p:sp>
-        <p:nvSpPr>
-          <p:cNvPr id="8" name="TextBox 7"/>
-          <p:cNvSpPr txBox="1"/>
-          <p:nvPr/>
-        </p:nvSpPr>
-        <p:spPr>
-          <a:xfrm>
-            <a:off x="758952" y="2715768"/>
-            <a:ext cx="4553712" cy="3108960"/>
-          </a:xfrm>
-          <a:prstGeom prst="rect">
-            <a:avLst/>
-          </a:prstGeom>
-          <a:noFill/>
-        </p:spPr>
-        <p:txBody>
-          <a:bodyPr wrap="square">
-            <a:spAutoFit/>
-          </a:bodyPr>
-          <a:lstStyle/>
-          <a:p>
-            <a:pPr>
-              <a:spcAft>
-                <a:spcPts val="600"/>
-              </a:spcAft>
-            </a:pPr>
-            <a:r>
-              <a:rPr sz="1300">
-                <a:solidFill>
-                  <a:srgbClr val="0C8B96"/>
-                </a:solidFill>
-                <a:latin typeface="Segoe UI"/>
-              </a:rPr>
-              <a:t>•  </a:t>
-            </a:r>
-            <a:r>
-              <a:rPr sz="1300" b="0" i="0">
-                <a:solidFill>
-                  <a:srgbClr val="25323A"/>
-                </a:solidFill>
-                <a:latin typeface="Segoe UI"/>
-              </a:rPr>
-              <a:t>Panel mesh of the wetted hull</a:t>
-            </a:r>
-          </a:p>
-          <a:p>
-            <a:pPr>
-              <a:spcAft>
-                <a:spcPts val="600"/>
-              </a:spcAft>
-            </a:pPr>
-            <a:r>
-              <a:rPr sz="1300">
-                <a:solidFill>
-                  <a:srgbClr val="0C8B96"/>
-                </a:solidFill>
-                <a:latin typeface="Segoe UI"/>
-              </a:rPr>
-              <a:t>•  </a:t>
-            </a:r>
-            <a:r>
-              <a:rPr sz="1300" b="0" i="0">
-                <a:solidFill>
-                  <a:srgbClr val="25323A"/>
-                </a:solidFill>
-                <a:latin typeface="Segoe UI"/>
-              </a:rPr>
-              <a:t>Radiation problem → A(ω), A∞ and B(ω)</a:t>
-            </a:r>
-          </a:p>
-          <a:p>
-            <a:pPr>
-              <a:spcAft>
-                <a:spcPts val="600"/>
-              </a:spcAft>
-            </a:pPr>
-            <a:r>
-              <a:rPr sz="1300">
-                <a:solidFill>
-                  <a:srgbClr val="0C8B96"/>
-                </a:solidFill>
-                <a:latin typeface="Segoe UI"/>
-              </a:rPr>
-              <a:t>•  </a:t>
-            </a:r>
-            <a:r>
-              <a:rPr sz="1300" b="0" i="0">
-                <a:solidFill>
-                  <a:srgbClr val="25323A"/>
-                </a:solidFill>
-                <a:latin typeface="Segoe UI"/>
-              </a:rPr>
-              <a:t>Diffraction problem → F_exc(ω, β)</a:t>
-            </a:r>
-          </a:p>
-          <a:p>
-            <a:pPr>
-              <a:spcAft>
-                <a:spcPts val="600"/>
-              </a:spcAft>
-            </a:pPr>
-            <a:r>
-              <a:rPr sz="1300">
-                <a:solidFill>
-                  <a:srgbClr val="0C8B96"/>
-                </a:solidFill>
-                <a:latin typeface="Segoe UI"/>
-              </a:rPr>
-              <a:t>•  </a:t>
-            </a:r>
-            <a:r>
-              <a:rPr sz="1300" b="0" i="0">
-                <a:solidFill>
-                  <a:srgbClr val="25323A"/>
-                </a:solidFill>
-                <a:latin typeface="Segoe UI"/>
-              </a:rPr>
-              <a:t>Hydrostatic stiffness C (buoyancy)</a:t>
-            </a:r>
-          </a:p>
-          <a:p>
-            <a:pPr>
-              <a:spcAft>
-                <a:spcPts val="200"/>
-              </a:spcAft>
-            </a:pPr>
-            <a:r>
-              <a:rPr sz="1300">
-                <a:solidFill>
-                  <a:srgbClr val="0C8B96"/>
-                </a:solidFill>
-                <a:latin typeface="Segoe UI"/>
-              </a:rPr>
-              <a:t>⇒  </a:t>
-            </a:r>
-            <a:r>
-              <a:rPr sz="1300" b="1" i="0">
-                <a:solidFill>
-                  <a:srgbClr val="0A5560"/>
-                </a:solidFill>
-                <a:latin typeface="Segoe UI"/>
-              </a:rPr>
-              <a:t>Outputs: hydrodynamic coefficients</a:t>
-            </a:r>
-          </a:p>
-        </p:txBody>
-      </p:sp>
-      <p:sp>
-        <p:nvSpPr>
-          <p:cNvPr id="9" name="Rectangle 8"/>
-          <p:cNvSpPr/>
-          <p:nvPr/>
-        </p:nvSpPr>
-        <p:spPr>
-          <a:xfrm>
-            <a:off x="6656832" y="1783080"/>
-            <a:ext cx="5029200" cy="4160520"/>
-          </a:xfrm>
-          <a:prstGeom prst="rect">
-            <a:avLst/>
-          </a:prstGeom>
-          <a:solidFill>
-            <a:srgbClr val="F7FAFB"/>
-          </a:solidFill>
-          <a:ln w="15875">
-            <a:solidFill>
-              <a:srgbClr val="0A5560"/>
-            </a:solidFill>
-          </a:ln>
-          <a:effectLst/>
-        </p:spPr>
-        <p:style>
-          <a:lnRef idx="1">
-            <a:schemeClr val="accent1"/>
-          </a:lnRef>
-          <a:fillRef idx="3">
-            <a:schemeClr val="accent1"/>
-          </a:fillRef>
-          <a:effectRef idx="2">
-            <a:schemeClr val="accent1"/>
-          </a:effectRef>
-          <a:fontRef idx="minor">
-            <a:schemeClr val="lt1"/>
-          </a:fontRef>
-        </p:style>
-        <p:txBody>
-          <a:bodyPr rtlCol="0" anchor="ctr"/>
-          <a:lstStyle/>
-          <a:p>
-            <a:pPr algn="ctr"/>
-            <a:endParaRPr/>
-          </a:p>
-        </p:txBody>
-      </p:sp>
-      <p:sp>
-        <p:nvSpPr>
-          <p:cNvPr id="10" name="Rectangle 9"/>
-          <p:cNvSpPr/>
-          <p:nvPr/>
-        </p:nvSpPr>
-        <p:spPr>
-          <a:xfrm>
-            <a:off x="6656832" y="1783080"/>
-            <a:ext cx="5029200" cy="548640"/>
-          </a:xfrm>
-          <a:prstGeom prst="rect">
-            <a:avLst/>
-          </a:prstGeom>
-          <a:solidFill>
-            <a:srgbClr val="0A5560"/>
-          </a:solidFill>
-          <a:ln>
-            <a:noFill/>
-          </a:ln>
-          <a:effectLst/>
-        </p:spPr>
-        <p:style>
-          <a:lnRef idx="1">
-            <a:schemeClr val="accent1"/>
-          </a:lnRef>
-          <a:fillRef idx="3">
-            <a:schemeClr val="accent1"/>
-          </a:fillRef>
-          <a:effectRef idx="2">
-            <a:schemeClr val="accent1"/>
-          </a:effectRef>
-          <a:fontRef idx="minor">
-            <a:schemeClr val="lt1"/>
-          </a:fontRef>
-        </p:style>
-        <p:txBody>
-          <a:bodyPr rtlCol="0" anchor="ctr"/>
-          <a:lstStyle/>
-          <a:p>
-            <a:pPr algn="ctr"/>
-            <a:r>
-              <a:rPr sz="1700" b="1">
-                <a:solidFill>
-                  <a:srgbClr val="FFFFFF"/>
-                </a:solidFill>
-                <a:latin typeface="Segoe UI"/>
-              </a:rPr>
-              <a:t>FLOATSIM</a:t>
-            </a:r>
-          </a:p>
-        </p:txBody>
-      </p:sp>
-      <p:sp>
-        <p:nvSpPr>
-          <p:cNvPr id="11" name="TextBox 10"/>
-          <p:cNvSpPr txBox="1"/>
-          <p:nvPr/>
-        </p:nvSpPr>
-        <p:spPr>
-          <a:xfrm>
-            <a:off x="6656832" y="2313432"/>
-            <a:ext cx="5029200" cy="310896"/>
-          </a:xfrm>
-          <a:prstGeom prst="rect">
-            <a:avLst/>
-          </a:prstGeom>
-          <a:noFill/>
-        </p:spPr>
-        <p:txBody>
-          <a:bodyPr wrap="none">
-            <a:spAutoFit/>
-          </a:bodyPr>
-          <a:lstStyle/>
-          <a:p>
-            <a:pPr algn="ctr"/>
-            <a:r>
-              <a:rPr sz="1050" i="1">
-                <a:solidFill>
-                  <a:srgbClr val="54636D"/>
-                </a:solidFill>
-                <a:latin typeface="Segoe UI"/>
-              </a:rPr>
-              <a:t>per simulation · time domain</a:t>
-            </a:r>
-          </a:p>
-        </p:txBody>
-      </p:sp>
-      <p:sp>
-        <p:nvSpPr>
-          <p:cNvPr id="12" name="TextBox 11"/>
-          <p:cNvSpPr txBox="1"/>
-          <p:nvPr/>
-        </p:nvSpPr>
-        <p:spPr>
-          <a:xfrm>
-            <a:off x="6912864" y="2715768"/>
-            <a:ext cx="4553712" cy="3108960"/>
-          </a:xfrm>
-          <a:prstGeom prst="rect">
-            <a:avLst/>
-          </a:prstGeom>
-          <a:noFill/>
-        </p:spPr>
-        <p:txBody>
-          <a:bodyPr wrap="square">
-            <a:spAutoFit/>
-          </a:bodyPr>
-          <a:lstStyle/>
-          <a:p>
-            <a:pPr>
-              <a:spcAft>
-                <a:spcPts val="600"/>
-              </a:spcAft>
-            </a:pPr>
-            <a:r>
-              <a:rPr sz="1300">
-                <a:solidFill>
-                  <a:srgbClr val="0A5560"/>
-                </a:solidFill>
-                <a:latin typeface="Segoe UI"/>
-              </a:rPr>
-              <a:t>•  </a:t>
-            </a:r>
-            <a:r>
-              <a:rPr sz="1300" b="0" i="0">
-                <a:solidFill>
-                  <a:srgbClr val="25323A"/>
-                </a:solidFill>
-                <a:latin typeface="Segoe UI"/>
-              </a:rPr>
-              <a:t>Retardation kernel K(t) from B(ω)</a:t>
-            </a:r>
-          </a:p>
-          <a:p>
-            <a:pPr>
-              <a:spcAft>
-                <a:spcPts val="600"/>
-              </a:spcAft>
-            </a:pPr>
-            <a:r>
-              <a:rPr sz="1300">
-                <a:solidFill>
-                  <a:srgbClr val="0A5560"/>
-                </a:solidFill>
-                <a:latin typeface="Segoe UI"/>
-              </a:rPr>
-              <a:t>•  </a:t>
-            </a:r>
-            <a:r>
-              <a:rPr sz="1300" b="0" i="0">
-                <a:solidFill>
-                  <a:srgbClr val="25323A"/>
-                </a:solidFill>
-                <a:latin typeface="Segoe UI"/>
-              </a:rPr>
-              <a:t>Body mass &amp; inertia M (structure)</a:t>
-            </a:r>
-          </a:p>
-          <a:p>
-            <a:pPr>
-              <a:spcAft>
-                <a:spcPts val="600"/>
-              </a:spcAft>
-            </a:pPr>
-            <a:r>
-              <a:rPr sz="1300">
-                <a:solidFill>
-                  <a:srgbClr val="0A5560"/>
-                </a:solidFill>
-                <a:latin typeface="Segoe UI"/>
-              </a:rPr>
-              <a:t>•  </a:t>
-            </a:r>
-            <a:r>
-              <a:rPr sz="1300" b="0" i="0">
-                <a:solidFill>
-                  <a:srgbClr val="25323A"/>
-                </a:solidFill>
-                <a:latin typeface="Segoe UI"/>
-              </a:rPr>
-              <a:t>Assemble (M+A∞), C + gravity m·g·z_G</a:t>
-            </a:r>
-          </a:p>
-          <a:p>
-            <a:pPr>
-              <a:spcAft>
-                <a:spcPts val="600"/>
-              </a:spcAft>
-            </a:pPr>
-            <a:r>
-              <a:rPr sz="1300">
-                <a:solidFill>
-                  <a:srgbClr val="0A5560"/>
-                </a:solidFill>
-                <a:latin typeface="Segoe UI"/>
-              </a:rPr>
-              <a:t>•  </a:t>
-            </a:r>
-            <a:r>
-              <a:rPr sz="1300" b="0" i="0">
-                <a:solidFill>
-                  <a:srgbClr val="D1543A"/>
-                </a:solidFill>
-                <a:latin typeface="Segoe UI"/>
-              </a:rPr>
-              <a:t>Viscous Morison drag F_drag — not in BEM</a:t>
-            </a:r>
-          </a:p>
-          <a:p>
-            <a:pPr>
-              <a:spcAft>
-                <a:spcPts val="600"/>
-              </a:spcAft>
-            </a:pPr>
-            <a:r>
-              <a:rPr sz="1300">
-                <a:solidFill>
-                  <a:srgbClr val="0A5560"/>
-                </a:solidFill>
-                <a:latin typeface="Segoe UI"/>
-              </a:rPr>
-              <a:t>•  </a:t>
-            </a:r>
-            <a:r>
-              <a:rPr sz="1300" b="0" i="0">
-                <a:solidFill>
-                  <a:srgbClr val="25323A"/>
-                </a:solidFill>
-                <a:latin typeface="Segoe UI"/>
-              </a:rPr>
-              <a:t>Static equilibrium solve</a:t>
-            </a:r>
-          </a:p>
-          <a:p>
-            <a:pPr>
-              <a:spcAft>
-                <a:spcPts val="600"/>
-              </a:spcAft>
-            </a:pPr>
-            <a:r>
-              <a:rPr sz="1300">
-                <a:solidFill>
-                  <a:srgbClr val="0A5560"/>
-                </a:solidFill>
-                <a:latin typeface="Segoe UI"/>
-              </a:rPr>
-              <a:t>•  </a:t>
-            </a:r>
-            <a:r>
-              <a:rPr sz="1300" b="0" i="0">
-                <a:solidFill>
-                  <a:srgbClr val="25323A"/>
-                </a:solidFill>
-                <a:latin typeface="Segoe UI"/>
-              </a:rPr>
-              <a:t>Time-integrate the Cummins EoM → x(t)</a:t>
-            </a:r>
-          </a:p>
-          <a:p>
-            <a:pPr>
-              <a:spcAft>
-                <a:spcPts val="200"/>
-              </a:spcAft>
-            </a:pPr>
-            <a:r>
-              <a:rPr sz="1300">
-                <a:solidFill>
-                  <a:srgbClr val="0A5560"/>
-                </a:solidFill>
-                <a:latin typeface="Segoe UI"/>
-              </a:rPr>
-              <a:t>⇒  </a:t>
-            </a:r>
-            <a:r>
-              <a:rPr sz="1300" b="1" i="0">
-                <a:solidFill>
-                  <a:srgbClr val="0A5560"/>
-                </a:solidFill>
-                <a:latin typeface="Segoe UI"/>
-              </a:rPr>
-              <a:t>Output: decay period T &amp; damping ζ</a:t>
-            </a:r>
-          </a:p>
-        </p:txBody>
-      </p:sp>
-      <p:sp>
-        <p:nvSpPr>
-          <p:cNvPr id="13" name="Right Arrow 12"/>
-          <p:cNvSpPr/>
-          <p:nvPr/>
-        </p:nvSpPr>
-        <p:spPr>
-          <a:xfrm>
-            <a:off x="5596128" y="3246120"/>
-            <a:ext cx="932688" cy="457200"/>
-          </a:xfrm>
-          <a:prstGeom prst="rightArrow">
-            <a:avLst/>
-          </a:prstGeom>
-          <a:solidFill>
-            <a:srgbClr val="54636D"/>
-          </a:solidFill>
-          <a:ln>
-            <a:noFill/>
-          </a:ln>
-          <a:effectLst/>
-        </p:spPr>
-        <p:style>
-          <a:lnRef idx="1">
-            <a:schemeClr val="accent1"/>
-          </a:lnRef>
-          <a:fillRef idx="3">
-            <a:schemeClr val="accent1"/>
-          </a:fillRef>
-          <a:effectRef idx="2">
-            <a:schemeClr val="accent1"/>
-          </a:effectRef>
-          <a:fontRef idx="minor">
-            <a:schemeClr val="lt1"/>
-          </a:fontRef>
-        </p:style>
-        <p:txBody>
-          <a:bodyPr rtlCol="0" anchor="ctr"/>
-          <a:lstStyle/>
-          <a:p>
-            <a:pPr algn="ctr"/>
-            <a:endParaRPr/>
-          </a:p>
-        </p:txBody>
-      </p:sp>
-      <p:sp>
-        <p:nvSpPr>
-          <p:cNvPr id="14" name="TextBox 13"/>
-          <p:cNvSpPr txBox="1"/>
-          <p:nvPr/>
-        </p:nvSpPr>
-        <p:spPr>
-          <a:xfrm>
-            <a:off x="5257800" y="3730752"/>
-            <a:ext cx="1600200" cy="640080"/>
-          </a:xfrm>
-          <a:prstGeom prst="rect">
-            <a:avLst/>
-          </a:prstGeom>
-          <a:noFill/>
-        </p:spPr>
-        <p:txBody>
-          <a:bodyPr wrap="none">
-            <a:spAutoFit/>
-          </a:bodyPr>
-          <a:lstStyle/>
-          <a:p>
-            <a:pPr algn="ctr"/>
-            <a:r>
-              <a:rPr sz="900">
-                <a:solidFill>
-                  <a:srgbClr val="54636D"/>
-                </a:solidFill>
-                <a:latin typeface="Consolas"/>
-              </a:rPr>
-              <a:t>capytaine_
-osu_buoy.nc</a:t>
-            </a:r>
-          </a:p>
-        </p:txBody>
-      </p:sp>
-      <p:sp>
-        <p:nvSpPr>
-          <p:cNvPr id="15" name="Rectangle 14"/>
-          <p:cNvSpPr/>
-          <p:nvPr/>
-        </p:nvSpPr>
-        <p:spPr>
-          <a:xfrm>
-            <a:off x="777240" y="6108192"/>
-            <a:ext cx="10927080" cy="566928"/>
-          </a:xfrm>
-          <a:prstGeom prst="rect">
-            <a:avLst/>
-          </a:prstGeom>
-          <a:solidFill>
-            <a:srgbClr val="EEF6F7"/>
-          </a:solidFill>
-          <a:ln>
-            <a:noFill/>
-          </a:ln>
-          <a:effectLst/>
-        </p:spPr>
-        <p:style>
-          <a:lnRef idx="1">
-            <a:schemeClr val="accent1"/>
-          </a:lnRef>
-          <a:fillRef idx="3">
-            <a:schemeClr val="accent1"/>
-          </a:fillRef>
-          <a:effectRef idx="2">
-            <a:schemeClr val="accent1"/>
-          </a:effectRef>
-          <a:fontRef idx="minor">
-            <a:schemeClr val="lt1"/>
-          </a:fontRef>
-        </p:style>
-        <p:txBody>
-          <a:bodyPr rtlCol="0" anchor="ctr"/>
-          <a:lstStyle/>
-          <a:p>
-            <a:pPr algn="ctr"/>
-            <a:endParaRPr/>
-          </a:p>
-        </p:txBody>
-      </p:sp>
-      <p:sp>
-        <p:nvSpPr>
-          <p:cNvPr id="16" name="TextBox 15"/>
-          <p:cNvSpPr txBox="1"/>
-          <p:nvPr/>
-        </p:nvSpPr>
-        <p:spPr>
-          <a:xfrm>
-            <a:off x="960120" y="6144768"/>
-            <a:ext cx="10515600" cy="493776"/>
-          </a:xfrm>
-          <a:prstGeom prst="rect">
-            <a:avLst/>
-          </a:prstGeom>
-          <a:noFill/>
-        </p:spPr>
-        <p:txBody>
-          <a:bodyPr wrap="square" anchor="ctr">
-            <a:spAutoFit/>
-          </a:bodyPr>
-          <a:lstStyle/>
-          <a:p>
-            <a:pPr algn="ctr"/>
-            <a:r>
-              <a:rPr sz="1250" b="1">
-                <a:solidFill>
-                  <a:srgbClr val="0A5560"/>
-                </a:solidFill>
-                <a:latin typeface="Segoe UI"/>
-              </a:rPr>
-              <a:t>Capytaine = the hydrodynamic coefficients</a:t>
-            </a:r>
-            <a:r>
-              <a:rPr sz="1250" b="0">
-                <a:solidFill>
-                  <a:srgbClr val="25323A"/>
-                </a:solidFill>
-                <a:latin typeface="Segoe UI"/>
-              </a:rPr>
-              <a:t>   ·   </a:t>
-            </a:r>
-            <a:r>
-              <a:rPr sz="1250" b="1">
-                <a:solidFill>
-                  <a:srgbClr val="0A5560"/>
-                </a:solidFill>
-                <a:latin typeface="Segoe UI"/>
-              </a:rPr>
-              <a:t>FloatSim = the equation of motion in time</a:t>
-            </a:r>
-            <a:r>
-              <a:rPr sz="1250" b="0">
-                <a:solidFill>
-                  <a:srgbClr val="25323A"/>
-                </a:solidFill>
-                <a:latin typeface="Segoe UI"/>
-              </a:rPr>
-              <a:t>  (adds mass, viscous drag, mooring, equilibrium; converts B(ω)→K(t)).  Decay T and ζ are a FloatSim output.</a:t>
-            </a:r>
-          </a:p>
-        </p:txBody>
-      </p:sp>
-    </p:spTree>
-  </p:cSld>
-  <p:clrMapOvr>
-    <a:masterClrMapping/>
-  </p:clrMapOvr>
-</p:sld>
-</file>
-
-<file path=ppt/slides/slide9.xml><?xml version="1.0" encoding="utf-8"?>
-<p:sld xmlns:a="http://schemas.openxmlformats.org/drawingml/2006/main" xmlns:r="http://schemas.openxmlformats.org/officeDocument/2006/relationships" xmlns:p="http://schemas.openxmlformats.org/presentationml/2006/main">
-  <p:cSld>
-    <p:bg>
-      <p:bgPr>
-        <a:solidFill>
-          <a:srgbClr val="FFFFFF"/>
-        </a:solidFill>
-        <a:effectLst/>
-      </p:bgPr>
-    </p:bg>
-    <p:spTree>
-      <p:nvGrpSpPr>
-        <p:cNvPr id="1" name=""/>
-        <p:cNvGrpSpPr/>
-        <p:nvPr/>
-      </p:nvGrpSpPr>
-      <p:grpSpPr>
-        <a:xfrm>
-          <a:off x="0" y="0"/>
-          <a:ext cx="0" cy="0"/>
-          <a:chOff x="0" y="0"/>
-          <a:chExt cx="0" cy="0"/>
-        </a:xfrm>
-      </p:grpSpPr>
-      <p:sp>
-        <p:nvSpPr>
-          <p:cNvPr id="2" name="TextBox 1"/>
-          <p:cNvSpPr txBox="1"/>
-          <p:nvPr/>
-        </p:nvSpPr>
-        <p:spPr>
-          <a:xfrm>
-            <a:off x="640080" y="384048"/>
-            <a:ext cx="10972800" cy="365760"/>
-          </a:xfrm>
-          <a:prstGeom prst="rect">
-            <a:avLst/>
-          </a:prstGeom>
-          <a:noFill/>
-        </p:spPr>
-        <p:txBody>
-          <a:bodyPr wrap="none">
-            <a:spAutoFit/>
-          </a:bodyPr>
-          <a:lstStyle/>
-          <a:p>
-            <a:r>
-              <a:rPr sz="1300" b="1">
-                <a:solidFill>
-                  <a:srgbClr val="0C8B96"/>
-                </a:solidFill>
-                <a:latin typeface="Segoe UI"/>
-              </a:rPr>
-              <a:t>CAVEATS</a:t>
-            </a:r>
-          </a:p>
-        </p:txBody>
-      </p:sp>
-      <p:sp>
-        <p:nvSpPr>
-          <p:cNvPr id="3" name="TextBox 2"/>
-          <p:cNvSpPr txBox="1"/>
-          <p:nvPr/>
-        </p:nvSpPr>
-        <p:spPr>
-          <a:xfrm>
-            <a:off x="640080" y="658368"/>
-            <a:ext cx="10972800" cy="822960"/>
-          </a:xfrm>
-          <a:prstGeom prst="rect">
-            <a:avLst/>
-          </a:prstGeom>
-          <a:noFill/>
-        </p:spPr>
-        <p:txBody>
-          <a:bodyPr wrap="none">
-            <a:spAutoFit/>
-          </a:bodyPr>
-          <a:lstStyle/>
-          <a:p>
-            <a:r>
-              <a:rPr sz="3000" b="1">
-                <a:solidFill>
-                  <a:srgbClr val="25323A"/>
-                </a:solidFill>
-                <a:latin typeface="Segoe UI"/>
-              </a:rPr>
-              <a:t>Limits — and why the heave plate needs the tank</a:t>
-            </a:r>
-          </a:p>
-        </p:txBody>
-      </p:sp>
-      <p:sp>
-        <p:nvSpPr>
-          <p:cNvPr id="4" name="Rectangle 3"/>
-          <p:cNvSpPr/>
-          <p:nvPr/>
-        </p:nvSpPr>
-        <p:spPr>
-          <a:xfrm>
-            <a:off x="658368" y="1444752"/>
-            <a:ext cx="2011680" cy="54864"/>
-          </a:xfrm>
-          <a:prstGeom prst="rect">
-            <a:avLst/>
-          </a:prstGeom>
-          <a:solidFill>
-            <a:srgbClr val="0C8B96"/>
-          </a:solidFill>
-          <a:ln>
-            <a:noFill/>
-          </a:ln>
-          <a:effectLst/>
-        </p:spPr>
-        <p:style>
-          <a:lnRef idx="1">
-            <a:schemeClr val="accent1"/>
-          </a:lnRef>
-          <a:fillRef idx="3">
-            <a:schemeClr val="accent1"/>
-          </a:fillRef>
-          <a:effectRef idx="2">
-            <a:schemeClr val="accent1"/>
-          </a:effectRef>
-          <a:fontRef idx="minor">
-            <a:schemeClr val="lt1"/>
-          </a:fontRef>
-        </p:style>
-        <p:txBody>
-          <a:bodyPr rtlCol="0" anchor="ctr"/>
-          <a:lstStyle/>
-          <a:p>
-            <a:pPr algn="ctr"/>
-            <a:endParaRPr/>
           </a:p>
         </p:txBody>
       </p:sp>

--- a/studies/osu-test-buoy/Capytaine_analysis_OSU_buoy.pptx
+++ b/studies/osu-test-buoy/Capytaine_analysis_OSU_buoy.pptx
@@ -23,6 +23,8 @@
     <p:sldId id="271" r:id="rId22"/>
     <p:sldId id="272" r:id="rId23"/>
     <p:sldId id="273" r:id="rId24"/>
+    <p:sldId id="274" r:id="rId25"/>
+    <p:sldId id="275" r:id="rId26"/>
   </p:sldIdLst>
   <p:sldSz cx="12191695" cy="6858000" type="screen4x3"/>
   <p:notesSz cx="6858000" cy="9144000"/>
@@ -8032,6 +8034,425 @@
 </p:sld>
 </file>
 
+<file path=ppt/slides/slide19.xml><?xml version="1.0" encoding="utf-8"?>
+<p:sld xmlns:a="http://schemas.openxmlformats.org/drawingml/2006/main" xmlns:p="http://schemas.openxmlformats.org/presentationml/2006/main" xmlns:r="http://schemas.openxmlformats.org/officeDocument/2006/relationships">
+  <p:cSld>
+    <p:bg>
+      <p:bgPr>
+        <a:solidFill>
+          <a:srgbClr val="FFFFFF"/>
+        </a:solidFill>
+        <a:effectLst/>
+      </p:bgPr>
+    </p:bg>
+    <p:spTree>
+      <p:nvGrpSpPr>
+        <p:cNvPr id="1" name=""/>
+        <p:cNvGrpSpPr/>
+        <p:nvPr/>
+      </p:nvGrpSpPr>
+      <p:grpSpPr/>
+      <p:sp>
+        <p:nvSpPr>
+          <p:cNvPr id="2" name="TextBox 1"/>
+          <p:cNvSpPr txBox="1"/>
+          <p:nvPr/>
+        </p:nvSpPr>
+        <p:spPr>
+          <a:xfrm>
+            <a:off x="640080" y="384048"/>
+            <a:ext cx="10972800" cy="365760"/>
+          </a:xfrm>
+          <a:prstGeom prst="rect">
+            <a:avLst/>
+          </a:prstGeom>
+          <a:noFill/>
+        </p:spPr>
+        <p:txBody>
+          <a:bodyPr wrap="none">
+            <a:spAutoFit/>
+          </a:bodyPr>
+          <a:lstStyle/>
+          <a:p>
+            <a:r>
+              <a:rPr sz="1300" b="1">
+                <a:solidFill>
+                  <a:srgbClr val="0C8B96"/>
+                </a:solidFill>
+                <a:latin typeface="Segoe UI"/>
+              </a:rPr>
+              <a:t>FLUME TEST · REBUTTAL</a:t>
+            </a:r>
+          </a:p>
+        </p:txBody>
+      </p:sp>
+      <p:sp>
+        <p:nvSpPr>
+          <p:cNvPr id="3" name="TextBox 2"/>
+          <p:cNvSpPr txBox="1"/>
+          <p:nvPr/>
+        </p:nvSpPr>
+        <p:spPr>
+          <a:xfrm>
+            <a:off x="640080" y="658368"/>
+            <a:ext cx="10972800" cy="822960"/>
+          </a:xfrm>
+          <a:prstGeom prst="rect">
+            <a:avLst/>
+          </a:prstGeom>
+          <a:noFill/>
+        </p:spPr>
+        <p:txBody>
+          <a:bodyPr wrap="none">
+            <a:spAutoFit/>
+          </a:bodyPr>
+          <a:lstStyle/>
+          <a:p>
+            <a:r>
+              <a:rPr sz="3000" b="1">
+                <a:solidFill>
+                  <a:srgbClr val="25323A"/>
+                </a:solidFill>
+                <a:latin typeface="Segoe UI"/>
+              </a:rPr>
+              <a:t>Phase-3 platform in the HWRL flume — is it too big?</a:t>
+            </a:r>
+          </a:p>
+        </p:txBody>
+      </p:sp>
+      <p:sp>
+        <p:nvSpPr>
+          <p:cNvPr id="4" name="Rectangle 3"/>
+          <p:cNvSpPr/>
+          <p:nvPr/>
+        </p:nvSpPr>
+        <p:spPr>
+          <a:xfrm>
+            <a:off x="658368" y="1444752"/>
+            <a:ext cx="2011680" cy="54864"/>
+          </a:xfrm>
+          <a:prstGeom prst="rect">
+            <a:avLst/>
+          </a:prstGeom>
+          <a:solidFill>
+            <a:srgbClr val="0C8B96"/>
+          </a:solidFill>
+          <a:ln>
+            <a:noFill/>
+          </a:ln>
+          <a:effectLst/>
+        </p:spPr>
+        <p:style>
+          <a:lnRef idx="1">
+            <a:schemeClr val="accent1"/>
+          </a:lnRef>
+          <a:fillRef idx="3">
+            <a:schemeClr val="accent1"/>
+          </a:fillRef>
+          <a:effectRef idx="2">
+            <a:schemeClr val="accent1"/>
+          </a:effectRef>
+          <a:fontRef idx="minor">
+            <a:schemeClr val="lt1"/>
+          </a:fontRef>
+        </p:style>
+        <p:txBody>
+          <a:bodyPr rtlCol="0" anchor="ctr"/>
+          <a:lstStyle/>
+          <a:p>
+            <a:pPr algn="ctr"/>
+          </a:p>
+        </p:txBody>
+      </p:sp>
+      <p:pic>
+        <p:nvPicPr>
+          <p:cNvPr id="5" name="Picture 4" descr="OSU_flume_blockage.png"/>
+          <p:cNvPicPr>
+            <a:picLocks noChangeAspect="1"/>
+          </p:cNvPicPr>
+          <p:nvPr/>
+        </p:nvPicPr>
+        <p:blipFill>
+          <a:blip r:embed="rId2"/>
+          <a:stretch>
+            <a:fillRect/>
+          </a:stretch>
+        </p:blipFill>
+        <p:spPr>
+          <a:xfrm>
+            <a:off x="411480" y="1737360"/>
+            <a:ext cx="4305256" cy="4480560"/>
+          </a:xfrm>
+          <a:prstGeom prst="rect">
+            <a:avLst/>
+          </a:prstGeom>
+        </p:spPr>
+      </p:pic>
+      <p:sp>
+        <p:nvSpPr>
+          <p:cNvPr id="6" name="Rectangle 5"/>
+          <p:cNvSpPr/>
+          <p:nvPr/>
+        </p:nvSpPr>
+        <p:spPr>
+          <a:xfrm>
+            <a:off x="6035040" y="1783080"/>
+            <a:ext cx="5760720" cy="4343400"/>
+          </a:xfrm>
+          <a:prstGeom prst="rect">
+            <a:avLst/>
+          </a:prstGeom>
+          <a:solidFill>
+            <a:srgbClr val="F7FAFB"/>
+          </a:solidFill>
+          <a:ln w="15875">
+            <a:solidFill>
+              <a:srgbClr val="0C8B96"/>
+            </a:solidFill>
+          </a:ln>
+          <a:effectLst/>
+        </p:spPr>
+        <p:style>
+          <a:lnRef idx="1">
+            <a:schemeClr val="accent1"/>
+          </a:lnRef>
+          <a:fillRef idx="3">
+            <a:schemeClr val="accent1"/>
+          </a:fillRef>
+          <a:effectRef idx="2">
+            <a:schemeClr val="accent1"/>
+          </a:effectRef>
+          <a:fontRef idx="minor">
+            <a:schemeClr val="lt1"/>
+          </a:fontRef>
+        </p:style>
+        <p:txBody>
+          <a:bodyPr rtlCol="0" anchor="ctr"/>
+          <a:lstStyle/>
+          <a:p>
+            <a:pPr algn="ctr"/>
+          </a:p>
+        </p:txBody>
+      </p:sp>
+      <p:sp>
+        <p:nvSpPr>
+          <p:cNvPr id="7" name="Rectangle 6"/>
+          <p:cNvSpPr/>
+          <p:nvPr/>
+        </p:nvSpPr>
+        <p:spPr>
+          <a:xfrm>
+            <a:off x="6035040" y="1783080"/>
+            <a:ext cx="5760720" cy="548640"/>
+          </a:xfrm>
+          <a:prstGeom prst="rect">
+            <a:avLst/>
+          </a:prstGeom>
+          <a:solidFill>
+            <a:srgbClr val="0C8B96"/>
+          </a:solidFill>
+          <a:ln>
+            <a:noFill/>
+          </a:ln>
+          <a:effectLst/>
+        </p:spPr>
+        <p:style>
+          <a:lnRef idx="1">
+            <a:schemeClr val="accent1"/>
+          </a:lnRef>
+          <a:fillRef idx="3">
+            <a:schemeClr val="accent1"/>
+          </a:fillRef>
+          <a:effectRef idx="2">
+            <a:schemeClr val="accent1"/>
+          </a:effectRef>
+          <a:fontRef idx="minor">
+            <a:schemeClr val="lt1"/>
+          </a:fontRef>
+        </p:style>
+        <p:txBody>
+          <a:bodyPr rtlCol="0" anchor="ctr"/>
+          <a:lstStyle/>
+          <a:p>
+            <a:pPr algn="ctr"/>
+            <a:r>
+              <a:rPr sz="1700" b="1">
+                <a:solidFill>
+                  <a:srgbClr val="FFFFFF"/>
+                </a:solidFill>
+                <a:latin typeface="Segoe UI"/>
+              </a:rPr>
+              <a:t>THE REVIEW COMMENT</a:t>
+            </a:r>
+          </a:p>
+        </p:txBody>
+      </p:sp>
+      <p:sp>
+        <p:nvSpPr>
+          <p:cNvPr id="8" name="TextBox 7"/>
+          <p:cNvSpPr txBox="1"/>
+          <p:nvPr/>
+        </p:nvSpPr>
+        <p:spPr>
+          <a:xfrm>
+            <a:off x="6035040" y="2313432"/>
+            <a:ext cx="5760720" cy="310896"/>
+          </a:xfrm>
+          <a:prstGeom prst="rect">
+            <a:avLst/>
+          </a:prstGeom>
+          <a:noFill/>
+        </p:spPr>
+        <p:txBody>
+          <a:bodyPr wrap="none">
+            <a:spAutoFit/>
+          </a:bodyPr>
+          <a:lstStyle/>
+          <a:p>
+            <a:pPr algn="ctr"/>
+            <a:r>
+              <a:rPr sz="1050" i="1">
+                <a:solidFill>
+                  <a:srgbClr val="54636D"/>
+                </a:solidFill>
+                <a:latin typeface="Segoe UI"/>
+              </a:rPr>
+              <a:t>TEAMER Phase-3 review</a:t>
+            </a:r>
+          </a:p>
+        </p:txBody>
+      </p:sp>
+      <p:sp>
+        <p:nvSpPr>
+          <p:cNvPr id="9" name="TextBox 8"/>
+          <p:cNvSpPr txBox="1"/>
+          <p:nvPr/>
+        </p:nvSpPr>
+        <p:spPr>
+          <a:xfrm>
+            <a:off x="6291072" y="2715768"/>
+            <a:ext cx="5285231" cy="3291840"/>
+          </a:xfrm>
+          <a:prstGeom prst="rect">
+            <a:avLst/>
+          </a:prstGeom>
+          <a:noFill/>
+        </p:spPr>
+        <p:txBody>
+          <a:bodyPr wrap="square">
+            <a:spAutoFit/>
+          </a:bodyPr>
+          <a:lstStyle/>
+          <a:p>
+            <a:pPr>
+              <a:spcAft>
+                <a:spcPts val="1000"/>
+              </a:spcAft>
+            </a:pPr>
+            <a:r>
+              <a:rPr sz="1300">
+                <a:solidFill>
+                  <a:srgbClr val="0C8B96"/>
+                </a:solidFill>
+                <a:latin typeface="Segoe UI"/>
+              </a:rPr>
+              <a:t/>
+            </a:r>
+            <a:r>
+              <a:rPr sz="1300" b="0" i="1">
+                <a:solidFill>
+                  <a:srgbClr val="25323A"/>
+                </a:solidFill>
+                <a:latin typeface="Segoe UI"/>
+              </a:rPr>
+              <a:t>“2.50 m platform inside HWRL's 3.67 m flume leaves 0.6 m side clearance, inducing severe sidewall reflections that will corrupt dynamic data.”</a:t>
+            </a:r>
+          </a:p>
+          <a:p>
+            <a:pPr>
+              <a:spcAft>
+                <a:spcPts val="600"/>
+              </a:spcAft>
+            </a:pPr>
+            <a:r>
+              <a:rPr sz="1300">
+                <a:solidFill>
+                  <a:srgbClr val="0C8B96"/>
+                </a:solidFill>
+                <a:latin typeface="Segoe UI"/>
+              </a:rPr>
+              <a:t>•  </a:t>
+            </a:r>
+            <a:r>
+              <a:rPr sz="1300" b="1" i="0">
+                <a:solidFill>
+                  <a:srgbClr val="0A5560"/>
+                </a:solidFill>
+                <a:latin typeface="Segoe UI"/>
+              </a:rPr>
+              <a:t>Phase 3 = the platform (12 buoys); free-decay + wave sweeps.</a:t>
+            </a:r>
+          </a:p>
+          <a:p>
+            <a:pPr>
+              <a:spcAft>
+                <a:spcPts val="600"/>
+              </a:spcAft>
+            </a:pPr>
+            <a:r>
+              <a:rPr sz="1300">
+                <a:solidFill>
+                  <a:srgbClr val="0C8B96"/>
+                </a:solidFill>
+                <a:latin typeface="Segoe UI"/>
+              </a:rPr>
+              <a:t>•  </a:t>
+            </a:r>
+            <a:r>
+              <a:rPr sz="1300" b="0" i="0">
+                <a:solidFill>
+                  <a:srgbClr val="25323A"/>
+                </a:solidFill>
+                <a:latin typeface="Segoe UI"/>
+              </a:rPr>
+              <a:t>2.5 m is to buoy CENTRES; with the plates the outer span is 2.79 m = 68% of the width → ~44 cm/side (tighter than the 0.6 m assumed).</a:t>
+            </a:r>
+          </a:p>
+          <a:p>
+            <a:pPr>
+              <a:spcAft>
+                <a:spcPts val="600"/>
+              </a:spcAft>
+            </a:pPr>
+            <a:r>
+              <a:rPr sz="1300">
+                <a:solidFill>
+                  <a:srgbClr val="0C8B96"/>
+                </a:solidFill>
+                <a:latin typeface="Segoe UI"/>
+              </a:rPr>
+              <a:t>⇒  </a:t>
+            </a:r>
+            <a:r>
+              <a:rPr sz="1300" b="1" i="0">
+                <a:solidFill>
+                  <a:srgbClr val="0A5560"/>
+                </a:solidFill>
+                <a:latin typeface="Segoe UI"/>
+              </a:rPr>
+              <a:t>Assessed walls-in vs walls-out at the same 2.7 m depth — isolates the walls.</a:t>
+            </a:r>
+          </a:p>
+        </p:txBody>
+      </p:sp>
+    </p:spTree>
+  </p:cSld>
+  <p:clrMapOvr>
+    <a:masterClrMapping/>
+  </p:clrMapOvr>
+</p:sld>
+</file>
+
 <file path=ppt/slides/slide2.xml><?xml version="1.0" encoding="utf-8"?>
 <p:sld xmlns:a="http://schemas.openxmlformats.org/drawingml/2006/main" xmlns:p="http://schemas.openxmlformats.org/presentationml/2006/main" xmlns:r="http://schemas.openxmlformats.org/officeDocument/2006/relationships">
   <p:cSld>
@@ -8421,6 +8842,292 @@
                 <a:latin typeface="Segoe UI"/>
               </a:rPr>
               <a:t> — the body held fixed under incoming waves</a:t>
+            </a:r>
+          </a:p>
+        </p:txBody>
+      </p:sp>
+    </p:spTree>
+  </p:cSld>
+  <p:clrMapOvr>
+    <a:masterClrMapping/>
+  </p:clrMapOvr>
+</p:sld>
+</file>
+
+<file path=ppt/slides/slide20.xml><?xml version="1.0" encoding="utf-8"?>
+<p:sld xmlns:a="http://schemas.openxmlformats.org/drawingml/2006/main" xmlns:p="http://schemas.openxmlformats.org/presentationml/2006/main" xmlns:r="http://schemas.openxmlformats.org/officeDocument/2006/relationships">
+  <p:cSld>
+    <p:bg>
+      <p:bgPr>
+        <a:solidFill>
+          <a:srgbClr val="FFFFFF"/>
+        </a:solidFill>
+        <a:effectLst/>
+      </p:bgPr>
+    </p:bg>
+    <p:spTree>
+      <p:nvGrpSpPr>
+        <p:cNvPr id="1" name=""/>
+        <p:cNvGrpSpPr/>
+        <p:nvPr/>
+      </p:nvGrpSpPr>
+      <p:grpSpPr/>
+      <p:sp>
+        <p:nvSpPr>
+          <p:cNvPr id="2" name="TextBox 1"/>
+          <p:cNvSpPr txBox="1"/>
+          <p:nvPr/>
+        </p:nvSpPr>
+        <p:spPr>
+          <a:xfrm>
+            <a:off x="640080" y="384048"/>
+            <a:ext cx="10972800" cy="365760"/>
+          </a:xfrm>
+          <a:prstGeom prst="rect">
+            <a:avLst/>
+          </a:prstGeom>
+          <a:noFill/>
+        </p:spPr>
+        <p:txBody>
+          <a:bodyPr wrap="none">
+            <a:spAutoFit/>
+          </a:bodyPr>
+          <a:lstStyle/>
+          <a:p>
+            <a:r>
+              <a:rPr sz="1300" b="1">
+                <a:solidFill>
+                  <a:srgbClr val="0C8B96"/>
+                </a:solidFill>
+                <a:latin typeface="Segoe UI"/>
+              </a:rPr>
+              <a:t>FLUME TEST · REBUTTAL</a:t>
+            </a:r>
+          </a:p>
+        </p:txBody>
+      </p:sp>
+      <p:sp>
+        <p:nvSpPr>
+          <p:cNvPr id="3" name="TextBox 2"/>
+          <p:cNvSpPr txBox="1"/>
+          <p:nvPr/>
+        </p:nvSpPr>
+        <p:spPr>
+          <a:xfrm>
+            <a:off x="640080" y="658368"/>
+            <a:ext cx="10972800" cy="822960"/>
+          </a:xfrm>
+          <a:prstGeom prst="rect">
+            <a:avLst/>
+          </a:prstGeom>
+          <a:noFill/>
+        </p:spPr>
+        <p:txBody>
+          <a:bodyPr wrap="none">
+            <a:spAutoFit/>
+          </a:bodyPr>
+          <a:lstStyle/>
+          <a:p>
+            <a:r>
+              <a:rPr sz="3000" b="1">
+                <a:solidFill>
+                  <a:srgbClr val="25323A"/>
+                </a:solidFill>
+                <a:latin typeface="Segoe UI"/>
+              </a:rPr>
+              <a:t>Sidewall reflections do not corrupt the data</a:t>
+            </a:r>
+          </a:p>
+        </p:txBody>
+      </p:sp>
+      <p:sp>
+        <p:nvSpPr>
+          <p:cNvPr id="4" name="Rectangle 3"/>
+          <p:cNvSpPr/>
+          <p:nvPr/>
+        </p:nvSpPr>
+        <p:spPr>
+          <a:xfrm>
+            <a:off x="658368" y="1444752"/>
+            <a:ext cx="2011680" cy="54864"/>
+          </a:xfrm>
+          <a:prstGeom prst="rect">
+            <a:avLst/>
+          </a:prstGeom>
+          <a:solidFill>
+            <a:srgbClr val="0C8B96"/>
+          </a:solidFill>
+          <a:ln>
+            <a:noFill/>
+          </a:ln>
+          <a:effectLst/>
+        </p:spPr>
+        <p:style>
+          <a:lnRef idx="1">
+            <a:schemeClr val="accent1"/>
+          </a:lnRef>
+          <a:fillRef idx="3">
+            <a:schemeClr val="accent1"/>
+          </a:fillRef>
+          <a:effectRef idx="2">
+            <a:schemeClr val="accent1"/>
+          </a:effectRef>
+          <a:fontRef idx="minor">
+            <a:schemeClr val="lt1"/>
+          </a:fontRef>
+        </p:style>
+        <p:txBody>
+          <a:bodyPr rtlCol="0" anchor="ctr"/>
+          <a:lstStyle/>
+          <a:p>
+            <a:pPr algn="ctr"/>
+          </a:p>
+        </p:txBody>
+      </p:sp>
+      <p:pic>
+        <p:nvPicPr>
+          <p:cNvPr id="5" name="Picture 4" descr="OSU_flume_rebuttal.png"/>
+          <p:cNvPicPr>
+            <a:picLocks noChangeAspect="1"/>
+          </p:cNvPicPr>
+          <p:nvPr/>
+        </p:nvPicPr>
+        <p:blipFill>
+          <a:blip r:embed="rId2"/>
+          <a:stretch>
+            <a:fillRect/>
+          </a:stretch>
+        </p:blipFill>
+        <p:spPr>
+          <a:xfrm>
+            <a:off x="640080" y="1645920"/>
+            <a:ext cx="10927080" cy="4192191"/>
+          </a:xfrm>
+          <a:prstGeom prst="rect">
+            <a:avLst/>
+          </a:prstGeom>
+        </p:spPr>
+      </p:pic>
+      <p:sp>
+        <p:nvSpPr>
+          <p:cNvPr id="6" name="Rectangle 5"/>
+          <p:cNvSpPr/>
+          <p:nvPr/>
+        </p:nvSpPr>
+        <p:spPr>
+          <a:xfrm>
+            <a:off x="777240" y="5943600"/>
+            <a:ext cx="10927080" cy="749808"/>
+          </a:xfrm>
+          <a:prstGeom prst="rect">
+            <a:avLst/>
+          </a:prstGeom>
+          <a:solidFill>
+            <a:srgbClr val="EEF6F7"/>
+          </a:solidFill>
+          <a:ln>
+            <a:noFill/>
+          </a:ln>
+          <a:effectLst/>
+        </p:spPr>
+        <p:style>
+          <a:lnRef idx="1">
+            <a:schemeClr val="accent1"/>
+          </a:lnRef>
+          <a:fillRef idx="3">
+            <a:schemeClr val="accent1"/>
+          </a:fillRef>
+          <a:effectRef idx="2">
+            <a:schemeClr val="accent1"/>
+          </a:effectRef>
+          <a:fontRef idx="minor">
+            <a:schemeClr val="lt1"/>
+          </a:fontRef>
+        </p:style>
+        <p:txBody>
+          <a:bodyPr rtlCol="0" anchor="ctr"/>
+          <a:lstStyle/>
+          <a:p>
+            <a:pPr algn="ctr"/>
+          </a:p>
+        </p:txBody>
+      </p:sp>
+      <p:sp>
+        <p:nvSpPr>
+          <p:cNvPr id="7" name="TextBox 6"/>
+          <p:cNvSpPr txBox="1"/>
+          <p:nvPr/>
+        </p:nvSpPr>
+        <p:spPr>
+          <a:xfrm>
+            <a:off x="960120" y="5980176"/>
+            <a:ext cx="10561320" cy="658368"/>
+          </a:xfrm>
+          <a:prstGeom prst="rect">
+            <a:avLst/>
+          </a:prstGeom>
+          <a:noFill/>
+        </p:spPr>
+        <p:txBody>
+          <a:bodyPr wrap="square" anchor="ctr">
+            <a:spAutoFit/>
+          </a:bodyPr>
+          <a:lstStyle/>
+          <a:p>
+            <a:pPr algn="ctr"/>
+            <a:r>
+              <a:rPr sz="1250" b="1">
+                <a:solidFill>
+                  <a:srgbClr val="0A5560"/>
+                </a:solidFill>
+                <a:latin typeface="Segoe UI"/>
+              </a:rPr>
+              <a:t>The platform barely radiates</a:t>
+            </a:r>
+            <a:r>
+              <a:rPr sz="1250" b="0">
+                <a:solidFill>
+                  <a:srgbClr val="25323A"/>
+                </a:solidFill>
+                <a:latin typeface="Segoe UI"/>
+              </a:rPr>
+              <a:t> (heave radiation = only 3.5% of the damping) → almost no wave to reflect. Walls-in vs walls-out shifts every natural period </a:t>
+            </a:r>
+            <a:r>
+              <a:rPr sz="1250" b="1">
+                <a:solidFill>
+                  <a:srgbClr val="0A5560"/>
+                </a:solidFill>
+                <a:latin typeface="Segoe UI"/>
+              </a:rPr>
+              <a:t>&lt;0.7%</a:t>
+            </a:r>
+            <a:r>
+              <a:rPr sz="1250" b="0">
+                <a:solidFill>
+                  <a:srgbClr val="25323A"/>
+                </a:solidFill>
+                <a:latin typeface="Segoe UI"/>
+              </a:rPr>
+              <a:t> and every wave load </a:t>
+            </a:r>
+            <a:r>
+              <a:rPr sz="1250" b="1">
+                <a:solidFill>
+                  <a:srgbClr val="0A5560"/>
+                </a:solidFill>
+                <a:latin typeface="Segoe UI"/>
+              </a:rPr>
+              <a:t>≤9%</a:t>
+            </a:r>
+            <a:r>
+              <a:rPr sz="1250" b="0">
+                <a:solidFill>
+                  <a:srgbClr val="25323A"/>
+                </a:solidFill>
+                <a:latin typeface="Segoe UI"/>
+              </a:rPr>
+              <a:t> — inside test uncertainty. Only caveat: avoid the transverse cut-ons (2.19 / 1.53 / 1.25 s).</a:t>
             </a:r>
           </a:p>
         </p:txBody>

--- a/studies/osu-test-buoy/Capytaine_analysis_OSU_buoy.pptx
+++ b/studies/osu-test-buoy/Capytaine_analysis_OSU_buoy.pptx
@@ -7334,7 +7334,7 @@
                 </a:solidFill>
                 <a:latin typeface="Segoe UI"/>
               </a:rPr>
-              <a:t>Plate depth barely moves pitch</a:t>
+              <a:t>Plate depth barely moves pitch damping</a:t>
             </a:r>
             <a:r>
               <a:rPr sz="1300" b="0">
@@ -7343,7 +7343,7 @@
                 </a:solidFill>
                 <a:latin typeface="Segoe UI"/>
               </a:rPr>
-              <a:t> (2.10 → 2.14 s over a 4× lever-arm change) or heave — an axial plate meets pitch EDGE-ON, so its broadside added mass &amp; drag (which dominate heave) hardly engage it.  </a:t>
+              <a:t> (ζ 1.5 → 1.7 % over a 4× lever-arm change) or heave: an axial plate meets pitch EDGE-ON, so its broadside added mass &amp; drag hardly engage it. The period moves 2.63 → 2.78 s through C55 (the disc's buoyancy).  </a:t>
             </a:r>
             <a:r>
               <a:rPr sz="1300" b="1">
